--- a/deck/Breeja-Pitch-Deck.pptx
+++ b/deck/Breeja-Pitch-Deck.pptx
@@ -3114,7 +3114,7 @@
             <a:avLst/>
           </a:prstGeom>
           <a:solidFill>
-            <a:srgbClr val="F2E8D5"/>
+            <a:srgbClr val="FDEDE7"/>
           </a:solidFill>
           <a:ln>
             <a:noFill/>
@@ -3158,11 +3158,11 @@
             <a:avLst/>
           </a:prstGeom>
           <a:solidFill>
-            <a:srgbClr val="141A24"/>
+            <a:srgbClr val="0A0A0A"/>
           </a:solidFill>
           <a:ln w="28575">
             <a:solidFill>
-              <a:srgbClr val="141A24"/>
+              <a:srgbClr val="0A0A0A"/>
             </a:solidFill>
           </a:ln>
           <a:effectLst/>
@@ -3189,9 +3189,9 @@
             <a:r>
               <a:rPr sz="1100" b="1">
                 <a:solidFill>
-                  <a:srgbClr val="F4F5F7"/>
-                </a:solidFill>
-                <a:latin typeface="JetBrains Mono"/>
+                  <a:srgbClr val="FFFFFF"/>
+                </a:solidFill>
+                <a:latin typeface="Geist Mono"/>
               </a:rPr>
               <a:t>01</a:t>
             </a:r>
@@ -3213,7 +3213,7 @@
             <a:avLst/>
           </a:prstGeom>
           <a:solidFill>
-            <a:srgbClr val="141A24"/>
+            <a:srgbClr val="0A0A0A"/>
           </a:solidFill>
           <a:ln>
             <a:noFill/>
@@ -3257,11 +3257,11 @@
             <a:avLst/>
           </a:prstGeom>
           <a:solidFill>
-            <a:srgbClr val="5BA4FF"/>
+            <a:srgbClr val="F4623A"/>
           </a:solidFill>
           <a:ln w="28575">
             <a:solidFill>
-              <a:srgbClr val="141A24"/>
+              <a:srgbClr val="0A0A0A"/>
             </a:solidFill>
           </a:ln>
           <a:effectLst/>
@@ -3292,9 +3292,9 @@
             <a:r>
               <a:rPr sz="2000" b="1">
                 <a:solidFill>
-                  <a:srgbClr val="141A24"/>
-                </a:solidFill>
-                <a:latin typeface="Space Grotesk"/>
+                  <a:srgbClr val="0A0A0A"/>
+                </a:solidFill>
+                <a:latin typeface="Geist"/>
               </a:rPr>
               <a:t>B</a:t>
             </a:r>
@@ -3331,9 +3331,9 @@
             <a:r>
               <a:rPr sz="1200" b="1" spc="180">
                 <a:solidFill>
-                  <a:srgbClr val="141A24"/>
-                </a:solidFill>
-                <a:latin typeface="JetBrains Mono"/>
+                  <a:srgbClr val="0A0A0A"/>
+                </a:solidFill>
+                <a:latin typeface="Geist Mono"/>
               </a:rPr>
               <a:t>BREEJA</a:t>
             </a:r>
@@ -3370,9 +3370,9 @@
             <a:r>
               <a:rPr sz="6200" b="1">
                 <a:solidFill>
-                  <a:srgbClr val="141A24"/>
-                </a:solidFill>
-                <a:latin typeface="Space Grotesk"/>
+                  <a:srgbClr val="0A0A0A"/>
+                </a:solidFill>
+                <a:latin typeface="Geist"/>
               </a:rPr>
               <a:t>Money that</a:t>
             </a:r>
@@ -3386,9 +3386,9 @@
             <a:r>
               <a:rPr sz="6200" b="1">
                 <a:solidFill>
-                  <a:srgbClr val="141A24"/>
-                </a:solidFill>
-                <a:latin typeface="Space Grotesk"/>
+                  <a:srgbClr val="0A0A0A"/>
+                </a:solidFill>
+                <a:latin typeface="Geist"/>
               </a:rPr>
               <a:t>moves like</a:t>
             </a:r>
@@ -3402,9 +3402,9 @@
             <a:r>
               <a:rPr sz="6200" b="1">
                 <a:solidFill>
-                  <a:srgbClr val="141A24"/>
-                </a:solidFill>
-                <a:latin typeface="Space Grotesk"/>
+                  <a:srgbClr val="0A0A0A"/>
+                </a:solidFill>
+                <a:latin typeface="Geist"/>
               </a:rPr>
               <a:t>an API call.</a:t>
             </a:r>
@@ -3441,9 +3441,9 @@
             <a:r>
               <a:rPr sz="1900" b="1">
                 <a:solidFill>
-                  <a:srgbClr val="141A24"/>
-                </a:solidFill>
-                <a:latin typeface="Inter"/>
+                  <a:srgbClr val="0A0A0A"/>
+                </a:solidFill>
+                <a:latin typeface="Geist"/>
               </a:rPr>
               <a:t>Cross-chain stablecoin settlement for agents and humans. Gasless, multi-route, one call.</a:t>
             </a:r>
@@ -3465,7 +3465,7 @@
             <a:avLst/>
           </a:prstGeom>
           <a:solidFill>
-            <a:srgbClr val="141A24"/>
+            <a:srgbClr val="0A0A0A"/>
           </a:solidFill>
           <a:ln>
             <a:noFill/>
@@ -3509,7 +3509,7 @@
             <a:avLst/>
           </a:prstGeom>
           <a:solidFill>
-            <a:srgbClr val="141A24"/>
+            <a:srgbClr val="0A0A0A"/>
           </a:solidFill>
           <a:ln>
             <a:noFill/>
@@ -3553,11 +3553,11 @@
             <a:avLst/>
           </a:prstGeom>
           <a:solidFill>
-            <a:srgbClr val="FCFDFE"/>
+            <a:srgbClr val="FFFFFF"/>
           </a:solidFill>
           <a:ln w="28575">
             <a:solidFill>
-              <a:srgbClr val="141A24"/>
+              <a:srgbClr val="0A0A0A"/>
             </a:solidFill>
           </a:ln>
           <a:effectLst/>
@@ -3588,9 +3588,9 @@
             <a:r>
               <a:rPr sz="1100" b="1">
                 <a:solidFill>
-                  <a:srgbClr val="141A24"/>
-                </a:solidFill>
-                <a:latin typeface="JetBrains Mono"/>
+                  <a:srgbClr val="0A0A0A"/>
+                </a:solidFill>
+                <a:latin typeface="Geist Mono"/>
               </a:rPr>
               <a:t>ETHGlobal Online 2026</a:t>
             </a:r>
@@ -3612,7 +3612,7 @@
             <a:avLst/>
           </a:prstGeom>
           <a:solidFill>
-            <a:srgbClr val="141A24"/>
+            <a:srgbClr val="0A0A0A"/>
           </a:solidFill>
           <a:ln>
             <a:noFill/>
@@ -3656,11 +3656,11 @@
             <a:avLst/>
           </a:prstGeom>
           <a:solidFill>
-            <a:srgbClr val="FCFDFE"/>
+            <a:srgbClr val="FFFFFF"/>
           </a:solidFill>
           <a:ln w="28575">
             <a:solidFill>
-              <a:srgbClr val="141A24"/>
+              <a:srgbClr val="0A0A0A"/>
             </a:solidFill>
           </a:ln>
           <a:effectLst/>
@@ -3691,9 +3691,9 @@
             <a:r>
               <a:rPr sz="1100" b="1">
                 <a:solidFill>
-                  <a:srgbClr val="141A24"/>
-                </a:solidFill>
-                <a:latin typeface="JetBrains Mono"/>
+                  <a:srgbClr val="0A0A0A"/>
+                </a:solidFill>
+                <a:latin typeface="Geist Mono"/>
               </a:rPr>
               <a:t>6 chains</a:t>
             </a:r>
@@ -3715,7 +3715,7 @@
             <a:avLst/>
           </a:prstGeom>
           <a:solidFill>
-            <a:srgbClr val="141A24"/>
+            <a:srgbClr val="0A0A0A"/>
           </a:solidFill>
           <a:ln>
             <a:noFill/>
@@ -3759,11 +3759,11 @@
             <a:avLst/>
           </a:prstGeom>
           <a:solidFill>
-            <a:srgbClr val="FCFDFE"/>
+            <a:srgbClr val="FFFFFF"/>
           </a:solidFill>
           <a:ln w="28575">
             <a:solidFill>
-              <a:srgbClr val="141A24"/>
+              <a:srgbClr val="0A0A0A"/>
             </a:solidFill>
           </a:ln>
           <a:effectLst/>
@@ -3794,9 +3794,9 @@
             <a:r>
               <a:rPr sz="1100" b="1">
                 <a:solidFill>
-                  <a:srgbClr val="141A24"/>
-                </a:solidFill>
-                <a:latin typeface="JetBrains Mono"/>
+                  <a:srgbClr val="0A0A0A"/>
+                </a:solidFill>
+                <a:latin typeface="Geist Mono"/>
               </a:rPr>
               <a:t>SDK · MCP · x402</a:t>
             </a:r>
@@ -3836,7 +3836,7 @@
             <a:avLst/>
           </a:prstGeom>
           <a:solidFill>
-            <a:srgbClr val="F4F5F7"/>
+            <a:srgbClr val="FFFFFF"/>
           </a:solidFill>
           <a:ln>
             <a:noFill/>
@@ -3880,11 +3880,11 @@
             <a:avLst/>
           </a:prstGeom>
           <a:solidFill>
-            <a:srgbClr val="141A24"/>
+            <a:srgbClr val="0A0A0A"/>
           </a:solidFill>
           <a:ln w="28575">
             <a:solidFill>
-              <a:srgbClr val="141A24"/>
+              <a:srgbClr val="0A0A0A"/>
             </a:solidFill>
           </a:ln>
           <a:effectLst/>
@@ -3911,9 +3911,9 @@
             <a:r>
               <a:rPr sz="1100" b="1">
                 <a:solidFill>
-                  <a:srgbClr val="F4F5F7"/>
-                </a:solidFill>
-                <a:latin typeface="JetBrains Mono"/>
+                  <a:srgbClr val="FFFFFF"/>
+                </a:solidFill>
+                <a:latin typeface="Geist Mono"/>
               </a:rPr>
               <a:t>10</a:t>
             </a:r>
@@ -3950,9 +3950,9 @@
             <a:r>
               <a:rPr sz="1100" b="1" spc="160">
                 <a:solidFill>
-                  <a:srgbClr val="6B7482"/>
-                </a:solidFill>
-                <a:latin typeface="JetBrains Mono"/>
+                  <a:srgbClr val="6B7280"/>
+                </a:solidFill>
+                <a:latin typeface="Geist Mono"/>
               </a:rPr>
               <a:t>INTEGRATIONS</a:t>
             </a:r>
@@ -3989,9 +3989,9 @@
             <a:r>
               <a:rPr sz="3800" b="1">
                 <a:solidFill>
-                  <a:srgbClr val="141A24"/>
-                </a:solidFill>
-                <a:latin typeface="Space Grotesk"/>
+                  <a:srgbClr val="0A0A0A"/>
+                </a:solidFill>
+                <a:latin typeface="Geist"/>
               </a:rPr>
               <a:t>Each one load-bearing.</a:t>
             </a:r>
@@ -4013,11 +4013,11 @@
             <a:avLst/>
           </a:prstGeom>
           <a:solidFill>
-            <a:srgbClr val="FCFDFE"/>
+            <a:srgbClr val="FFFFFF"/>
           </a:solidFill>
           <a:ln w="28575">
             <a:solidFill>
-              <a:srgbClr val="141A24"/>
+              <a:srgbClr val="0A0A0A"/>
             </a:solidFill>
           </a:ln>
           <a:effectLst/>
@@ -4074,9 +4074,9 @@
             <a:r>
               <a:rPr sz="1500" b="1">
                 <a:solidFill>
-                  <a:srgbClr val="141A24"/>
-                </a:solidFill>
-                <a:latin typeface="Space Grotesk"/>
+                  <a:srgbClr val="0A0A0A"/>
+                </a:solidFill>
+                <a:latin typeface="Geist"/>
               </a:rPr>
               <a:t>Circle / Arc</a:t>
             </a:r>
@@ -4113,9 +4113,9 @@
             <a:r>
               <a:rPr sz="1150" b="0">
                 <a:solidFill>
-                  <a:srgbClr val="6B7482"/>
-                </a:solidFill>
-                <a:latin typeface="Inter"/>
+                  <a:srgbClr val="6B7280"/>
+                </a:solidFill>
+                <a:latin typeface="Geist"/>
               </a:rPr>
               <a:t>CCTP settlement route + native USDC chain</a:t>
             </a:r>
@@ -4137,7 +4137,7 @@
             <a:avLst/>
           </a:prstGeom>
           <a:solidFill>
-            <a:srgbClr val="141A24"/>
+            <a:srgbClr val="0A0A0A"/>
           </a:solidFill>
           <a:ln>
             <a:noFill/>
@@ -4196,9 +4196,9 @@
             <a:r>
               <a:rPr sz="1500" b="1">
                 <a:solidFill>
-                  <a:srgbClr val="141A24"/>
-                </a:solidFill>
-                <a:latin typeface="Space Grotesk"/>
+                  <a:srgbClr val="0A0A0A"/>
+                </a:solidFill>
+                <a:latin typeface="Geist"/>
               </a:rPr>
               <a:t>The Graph</a:t>
             </a:r>
@@ -4235,9 +4235,9 @@
             <a:r>
               <a:rPr sz="1150" b="0">
                 <a:solidFill>
-                  <a:srgbClr val="6B7482"/>
-                </a:solidFill>
-                <a:latin typeface="Inter"/>
+                  <a:srgbClr val="6B7280"/>
+                </a:solidFill>
+                <a:latin typeface="Geist"/>
               </a:rPr>
               <a:t>Indexed payment history across every chain</a:t>
             </a:r>
@@ -4259,7 +4259,7 @@
             <a:avLst/>
           </a:prstGeom>
           <a:solidFill>
-            <a:srgbClr val="141A24"/>
+            <a:srgbClr val="0A0A0A"/>
           </a:solidFill>
           <a:ln>
             <a:noFill/>
@@ -4318,9 +4318,9 @@
             <a:r>
               <a:rPr sz="1500" b="1">
                 <a:solidFill>
-                  <a:srgbClr val="141A24"/>
-                </a:solidFill>
-                <a:latin typeface="Space Grotesk"/>
+                  <a:srgbClr val="0A0A0A"/>
+                </a:solidFill>
+                <a:latin typeface="Geist"/>
               </a:rPr>
               <a:t>Privy</a:t>
             </a:r>
@@ -4357,9 +4357,9 @@
             <a:r>
               <a:rPr sz="1150" b="0">
                 <a:solidFill>
-                  <a:srgbClr val="6B7482"/>
-                </a:solidFill>
-                <a:latin typeface="Inter"/>
+                  <a:srgbClr val="6B7280"/>
+                </a:solidFill>
+                <a:latin typeface="Geist"/>
               </a:rPr>
               <a:t>Embedded wallets and agent server wallets</a:t>
             </a:r>
@@ -4381,7 +4381,7 @@
             <a:avLst/>
           </a:prstGeom>
           <a:solidFill>
-            <a:srgbClr val="141A24"/>
+            <a:srgbClr val="0A0A0A"/>
           </a:solidFill>
           <a:ln>
             <a:noFill/>
@@ -4440,9 +4440,9 @@
             <a:r>
               <a:rPr sz="1500" b="1">
                 <a:solidFill>
-                  <a:srgbClr val="141A24"/>
-                </a:solidFill>
-                <a:latin typeface="Space Grotesk"/>
+                  <a:srgbClr val="0A0A0A"/>
+                </a:solidFill>
+                <a:latin typeface="Geist"/>
               </a:rPr>
               <a:t>ENS</a:t>
             </a:r>
@@ -4479,9 +4479,9 @@
             <a:r>
               <a:rPr sz="1150" b="0">
                 <a:solidFill>
-                  <a:srgbClr val="6B7482"/>
-                </a:solidFill>
-                <a:latin typeface="Inter"/>
+                  <a:srgbClr val="6B7280"/>
+                </a:solidFill>
+                <a:latin typeface="Geist"/>
               </a:rPr>
               <a:t>Agent identity — pay a name, not a hex string</a:t>
             </a:r>
@@ -4503,7 +4503,7 @@
             <a:avLst/>
           </a:prstGeom>
           <a:solidFill>
-            <a:srgbClr val="141A24"/>
+            <a:srgbClr val="0A0A0A"/>
           </a:solidFill>
           <a:ln>
             <a:noFill/>
@@ -4562,9 +4562,9 @@
             <a:r>
               <a:rPr sz="1500" b="1">
                 <a:solidFill>
-                  <a:srgbClr val="141A24"/>
-                </a:solidFill>
-                <a:latin typeface="Space Grotesk"/>
+                  <a:srgbClr val="0A0A0A"/>
+                </a:solidFill>
+                <a:latin typeface="Geist"/>
               </a:rPr>
               <a:t>Ledger</a:t>
             </a:r>
@@ -4601,9 +4601,9 @@
             <a:r>
               <a:rPr sz="1150" b="0">
                 <a:solidFill>
-                  <a:srgbClr val="6B7482"/>
-                </a:solidFill>
-                <a:latin typeface="Inter"/>
+                  <a:srgbClr val="6B7280"/>
+                </a:solidFill>
+                <a:latin typeface="Geist"/>
               </a:rPr>
               <a:t>Hardware-backed release authority</a:t>
             </a:r>
@@ -4625,7 +4625,7 @@
             <a:avLst/>
           </a:prstGeom>
           <a:solidFill>
-            <a:srgbClr val="141A24"/>
+            <a:srgbClr val="0A0A0A"/>
           </a:solidFill>
           <a:ln>
             <a:noFill/>
@@ -4684,9 +4684,9 @@
             <a:r>
               <a:rPr sz="1500" b="1">
                 <a:solidFill>
-                  <a:srgbClr val="141A24"/>
-                </a:solidFill>
-                <a:latin typeface="Space Grotesk"/>
+                  <a:srgbClr val="0A0A0A"/>
+                </a:solidFill>
+                <a:latin typeface="Geist"/>
               </a:rPr>
               <a:t>Hedera</a:t>
             </a:r>
@@ -4723,9 +4723,9 @@
             <a:r>
               <a:rPr sz="1150" b="0">
                 <a:solidFill>
-                  <a:srgbClr val="6B7482"/>
-                </a:solidFill>
-                <a:latin typeface="Inter"/>
+                  <a:srgbClr val="6B7280"/>
+                </a:solidFill>
+                <a:latin typeface="Geist"/>
               </a:rPr>
               <a:t>Source and destination chain</a:t>
             </a:r>
@@ -4747,7 +4747,7 @@
             <a:avLst/>
           </a:prstGeom>
           <a:solidFill>
-            <a:srgbClr val="141A24"/>
+            <a:srgbClr val="0A0A0A"/>
           </a:solidFill>
           <a:ln>
             <a:noFill/>
@@ -4806,9 +4806,9 @@
             <a:r>
               <a:rPr sz="1500" b="1">
                 <a:solidFill>
-                  <a:srgbClr val="141A24"/>
-                </a:solidFill>
-                <a:latin typeface="Space Grotesk"/>
+                  <a:srgbClr val="0A0A0A"/>
+                </a:solidFill>
+                <a:latin typeface="Geist"/>
               </a:rPr>
               <a:t>Bazantic</a:t>
             </a:r>
@@ -4845,9 +4845,9 @@
             <a:r>
               <a:rPr sz="1150" b="0">
                 <a:solidFill>
-                  <a:srgbClr val="6B7482"/>
-                </a:solidFill>
-                <a:latin typeface="Inter"/>
+                  <a:srgbClr val="6B7280"/>
+                </a:solidFill>
+                <a:latin typeface="Geist"/>
               </a:rPr>
               <a:t>Agent-ready SDK and MCP tooling</a:t>
             </a:r>
@@ -4869,7 +4869,7 @@
             <a:avLst/>
           </a:prstGeom>
           <a:solidFill>
-            <a:srgbClr val="141A24"/>
+            <a:srgbClr val="0A0A0A"/>
           </a:solidFill>
           <a:ln>
             <a:noFill/>
@@ -4928,9 +4928,9 @@
             <a:r>
               <a:rPr sz="1500" b="1">
                 <a:solidFill>
-                  <a:srgbClr val="141A24"/>
-                </a:solidFill>
-                <a:latin typeface="Space Grotesk"/>
+                  <a:srgbClr val="0A0A0A"/>
+                </a:solidFill>
+                <a:latin typeface="Geist"/>
               </a:rPr>
               <a:t>World</a:t>
             </a:r>
@@ -4967,9 +4967,9 @@
             <a:r>
               <a:rPr sz="1150" b="0">
                 <a:solidFill>
-                  <a:srgbClr val="6B7482"/>
-                </a:solidFill>
-                <a:latin typeface="Inter"/>
+                  <a:srgbClr val="6B7280"/>
+                </a:solidFill>
+                <a:latin typeface="Geist"/>
               </a:rPr>
               <a:t>Verified human authorizes an agent's spend cap</a:t>
             </a:r>
@@ -5006,9 +5006,9 @@
             <a:r>
               <a:rPr sz="1300" b="0">
                 <a:solidFill>
-                  <a:srgbClr val="6B7482"/>
-                </a:solidFill>
-                <a:latin typeface="Inter"/>
+                  <a:srgbClr val="6B7280"/>
+                </a:solidFill>
+                <a:latin typeface="Geist"/>
               </a:rPr>
               <a:t>Deliberately skipped: AMM and DeFi-position tracks. A swap bolted onto a payment rail is the integration judges see through.</a:t>
             </a:r>
@@ -5048,7 +5048,7 @@
             <a:avLst/>
           </a:prstGeom>
           <a:solidFill>
-            <a:srgbClr val="F4F5F7"/>
+            <a:srgbClr val="FFFFFF"/>
           </a:solidFill>
           <a:ln>
             <a:noFill/>
@@ -5092,11 +5092,11 @@
             <a:avLst/>
           </a:prstGeom>
           <a:solidFill>
-            <a:srgbClr val="141A24"/>
+            <a:srgbClr val="0A0A0A"/>
           </a:solidFill>
           <a:ln w="28575">
             <a:solidFill>
-              <a:srgbClr val="141A24"/>
+              <a:srgbClr val="0A0A0A"/>
             </a:solidFill>
           </a:ln>
           <a:effectLst/>
@@ -5123,9 +5123,9 @@
             <a:r>
               <a:rPr sz="1100" b="1">
                 <a:solidFill>
-                  <a:srgbClr val="F4F5F7"/>
-                </a:solidFill>
-                <a:latin typeface="JetBrains Mono"/>
+                  <a:srgbClr val="FFFFFF"/>
+                </a:solidFill>
+                <a:latin typeface="Geist Mono"/>
               </a:rPr>
               <a:t>11</a:t>
             </a:r>
@@ -5162,9 +5162,9 @@
             <a:r>
               <a:rPr sz="1100" b="1" spc="160">
                 <a:solidFill>
-                  <a:srgbClr val="6B7482"/>
-                </a:solidFill>
-                <a:latin typeface="JetBrains Mono"/>
+                  <a:srgbClr val="6B7280"/>
+                </a:solidFill>
+                <a:latin typeface="Geist Mono"/>
               </a:rPr>
               <a:t>STATUS</a:t>
             </a:r>
@@ -5201,9 +5201,9 @@
             <a:r>
               <a:rPr sz="3800" b="1">
                 <a:solidFill>
-                  <a:srgbClr val="141A24"/>
-                </a:solidFill>
-                <a:latin typeface="Space Grotesk"/>
+                  <a:srgbClr val="0A0A0A"/>
+                </a:solidFill>
+                <a:latin typeface="Geist"/>
               </a:rPr>
               <a:t>Shipped, in flight, next.</a:t>
             </a:r>
@@ -5225,11 +5225,11 @@
             <a:avLst/>
           </a:prstGeom>
           <a:solidFill>
-            <a:srgbClr val="FCFDFE"/>
+            <a:srgbClr val="FFFFFF"/>
           </a:solidFill>
           <a:ln w="28575">
             <a:solidFill>
-              <a:srgbClr val="141A24"/>
+              <a:srgbClr val="0A0A0A"/>
             </a:solidFill>
           </a:ln>
           <a:effectLst/>
@@ -5271,11 +5271,11 @@
             <a:avLst/>
           </a:prstGeom>
           <a:solidFill>
-            <a:srgbClr val="53DCA2"/>
+            <a:srgbClr val="0A0A0A"/>
           </a:solidFill>
-          <a:ln w="28575">
+          <a:ln w="15875">
             <a:solidFill>
-              <a:srgbClr val="141A24"/>
+              <a:srgbClr val="E5E7EB"/>
             </a:solidFill>
           </a:ln>
           <a:effectLst/>
@@ -5332,9 +5332,9 @@
             <a:r>
               <a:rPr sz="1350" b="0">
                 <a:solidFill>
-                  <a:srgbClr val="141A24"/>
-                </a:solidFill>
-                <a:latin typeface="Inter"/>
+                  <a:srgbClr val="0A0A0A"/>
+                </a:solidFill>
+                <a:latin typeface="Geist"/>
               </a:rPr>
               <a:t>EIP-3009 gasless permits, live on real testnets</a:t>
             </a:r>
@@ -5371,9 +5371,9 @@
             <a:r>
               <a:rPr sz="1050" b="1" spc="120">
                 <a:solidFill>
-                  <a:srgbClr val="6B7482"/>
-                </a:solidFill>
-                <a:latin typeface="JetBrains Mono"/>
+                  <a:srgbClr val="6B7280"/>
+                </a:solidFill>
+                <a:latin typeface="Geist Mono"/>
               </a:rPr>
               <a:t>SHIPPED</a:t>
             </a:r>
@@ -5395,7 +5395,7 @@
             <a:avLst/>
           </a:prstGeom>
           <a:solidFill>
-            <a:srgbClr val="141A24"/>
+            <a:srgbClr val="0A0A0A"/>
           </a:solidFill>
           <a:ln>
             <a:noFill/>
@@ -5439,11 +5439,11 @@
             <a:avLst/>
           </a:prstGeom>
           <a:solidFill>
-            <a:srgbClr val="53DCA2"/>
+            <a:srgbClr val="0A0A0A"/>
           </a:solidFill>
-          <a:ln w="28575">
+          <a:ln w="15875">
             <a:solidFill>
-              <a:srgbClr val="141A24"/>
+              <a:srgbClr val="E5E7EB"/>
             </a:solidFill>
           </a:ln>
           <a:effectLst/>
@@ -5500,9 +5500,9 @@
             <a:r>
               <a:rPr sz="1350" b="0">
                 <a:solidFill>
-                  <a:srgbClr val="141A24"/>
-                </a:solidFill>
-                <a:latin typeface="Inter"/>
+                  <a:srgbClr val="0A0A0A"/>
+                </a:solidFill>
+                <a:latin typeface="Geist"/>
               </a:rPr>
               <a:t>Contracts covered by tests, deployed and verified</a:t>
             </a:r>
@@ -5539,9 +5539,9 @@
             <a:r>
               <a:rPr sz="1050" b="1" spc="120">
                 <a:solidFill>
-                  <a:srgbClr val="6B7482"/>
-                </a:solidFill>
-                <a:latin typeface="JetBrains Mono"/>
+                  <a:srgbClr val="6B7280"/>
+                </a:solidFill>
+                <a:latin typeface="Geist Mono"/>
               </a:rPr>
               <a:t>SHIPPED</a:t>
             </a:r>
@@ -5563,7 +5563,7 @@
             <a:avLst/>
           </a:prstGeom>
           <a:solidFill>
-            <a:srgbClr val="141A24"/>
+            <a:srgbClr val="0A0A0A"/>
           </a:solidFill>
           <a:ln>
             <a:noFill/>
@@ -5607,11 +5607,11 @@
             <a:avLst/>
           </a:prstGeom>
           <a:solidFill>
-            <a:srgbClr val="53DCA2"/>
+            <a:srgbClr val="0A0A0A"/>
           </a:solidFill>
-          <a:ln w="28575">
+          <a:ln w="15875">
             <a:solidFill>
-              <a:srgbClr val="141A24"/>
+              <a:srgbClr val="E5E7EB"/>
             </a:solidFill>
           </a:ln>
           <a:effectLst/>
@@ -5668,9 +5668,9 @@
             <a:r>
               <a:rPr sz="1350" b="0">
                 <a:solidFill>
-                  <a:srgbClr val="141A24"/>
-                </a:solidFill>
-                <a:latin typeface="Inter"/>
+                  <a:srgbClr val="0A0A0A"/>
+                </a:solidFill>
+                <a:latin typeface="Geist"/>
               </a:rPr>
               <a:t>Agent-to-agent payment, no browser in the loop</a:t>
             </a:r>
@@ -5707,9 +5707,9 @@
             <a:r>
               <a:rPr sz="1050" b="1" spc="120">
                 <a:solidFill>
-                  <a:srgbClr val="6B7482"/>
-                </a:solidFill>
-                <a:latin typeface="JetBrains Mono"/>
+                  <a:srgbClr val="6B7280"/>
+                </a:solidFill>
+                <a:latin typeface="Geist Mono"/>
               </a:rPr>
               <a:t>SHIPPED</a:t>
             </a:r>
@@ -5731,7 +5731,7 @@
             <a:avLst/>
           </a:prstGeom>
           <a:solidFill>
-            <a:srgbClr val="141A24"/>
+            <a:srgbClr val="0A0A0A"/>
           </a:solidFill>
           <a:ln>
             <a:noFill/>
@@ -5775,11 +5775,11 @@
             <a:avLst/>
           </a:prstGeom>
           <a:solidFill>
-            <a:srgbClr val="FFCC33"/>
+            <a:srgbClr val="F4623A"/>
           </a:solidFill>
-          <a:ln w="28575">
+          <a:ln w="15875">
             <a:solidFill>
-              <a:srgbClr val="141A24"/>
+              <a:srgbClr val="E5E7EB"/>
             </a:solidFill>
           </a:ln>
           <a:effectLst/>
@@ -5836,9 +5836,9 @@
             <a:r>
               <a:rPr sz="1350" b="0">
                 <a:solidFill>
-                  <a:srgbClr val="141A24"/>
-                </a:solidFill>
-                <a:latin typeface="Inter"/>
+                  <a:srgbClr val="0A0A0A"/>
+                </a:solidFill>
+                <a:latin typeface="Geist"/>
               </a:rPr>
               <a:t>Durable state, idempotency, reconciliation</a:t>
             </a:r>
@@ -5875,9 +5875,9 @@
             <a:r>
               <a:rPr sz="1050" b="1" spc="120">
                 <a:solidFill>
-                  <a:srgbClr val="6B7482"/>
-                </a:solidFill>
-                <a:latin typeface="JetBrains Mono"/>
+                  <a:srgbClr val="6B7280"/>
+                </a:solidFill>
+                <a:latin typeface="Geist Mono"/>
               </a:rPr>
               <a:t>IN FLIGHT</a:t>
             </a:r>
@@ -5899,7 +5899,7 @@
             <a:avLst/>
           </a:prstGeom>
           <a:solidFill>
-            <a:srgbClr val="141A24"/>
+            <a:srgbClr val="0A0A0A"/>
           </a:solidFill>
           <a:ln>
             <a:noFill/>
@@ -5943,11 +5943,11 @@
             <a:avLst/>
           </a:prstGeom>
           <a:solidFill>
-            <a:srgbClr val="FFCC33"/>
+            <a:srgbClr val="F4623A"/>
           </a:solidFill>
-          <a:ln w="28575">
+          <a:ln w="15875">
             <a:solidFill>
-              <a:srgbClr val="141A24"/>
+              <a:srgbClr val="E5E7EB"/>
             </a:solidFill>
           </a:ln>
           <a:effectLst/>
@@ -6004,9 +6004,9 @@
             <a:r>
               <a:rPr sz="1350" b="0">
                 <a:solidFill>
-                  <a:srgbClr val="141A24"/>
-                </a:solidFill>
-                <a:latin typeface="Inter"/>
+                  <a:srgbClr val="0A0A0A"/>
+                </a:solidFill>
+                <a:latin typeface="Geist"/>
               </a:rPr>
               <a:t>Multi-chain mesh + CCTP route scoring</a:t>
             </a:r>
@@ -6043,9 +6043,9 @@
             <a:r>
               <a:rPr sz="1050" b="1" spc="120">
                 <a:solidFill>
-                  <a:srgbClr val="6B7482"/>
-                </a:solidFill>
-                <a:latin typeface="JetBrains Mono"/>
+                  <a:srgbClr val="6B7280"/>
+                </a:solidFill>
+                <a:latin typeface="Geist Mono"/>
               </a:rPr>
               <a:t>IN FLIGHT</a:t>
             </a:r>
@@ -6067,7 +6067,7 @@
             <a:avLst/>
           </a:prstGeom>
           <a:solidFill>
-            <a:srgbClr val="141A24"/>
+            <a:srgbClr val="0A0A0A"/>
           </a:solidFill>
           <a:ln>
             <a:noFill/>
@@ -6111,11 +6111,11 @@
             <a:avLst/>
           </a:prstGeom>
           <a:solidFill>
-            <a:srgbClr val="FFCC33"/>
+            <a:srgbClr val="F4623A"/>
           </a:solidFill>
-          <a:ln w="28575">
+          <a:ln w="15875">
             <a:solidFill>
-              <a:srgbClr val="141A24"/>
+              <a:srgbClr val="E5E7EB"/>
             </a:solidFill>
           </a:ln>
           <a:effectLst/>
@@ -6172,9 +6172,9 @@
             <a:r>
               <a:rPr sz="1350" b="0">
                 <a:solidFill>
-                  <a:srgbClr val="141A24"/>
-                </a:solidFill>
-                <a:latin typeface="Inter"/>
+                  <a:srgbClr val="0A0A0A"/>
+                </a:solidFill>
+                <a:latin typeface="Geist"/>
               </a:rPr>
               <a:t>SDK, MCP server, x402 demo</a:t>
             </a:r>
@@ -6211,9 +6211,9 @@
             <a:r>
               <a:rPr sz="1050" b="1" spc="120">
                 <a:solidFill>
-                  <a:srgbClr val="6B7482"/>
-                </a:solidFill>
-                <a:latin typeface="JetBrains Mono"/>
+                  <a:srgbClr val="6B7280"/>
+                </a:solidFill>
+                <a:latin typeface="Geist Mono"/>
               </a:rPr>
               <a:t>IN FLIGHT</a:t>
             </a:r>
@@ -6235,7 +6235,7 @@
             <a:avLst/>
           </a:prstGeom>
           <a:solidFill>
-            <a:srgbClr val="141A24"/>
+            <a:srgbClr val="0A0A0A"/>
           </a:solidFill>
           <a:ln>
             <a:noFill/>
@@ -6279,11 +6279,11 @@
             <a:avLst/>
           </a:prstGeom>
           <a:solidFill>
-            <a:srgbClr val="FCFDFE"/>
+            <a:srgbClr val="FFFFFF"/>
           </a:solidFill>
-          <a:ln w="28575">
+          <a:ln w="15875">
             <a:solidFill>
-              <a:srgbClr val="141A24"/>
+              <a:srgbClr val="E5E7EB"/>
             </a:solidFill>
           </a:ln>
           <a:effectLst/>
@@ -6340,9 +6340,9 @@
             <a:r>
               <a:rPr sz="1350" b="0">
                 <a:solidFill>
-                  <a:srgbClr val="141A24"/>
-                </a:solidFill>
-                <a:latin typeface="Inter"/>
+                  <a:srgbClr val="0A0A0A"/>
+                </a:solidFill>
+                <a:latin typeface="Geist"/>
               </a:rPr>
               <a:t>Bonded watcher network — decentralized release</a:t>
             </a:r>
@@ -6379,9 +6379,9 @@
             <a:r>
               <a:rPr sz="1050" b="1" spc="120">
                 <a:solidFill>
-                  <a:srgbClr val="6B7482"/>
-                </a:solidFill>
-                <a:latin typeface="JetBrains Mono"/>
+                  <a:srgbClr val="6B7280"/>
+                </a:solidFill>
+                <a:latin typeface="Geist Mono"/>
               </a:rPr>
               <a:t>NEXT</a:t>
             </a:r>
@@ -6403,7 +6403,7 @@
             <a:avLst/>
           </a:prstGeom>
           <a:solidFill>
-            <a:srgbClr val="141A24"/>
+            <a:srgbClr val="0A0A0A"/>
           </a:solidFill>
           <a:ln>
             <a:noFill/>
@@ -6447,11 +6447,11 @@
             <a:avLst/>
           </a:prstGeom>
           <a:solidFill>
-            <a:srgbClr val="FCFDFE"/>
+            <a:srgbClr val="FFFFFF"/>
           </a:solidFill>
-          <a:ln w="28575">
+          <a:ln w="15875">
             <a:solidFill>
-              <a:srgbClr val="141A24"/>
+              <a:srgbClr val="E5E7EB"/>
             </a:solidFill>
           </a:ln>
           <a:effectLst/>
@@ -6508,9 +6508,9 @@
             <a:r>
               <a:rPr sz="1350" b="0">
                 <a:solidFill>
-                  <a:srgbClr val="141A24"/>
-                </a:solidFill>
-                <a:latin typeface="Inter"/>
+                  <a:srgbClr val="0A0A0A"/>
+                </a:solidFill>
+                <a:latin typeface="Geist"/>
               </a:rPr>
               <a:t>Mainnet with funded liquidity and multisig custody</a:t>
             </a:r>
@@ -6547,9 +6547,9 @@
             <a:r>
               <a:rPr sz="1050" b="1" spc="120">
                 <a:solidFill>
-                  <a:srgbClr val="6B7482"/>
-                </a:solidFill>
-                <a:latin typeface="JetBrains Mono"/>
+                  <a:srgbClr val="6B7280"/>
+                </a:solidFill>
+                <a:latin typeface="Geist Mono"/>
               </a:rPr>
               <a:t>NEXT</a:t>
             </a:r>
@@ -6589,7 +6589,7 @@
             <a:avLst/>
           </a:prstGeom>
           <a:solidFill>
-            <a:srgbClr val="141A24"/>
+            <a:srgbClr val="0A0A0A"/>
           </a:solidFill>
           <a:ln>
             <a:noFill/>
@@ -6633,11 +6633,11 @@
             <a:avLst/>
           </a:prstGeom>
           <a:solidFill>
-            <a:srgbClr val="F4F5F7"/>
+            <a:srgbClr val="FFFFFF"/>
           </a:solidFill>
           <a:ln w="28575">
             <a:solidFill>
-              <a:srgbClr val="141A24"/>
+              <a:srgbClr val="0A0A0A"/>
             </a:solidFill>
           </a:ln>
           <a:effectLst/>
@@ -6664,9 +6664,9 @@
             <a:r>
               <a:rPr sz="1100" b="1">
                 <a:solidFill>
-                  <a:srgbClr val="141A24"/>
-                </a:solidFill>
-                <a:latin typeface="JetBrains Mono"/>
+                  <a:srgbClr val="0A0A0A"/>
+                </a:solidFill>
+                <a:latin typeface="Geist Mono"/>
               </a:rPr>
               <a:t>12</a:t>
             </a:r>
@@ -6703,9 +6703,9 @@
             <a:r>
               <a:rPr sz="1100" b="1" spc="160">
                 <a:solidFill>
-                  <a:srgbClr val="5BA4FF"/>
-                </a:solidFill>
-                <a:latin typeface="JetBrains Mono"/>
+                  <a:srgbClr val="F4623A"/>
+                </a:solidFill>
+                <a:latin typeface="Geist Mono"/>
               </a:rPr>
               <a:t>THE ASK</a:t>
             </a:r>
@@ -6742,9 +6742,9 @@
             <a:r>
               <a:rPr sz="4200" b="1">
                 <a:solidFill>
-                  <a:srgbClr val="F4F5F7"/>
-                </a:solidFill>
-                <a:latin typeface="Space Grotesk"/>
+                  <a:srgbClr val="FFFFFF"/>
+                </a:solidFill>
+                <a:latin typeface="Geist"/>
               </a:rPr>
               <a:t>Agents are about to need</a:t>
             </a:r>
@@ -6758,9 +6758,9 @@
             <a:r>
               <a:rPr sz="4200" b="1">
                 <a:solidFill>
-                  <a:srgbClr val="F4F5F7"/>
-                </a:solidFill>
-                <a:latin typeface="Space Grotesk"/>
+                  <a:srgbClr val="FFFFFF"/>
+                </a:solidFill>
+                <a:latin typeface="Geist"/>
               </a:rPr>
               <a:t>a way to pay each other.</a:t>
             </a:r>
@@ -6799,7 +6799,7 @@
                 <a:solidFill>
                   <a:srgbClr val="C3CCD8"/>
                 </a:solidFill>
-                <a:latin typeface="Inter"/>
+                <a:latin typeface="Geist"/>
               </a:rPr>
               <a:t>Breeja is that rail — and it works for people too, through the same contracts.</a:t>
             </a:r>
@@ -6823,7 +6823,7 @@
           <a:noFill/>
           <a:ln w="28575">
             <a:solidFill>
-              <a:srgbClr val="F4F5F7"/>
+              <a:srgbClr val="FFFFFF"/>
             </a:solidFill>
           </a:ln>
           <a:effectLst/>
@@ -6880,9 +6880,9 @@
             <a:r>
               <a:rPr sz="1100" b="1" spc="120">
                 <a:solidFill>
-                  <a:srgbClr val="5BA4FF"/>
-                </a:solidFill>
-                <a:latin typeface="JetBrains Mono"/>
+                  <a:srgbClr val="F4623A"/>
+                </a:solidFill>
+                <a:latin typeface="Geist Mono"/>
               </a:rPr>
               <a:t>TRY IT</a:t>
             </a:r>
@@ -6919,9 +6919,9 @@
             <a:r>
               <a:rPr sz="1300" b="0">
                 <a:solidFill>
-                  <a:srgbClr val="F4F5F7"/>
-                </a:solidFill>
-                <a:latin typeface="Inter"/>
+                  <a:srgbClr val="FFFFFF"/>
+                </a:solidFill>
+                <a:latin typeface="Geist"/>
               </a:rPr>
               <a:t>Install the SDK and settle a cross-chain payment in one call.</a:t>
             </a:r>
@@ -6945,7 +6945,7 @@
           <a:noFill/>
           <a:ln w="28575">
             <a:solidFill>
-              <a:srgbClr val="F4F5F7"/>
+              <a:srgbClr val="FFFFFF"/>
             </a:solidFill>
           </a:ln>
           <a:effectLst/>
@@ -7002,9 +7002,9 @@
             <a:r>
               <a:rPr sz="1100" b="1" spc="120">
                 <a:solidFill>
-                  <a:srgbClr val="5BA4FF"/>
-                </a:solidFill>
-                <a:latin typeface="JetBrains Mono"/>
+                  <a:srgbClr val="F4623A"/>
+                </a:solidFill>
+                <a:latin typeface="Geist Mono"/>
               </a:rPr>
               <a:t>PLUG IN</a:t>
             </a:r>
@@ -7041,9 +7041,9 @@
             <a:r>
               <a:rPr sz="1300" b="0">
                 <a:solidFill>
-                  <a:srgbClr val="F4F5F7"/>
-                </a:solidFill>
-                <a:latin typeface="Inter"/>
+                  <a:srgbClr val="FFFFFF"/>
+                </a:solidFill>
+                <a:latin typeface="Geist"/>
               </a:rPr>
               <a:t>Add the MCP server and let your agent pay across chains today.</a:t>
             </a:r>
@@ -7067,7 +7067,7 @@
           <a:noFill/>
           <a:ln w="28575">
             <a:solidFill>
-              <a:srgbClr val="F4F5F7"/>
+              <a:srgbClr val="FFFFFF"/>
             </a:solidFill>
           </a:ln>
           <a:effectLst/>
@@ -7124,9 +7124,9 @@
             <a:r>
               <a:rPr sz="1100" b="1" spc="120">
                 <a:solidFill>
-                  <a:srgbClr val="5BA4FF"/>
-                </a:solidFill>
-                <a:latin typeface="JetBrains Mono"/>
+                  <a:srgbClr val="F4623A"/>
+                </a:solidFill>
+                <a:latin typeface="Geist Mono"/>
               </a:rPr>
               <a:t>BUILD ON IT</a:t>
             </a:r>
@@ -7163,9 +7163,9 @@
             <a:r>
               <a:rPr sz="1300" b="0">
                 <a:solidFill>
-                  <a:srgbClr val="F4F5F7"/>
-                </a:solidFill>
-                <a:latin typeface="Inter"/>
+                  <a:srgbClr val="FFFFFF"/>
+                </a:solidFill>
+                <a:latin typeface="Geist"/>
               </a:rPr>
               <a:t>Use Breeja as the settlement leg behind your own x402 endpoint.</a:t>
             </a:r>
@@ -7205,7 +7205,7 @@
             <a:avLst/>
           </a:prstGeom>
           <a:solidFill>
-            <a:srgbClr val="F4F5F7"/>
+            <a:srgbClr val="FFFFFF"/>
           </a:solidFill>
           <a:ln>
             <a:noFill/>
@@ -7249,11 +7249,11 @@
             <a:avLst/>
           </a:prstGeom>
           <a:solidFill>
-            <a:srgbClr val="141A24"/>
+            <a:srgbClr val="0A0A0A"/>
           </a:solidFill>
           <a:ln w="28575">
             <a:solidFill>
-              <a:srgbClr val="141A24"/>
+              <a:srgbClr val="0A0A0A"/>
             </a:solidFill>
           </a:ln>
           <a:effectLst/>
@@ -7280,9 +7280,9 @@
             <a:r>
               <a:rPr sz="1100" b="1">
                 <a:solidFill>
-                  <a:srgbClr val="F4F5F7"/>
-                </a:solidFill>
-                <a:latin typeface="JetBrains Mono"/>
+                  <a:srgbClr val="FFFFFF"/>
+                </a:solidFill>
+                <a:latin typeface="Geist Mono"/>
               </a:rPr>
               <a:t>02</a:t>
             </a:r>
@@ -7319,9 +7319,9 @@
             <a:r>
               <a:rPr sz="1100" b="1" spc="160">
                 <a:solidFill>
-                  <a:srgbClr val="6B7482"/>
-                </a:solidFill>
-                <a:latin typeface="JetBrains Mono"/>
+                  <a:srgbClr val="6B7280"/>
+                </a:solidFill>
+                <a:latin typeface="Geist Mono"/>
               </a:rPr>
               <a:t>THE PROBLEM</a:t>
             </a:r>
@@ -7358,9 +7358,9 @@
             <a:r>
               <a:rPr sz="3800" b="1">
                 <a:solidFill>
-                  <a:srgbClr val="141A24"/>
-                </a:solidFill>
-                <a:latin typeface="Space Grotesk"/>
+                  <a:srgbClr val="0A0A0A"/>
+                </a:solidFill>
+                <a:latin typeface="Geist"/>
               </a:rPr>
               <a:t>Agents can think. They can't pay.</a:t>
             </a:r>
@@ -7397,9 +7397,9 @@
             <a:r>
               <a:rPr sz="1600" b="0">
                 <a:solidFill>
-                  <a:srgbClr val="6B7482"/>
-                </a:solidFill>
-                <a:latin typeface="Inter"/>
+                  <a:srgbClr val="6B7280"/>
+                </a:solidFill>
+                <a:latin typeface="Geist"/>
               </a:rPr>
               <a:t>An AI agent that owes another agent $5 for an API call has no way to settle it across chains. Neither does a person holding USDC on the wrong network.</a:t>
             </a:r>
@@ -7421,11 +7421,11 @@
             <a:avLst/>
           </a:prstGeom>
           <a:solidFill>
-            <a:srgbClr val="FCFDFE"/>
+            <a:srgbClr val="FFFFFF"/>
           </a:solidFill>
           <a:ln w="28575">
             <a:solidFill>
-              <a:srgbClr val="141A24"/>
+              <a:srgbClr val="0A0A0A"/>
             </a:solidFill>
           </a:ln>
           <a:effectLst/>
@@ -7467,11 +7467,11 @@
             <a:avLst/>
           </a:prstGeom>
           <a:solidFill>
-            <a:srgbClr val="141A24"/>
+            <a:srgbClr val="0A0A0A"/>
           </a:solidFill>
           <a:ln w="28575">
             <a:solidFill>
-              <a:srgbClr val="141A24"/>
+              <a:srgbClr val="0A0A0A"/>
             </a:solidFill>
           </a:ln>
           <a:effectLst/>
@@ -7502,9 +7502,9 @@
             <a:r>
               <a:rPr sz="1200" b="1">
                 <a:solidFill>
-                  <a:srgbClr val="F4F5F7"/>
-                </a:solidFill>
-                <a:latin typeface="JetBrains Mono"/>
+                  <a:srgbClr val="FFFFFF"/>
+                </a:solidFill>
+                <a:latin typeface="Geist Mono"/>
               </a:rPr>
               <a:t>01</a:t>
             </a:r>
@@ -7541,9 +7541,9 @@
             <a:r>
               <a:rPr sz="1600" b="1">
                 <a:solidFill>
-                  <a:srgbClr val="141A24"/>
-                </a:solidFill>
-                <a:latin typeface="Inter"/>
+                  <a:srgbClr val="0A0A0A"/>
+                </a:solidFill>
+                <a:latin typeface="Geist"/>
               </a:rPr>
               <a:t>Gas is a dead end</a:t>
             </a:r>
@@ -7580,9 +7580,9 @@
             <a:r>
               <a:rPr sz="1300" b="0">
                 <a:solidFill>
-                  <a:srgbClr val="6B7482"/>
-                </a:solidFill>
-                <a:latin typeface="Inter"/>
+                  <a:srgbClr val="6B7280"/>
+                </a:solidFill>
+                <a:latin typeface="Geist"/>
               </a:rPr>
               <a:t>You need the native token of a chain you've never touched, before you can move the stablecoin you already hold.</a:t>
             </a:r>
@@ -7604,11 +7604,11 @@
             <a:avLst/>
           </a:prstGeom>
           <a:solidFill>
-            <a:srgbClr val="FCFDFE"/>
+            <a:srgbClr val="FFFFFF"/>
           </a:solidFill>
           <a:ln w="28575">
             <a:solidFill>
-              <a:srgbClr val="141A24"/>
+              <a:srgbClr val="0A0A0A"/>
             </a:solidFill>
           </a:ln>
           <a:effectLst/>
@@ -7650,11 +7650,11 @@
             <a:avLst/>
           </a:prstGeom>
           <a:solidFill>
-            <a:srgbClr val="141A24"/>
+            <a:srgbClr val="0A0A0A"/>
           </a:solidFill>
           <a:ln w="28575">
             <a:solidFill>
-              <a:srgbClr val="141A24"/>
+              <a:srgbClr val="0A0A0A"/>
             </a:solidFill>
           </a:ln>
           <a:effectLst/>
@@ -7685,9 +7685,9 @@
             <a:r>
               <a:rPr sz="1200" b="1">
                 <a:solidFill>
-                  <a:srgbClr val="F4F5F7"/>
-                </a:solidFill>
-                <a:latin typeface="JetBrains Mono"/>
+                  <a:srgbClr val="FFFFFF"/>
+                </a:solidFill>
+                <a:latin typeface="Geist Mono"/>
               </a:rPr>
               <a:t>02</a:t>
             </a:r>
@@ -7724,9 +7724,9 @@
             <a:r>
               <a:rPr sz="1600" b="1">
                 <a:solidFill>
-                  <a:srgbClr val="141A24"/>
-                </a:solidFill>
-                <a:latin typeface="Inter"/>
+                  <a:srgbClr val="0A0A0A"/>
+                </a:solidFill>
+                <a:latin typeface="Geist"/>
               </a:rPr>
               <a:t>Bridges assume a browser</a:t>
             </a:r>
@@ -7763,9 +7763,9 @@
             <a:r>
               <a:rPr sz="1300" b="0">
                 <a:solidFill>
-                  <a:srgbClr val="6B7482"/>
-                </a:solidFill>
-                <a:latin typeface="Inter"/>
+                  <a:srgbClr val="6B7280"/>
+                </a:solidFill>
+                <a:latin typeface="Geist"/>
               </a:rPr>
               <a:t>Connect wallet, approve, sign, wait. There is no programmatic path for software that has no hands.</a:t>
             </a:r>
@@ -7787,11 +7787,11 @@
             <a:avLst/>
           </a:prstGeom>
           <a:solidFill>
-            <a:srgbClr val="FCFDFE"/>
+            <a:srgbClr val="FFFFFF"/>
           </a:solidFill>
           <a:ln w="28575">
             <a:solidFill>
-              <a:srgbClr val="141A24"/>
+              <a:srgbClr val="0A0A0A"/>
             </a:solidFill>
           </a:ln>
           <a:effectLst/>
@@ -7833,11 +7833,11 @@
             <a:avLst/>
           </a:prstGeom>
           <a:solidFill>
-            <a:srgbClr val="141A24"/>
+            <a:srgbClr val="0A0A0A"/>
           </a:solidFill>
           <a:ln w="28575">
             <a:solidFill>
-              <a:srgbClr val="141A24"/>
+              <a:srgbClr val="0A0A0A"/>
             </a:solidFill>
           </a:ln>
           <a:effectLst/>
@@ -7868,9 +7868,9 @@
             <a:r>
               <a:rPr sz="1200" b="1">
                 <a:solidFill>
-                  <a:srgbClr val="F4F5F7"/>
-                </a:solidFill>
-                <a:latin typeface="JetBrains Mono"/>
+                  <a:srgbClr val="FFFFFF"/>
+                </a:solidFill>
+                <a:latin typeface="Geist Mono"/>
               </a:rPr>
               <a:t>03</a:t>
             </a:r>
@@ -7907,9 +7907,9 @@
             <a:r>
               <a:rPr sz="1600" b="1">
                 <a:solidFill>
-                  <a:srgbClr val="141A24"/>
-                </a:solidFill>
-                <a:latin typeface="Inter"/>
+                  <a:srgbClr val="0A0A0A"/>
+                </a:solidFill>
+                <a:latin typeface="Geist"/>
               </a:rPr>
               <a:t>Bridges assume you pay yourself</a:t>
             </a:r>
@@ -7946,9 +7946,9 @@
             <a:r>
               <a:rPr sz="1300" b="0">
                 <a:solidFill>
-                  <a:srgbClr val="6B7482"/>
-                </a:solidFill>
-                <a:latin typeface="Inter"/>
+                  <a:srgbClr val="6B7280"/>
+                </a:solidFill>
+                <a:latin typeface="Geist"/>
               </a:rPr>
               <a:t>Most move funds between your own addresses. Paying someone else on another chain is a different product.</a:t>
             </a:r>
@@ -7988,7 +7988,7 @@
             <a:avLst/>
           </a:prstGeom>
           <a:solidFill>
-            <a:srgbClr val="F4F5F7"/>
+            <a:srgbClr val="FFFFFF"/>
           </a:solidFill>
           <a:ln>
             <a:noFill/>
@@ -8032,11 +8032,11 @@
             <a:avLst/>
           </a:prstGeom>
           <a:solidFill>
-            <a:srgbClr val="141A24"/>
+            <a:srgbClr val="0A0A0A"/>
           </a:solidFill>
           <a:ln w="28575">
             <a:solidFill>
-              <a:srgbClr val="141A24"/>
+              <a:srgbClr val="0A0A0A"/>
             </a:solidFill>
           </a:ln>
           <a:effectLst/>
@@ -8063,9 +8063,9 @@
             <a:r>
               <a:rPr sz="1100" b="1">
                 <a:solidFill>
-                  <a:srgbClr val="F4F5F7"/>
-                </a:solidFill>
-                <a:latin typeface="JetBrains Mono"/>
+                  <a:srgbClr val="FFFFFF"/>
+                </a:solidFill>
+                <a:latin typeface="Geist Mono"/>
               </a:rPr>
               <a:t>03</a:t>
             </a:r>
@@ -8102,9 +8102,9 @@
             <a:r>
               <a:rPr sz="1100" b="1" spc="160">
                 <a:solidFill>
-                  <a:srgbClr val="6B7482"/>
-                </a:solidFill>
-                <a:latin typeface="JetBrains Mono"/>
+                  <a:srgbClr val="6B7280"/>
+                </a:solidFill>
+                <a:latin typeface="Geist Mono"/>
               </a:rPr>
               <a:t>THE PRODUCT</a:t>
             </a:r>
@@ -8141,9 +8141,9 @@
             <a:r>
               <a:rPr sz="3800" b="1">
                 <a:solidFill>
-                  <a:srgbClr val="141A24"/>
-                </a:solidFill>
-                <a:latin typeface="Space Grotesk"/>
+                  <a:srgbClr val="0A0A0A"/>
+                </a:solidFill>
+                <a:latin typeface="Geist"/>
               </a:rPr>
               <a:t>A settlement rail with four front doors.</a:t>
             </a:r>
@@ -8180,9 +8180,9 @@
             <a:r>
               <a:rPr sz="1600" b="0">
                 <a:solidFill>
-                  <a:srgbClr val="6B7482"/>
-                </a:solidFill>
-                <a:latin typeface="Inter"/>
+                  <a:srgbClr val="6B7280"/>
+                </a:solidFill>
+                <a:latin typeface="Geist"/>
               </a:rPr>
               <a:t>One signature. No gas. Funds land with anyone the payer names, on any supported chain.</a:t>
             </a:r>
@@ -8204,11 +8204,11 @@
             <a:avLst/>
           </a:prstGeom>
           <a:solidFill>
-            <a:srgbClr val="FCFDFE"/>
+            <a:srgbClr val="FFFFFF"/>
           </a:solidFill>
           <a:ln w="28575">
             <a:solidFill>
-              <a:srgbClr val="141A24"/>
+              <a:srgbClr val="0A0A0A"/>
             </a:solidFill>
           </a:ln>
           <a:effectLst/>
@@ -8265,9 +8265,9 @@
             <a:r>
               <a:rPr sz="1000" b="1" spc="140">
                 <a:solidFill>
-                  <a:srgbClr val="6B7482"/>
-                </a:solidFill>
-                <a:latin typeface="JetBrains Mono"/>
+                  <a:srgbClr val="6B7280"/>
+                </a:solidFill>
+                <a:latin typeface="Geist Mono"/>
               </a:rPr>
               <a:t>STEP 01</a:t>
             </a:r>
@@ -8304,9 +8304,9 @@
             <a:r>
               <a:rPr sz="1700" b="1">
                 <a:solidFill>
-                  <a:srgbClr val="141A24"/>
-                </a:solidFill>
-                <a:latin typeface="Space Grotesk"/>
+                  <a:srgbClr val="0A0A0A"/>
+                </a:solidFill>
+                <a:latin typeface="Geist"/>
               </a:rPr>
               <a:t>Sign</a:t>
             </a:r>
@@ -8343,9 +8343,9 @@
             <a:r>
               <a:rPr sz="1200" b="0">
                 <a:solidFill>
-                  <a:srgbClr val="6B7482"/>
-                </a:solidFill>
-                <a:latin typeface="Inter"/>
+                  <a:srgbClr val="6B7280"/>
+                </a:solidFill>
+                <a:latin typeface="Geist"/>
               </a:rPr>
               <a:t>Payer signs an EIP-3009 permit. A signature, not a transaction.</a:t>
             </a:r>
@@ -8367,7 +8367,7 @@
             <a:avLst/>
           </a:prstGeom>
           <a:solidFill>
-            <a:srgbClr val="141A24"/>
+            <a:srgbClr val="0A0A0A"/>
           </a:solidFill>
           <a:ln>
             <a:noFill/>
@@ -8426,9 +8426,9 @@
             <a:r>
               <a:rPr sz="1000" b="1" spc="140">
                 <a:solidFill>
-                  <a:srgbClr val="6B7482"/>
-                </a:solidFill>
-                <a:latin typeface="JetBrains Mono"/>
+                  <a:srgbClr val="6B7280"/>
+                </a:solidFill>
+                <a:latin typeface="Geist Mono"/>
               </a:rPr>
               <a:t>STEP 02</a:t>
             </a:r>
@@ -8465,9 +8465,9 @@
             <a:r>
               <a:rPr sz="1700" b="1">
                 <a:solidFill>
-                  <a:srgbClr val="141A24"/>
-                </a:solidFill>
-                <a:latin typeface="Space Grotesk"/>
+                  <a:srgbClr val="0A0A0A"/>
+                </a:solidFill>
+                <a:latin typeface="Geist"/>
               </a:rPr>
               <a:t>Relay</a:t>
             </a:r>
@@ -8504,9 +8504,9 @@
             <a:r>
               <a:rPr sz="1200" b="0">
                 <a:solidFill>
-                  <a:srgbClr val="6B7482"/>
-                </a:solidFill>
-                <a:latin typeface="Inter"/>
+                  <a:srgbClr val="6B7280"/>
+                </a:solidFill>
+                <a:latin typeface="Geist"/>
               </a:rPr>
               <a:t>Breeja submits the deposit on the source chain and pays the gas.</a:t>
             </a:r>
@@ -8528,7 +8528,7 @@
             <a:avLst/>
           </a:prstGeom>
           <a:solidFill>
-            <a:srgbClr val="141A24"/>
+            <a:srgbClr val="0A0A0A"/>
           </a:solidFill>
           <a:ln>
             <a:noFill/>
@@ -8587,9 +8587,9 @@
             <a:r>
               <a:rPr sz="1000" b="1" spc="140">
                 <a:solidFill>
-                  <a:srgbClr val="6B7482"/>
-                </a:solidFill>
-                <a:latin typeface="JetBrains Mono"/>
+                  <a:srgbClr val="6B7280"/>
+                </a:solidFill>
+                <a:latin typeface="Geist Mono"/>
               </a:rPr>
               <a:t>STEP 03</a:t>
             </a:r>
@@ -8626,9 +8626,9 @@
             <a:r>
               <a:rPr sz="1700" b="1">
                 <a:solidFill>
-                  <a:srgbClr val="141A24"/>
-                </a:solidFill>
-                <a:latin typeface="Space Grotesk"/>
+                  <a:srgbClr val="0A0A0A"/>
+                </a:solidFill>
+                <a:latin typeface="Geist"/>
               </a:rPr>
               <a:t>Route</a:t>
             </a:r>
@@ -8665,9 +8665,9 @@
             <a:r>
               <a:rPr sz="1200" b="0">
                 <a:solidFill>
-                  <a:srgbClr val="6B7482"/>
-                </a:solidFill>
-                <a:latin typeface="Inter"/>
+                  <a:srgbClr val="6B7280"/>
+                </a:solidFill>
+                <a:latin typeface="Geist"/>
               </a:rPr>
               <a:t>Router scores live gas, liquidity and preference, then picks a path.</a:t>
             </a:r>
@@ -8689,7 +8689,7 @@
             <a:avLst/>
           </a:prstGeom>
           <a:solidFill>
-            <a:srgbClr val="141A24"/>
+            <a:srgbClr val="0A0A0A"/>
           </a:solidFill>
           <a:ln>
             <a:noFill/>
@@ -8748,9 +8748,9 @@
             <a:r>
               <a:rPr sz="1000" b="1" spc="140">
                 <a:solidFill>
-                  <a:srgbClr val="6B7482"/>
-                </a:solidFill>
-                <a:latin typeface="JetBrains Mono"/>
+                  <a:srgbClr val="6B7280"/>
+                </a:solidFill>
+                <a:latin typeface="Geist Mono"/>
               </a:rPr>
               <a:t>STEP 04</a:t>
             </a:r>
@@ -8787,9 +8787,9 @@
             <a:r>
               <a:rPr sz="1700" b="1">
                 <a:solidFill>
-                  <a:srgbClr val="141A24"/>
-                </a:solidFill>
-                <a:latin typeface="Space Grotesk"/>
+                  <a:srgbClr val="0A0A0A"/>
+                </a:solidFill>
+                <a:latin typeface="Geist"/>
               </a:rPr>
               <a:t>Settle</a:t>
             </a:r>
@@ -8826,9 +8826,9 @@
             <a:r>
               <a:rPr sz="1200" b="0">
                 <a:solidFill>
-                  <a:srgbClr val="6B7482"/>
-                </a:solidFill>
-                <a:latin typeface="Inter"/>
+                  <a:srgbClr val="6B7280"/>
+                </a:solidFill>
+                <a:latin typeface="Geist"/>
               </a:rPr>
               <a:t>Funds released to the named recipient on the destination chain.</a:t>
             </a:r>
@@ -8850,7 +8850,7 @@
             <a:avLst/>
           </a:prstGeom>
           <a:solidFill>
-            <a:srgbClr val="141A24"/>
+            <a:srgbClr val="0A0A0A"/>
           </a:solidFill>
           <a:ln>
             <a:noFill/>
@@ -8894,11 +8894,11 @@
             <a:avLst/>
           </a:prstGeom>
           <a:solidFill>
-            <a:srgbClr val="53DCA2"/>
+            <a:srgbClr val="FDEDE7"/>
           </a:solidFill>
           <a:ln w="28575">
             <a:solidFill>
-              <a:srgbClr val="141A24"/>
+              <a:srgbClr val="0A0A0A"/>
             </a:solidFill>
           </a:ln>
           <a:effectLst/>
@@ -8929,9 +8929,9 @@
             <a:r>
               <a:rPr sz="1400" b="1">
                 <a:solidFill>
-                  <a:srgbClr val="141A24"/>
-                </a:solidFill>
-                <a:latin typeface="JetBrains Mono"/>
+                  <a:srgbClr val="0A0A0A"/>
+                </a:solidFill>
+                <a:latin typeface="Geist Mono"/>
               </a:rPr>
               <a:t>Neither payer nor recipient ever holds a gas token.</a:t>
             </a:r>
@@ -8971,7 +8971,7 @@
             <a:avLst/>
           </a:prstGeom>
           <a:solidFill>
-            <a:srgbClr val="F4F5F7"/>
+            <a:srgbClr val="FFFFFF"/>
           </a:solidFill>
           <a:ln>
             <a:noFill/>
@@ -9015,11 +9015,11 @@
             <a:avLst/>
           </a:prstGeom>
           <a:solidFill>
-            <a:srgbClr val="141A24"/>
+            <a:srgbClr val="0A0A0A"/>
           </a:solidFill>
           <a:ln w="28575">
             <a:solidFill>
-              <a:srgbClr val="141A24"/>
+              <a:srgbClr val="0A0A0A"/>
             </a:solidFill>
           </a:ln>
           <a:effectLst/>
@@ -9046,9 +9046,9 @@
             <a:r>
               <a:rPr sz="1100" b="1">
                 <a:solidFill>
-                  <a:srgbClr val="F4F5F7"/>
-                </a:solidFill>
-                <a:latin typeface="JetBrains Mono"/>
+                  <a:srgbClr val="FFFFFF"/>
+                </a:solidFill>
+                <a:latin typeface="Geist Mono"/>
               </a:rPr>
               <a:t>04</a:t>
             </a:r>
@@ -9085,9 +9085,9 @@
             <a:r>
               <a:rPr sz="1100" b="1" spc="160">
                 <a:solidFill>
-                  <a:srgbClr val="6B7482"/>
-                </a:solidFill>
-                <a:latin typeface="JetBrains Mono"/>
+                  <a:srgbClr val="6B7280"/>
+                </a:solidFill>
+                <a:latin typeface="Geist Mono"/>
               </a:rPr>
               <a:t>SAME RAIL, FOUR CALLERS</a:t>
             </a:r>
@@ -9124,9 +9124,9 @@
             <a:r>
               <a:rPr sz="3800" b="1">
                 <a:solidFill>
-                  <a:srgbClr val="141A24"/>
-                </a:solidFill>
-                <a:latin typeface="Space Grotesk"/>
+                  <a:srgbClr val="0A0A0A"/>
+                </a:solidFill>
+                <a:latin typeface="Geist"/>
               </a:rPr>
               <a:t>Built for software first.</a:t>
             </a:r>
@@ -9148,7 +9148,7 @@
             <a:avLst/>
           </a:prstGeom>
           <a:solidFill>
-            <a:srgbClr val="141A24"/>
+            <a:srgbClr val="0A0A0A"/>
           </a:solidFill>
           <a:ln>
             <a:noFill/>
@@ -9192,11 +9192,11 @@
             <a:avLst/>
           </a:prstGeom>
           <a:solidFill>
-            <a:srgbClr val="FCFDFE"/>
+            <a:srgbClr val="FFFFFF"/>
           </a:solidFill>
           <a:ln w="28575">
             <a:solidFill>
-              <a:srgbClr val="141A24"/>
+              <a:srgbClr val="0A0A0A"/>
             </a:solidFill>
           </a:ln>
           <a:effectLst/>
@@ -9238,11 +9238,11 @@
             <a:avLst/>
           </a:prstGeom>
           <a:solidFill>
-            <a:srgbClr val="5BA4FF"/>
+            <a:srgbClr val="FDEDE7"/>
           </a:solidFill>
           <a:ln w="28575">
             <a:solidFill>
-              <a:srgbClr val="141A24"/>
+              <a:srgbClr val="0A0A0A"/>
             </a:solidFill>
           </a:ln>
           <a:effectLst/>
@@ -9273,9 +9273,9 @@
             <a:r>
               <a:rPr sz="1100" b="1" spc="120">
                 <a:solidFill>
-                  <a:srgbClr val="141A24"/>
-                </a:solidFill>
-                <a:latin typeface="JetBrains Mono"/>
+                  <a:srgbClr val="F4623A"/>
+                </a:solidFill>
+                <a:latin typeface="Geist Mono"/>
               </a:rPr>
               <a:t>Human · Web app</a:t>
             </a:r>
@@ -9312,9 +9312,9 @@
             <a:r>
               <a:rPr sz="1300" b="0">
                 <a:solidFill>
-                  <a:srgbClr val="6B7482"/>
-                </a:solidFill>
-                <a:latin typeface="Inter"/>
+                  <a:srgbClr val="6B7280"/>
+                </a:solidFill>
+                <a:latin typeface="Geist"/>
               </a:rPr>
               <a:t>Connect a wallet, pick chains, sign, watch it land live.</a:t>
             </a:r>
@@ -9336,7 +9336,7 @@
             <a:avLst/>
           </a:prstGeom>
           <a:solidFill>
-            <a:srgbClr val="141A24"/>
+            <a:srgbClr val="0A0A0A"/>
           </a:solidFill>
           <a:ln>
             <a:noFill/>
@@ -9380,11 +9380,11 @@
             <a:avLst/>
           </a:prstGeom>
           <a:solidFill>
-            <a:srgbClr val="FCFDFE"/>
+            <a:srgbClr val="FFFFFF"/>
           </a:solidFill>
           <a:ln w="28575">
             <a:solidFill>
-              <a:srgbClr val="141A24"/>
+              <a:srgbClr val="0A0A0A"/>
             </a:solidFill>
           </a:ln>
           <a:effectLst/>
@@ -9426,11 +9426,11 @@
             <a:avLst/>
           </a:prstGeom>
           <a:solidFill>
-            <a:srgbClr val="53DCA2"/>
+            <a:srgbClr val="FDEDE7"/>
           </a:solidFill>
           <a:ln w="28575">
             <a:solidFill>
-              <a:srgbClr val="141A24"/>
+              <a:srgbClr val="0A0A0A"/>
             </a:solidFill>
           </a:ln>
           <a:effectLst/>
@@ -9461,9 +9461,9 @@
             <a:r>
               <a:rPr sz="1100" b="1" spc="120">
                 <a:solidFill>
-                  <a:srgbClr val="141A24"/>
-                </a:solidFill>
-                <a:latin typeface="JetBrains Mono"/>
+                  <a:srgbClr val="F4623A"/>
+                </a:solidFill>
+                <a:latin typeface="Geist Mono"/>
               </a:rPr>
               <a:t>Agent · SDK</a:t>
             </a:r>
@@ -9500,9 +9500,9 @@
             <a:r>
               <a:rPr sz="1300" b="0">
                 <a:solidFill>
-                  <a:srgbClr val="6B7482"/>
-                </a:solidFill>
-                <a:latin typeface="Inter"/>
+                  <a:srgbClr val="6B7280"/>
+                </a:solidFill>
+                <a:latin typeface="Geist"/>
               </a:rPr>
               <a:t>One call, no browser, no gas.</a:t>
             </a:r>
@@ -9524,11 +9524,11 @@
             <a:avLst/>
           </a:prstGeom>
           <a:solidFill>
-            <a:srgbClr val="F4F5F7"/>
+            <a:srgbClr val="FFFFFF"/>
           </a:solidFill>
           <a:ln w="28575">
             <a:solidFill>
-              <a:srgbClr val="141A24"/>
+              <a:srgbClr val="0A0A0A"/>
             </a:solidFill>
           </a:ln>
           <a:effectLst/>
@@ -9559,9 +9559,9 @@
             <a:r>
               <a:rPr sz="1100" b="0">
                 <a:solidFill>
-                  <a:srgbClr val="141A24"/>
-                </a:solidFill>
-                <a:latin typeface="JetBrains Mono"/>
+                  <a:srgbClr val="0A0A0A"/>
+                </a:solidFill>
+                <a:latin typeface="Geist Mono"/>
               </a:rPr>
               <a:t>await breeja.pay({ … })</a:t>
             </a:r>
@@ -9583,7 +9583,7 @@
             <a:avLst/>
           </a:prstGeom>
           <a:solidFill>
-            <a:srgbClr val="141A24"/>
+            <a:srgbClr val="0A0A0A"/>
           </a:solidFill>
           <a:ln>
             <a:noFill/>
@@ -9627,11 +9627,11 @@
             <a:avLst/>
           </a:prstGeom>
           <a:solidFill>
-            <a:srgbClr val="FCFDFE"/>
+            <a:srgbClr val="FFFFFF"/>
           </a:solidFill>
           <a:ln w="28575">
             <a:solidFill>
-              <a:srgbClr val="141A24"/>
+              <a:srgbClr val="0A0A0A"/>
             </a:solidFill>
           </a:ln>
           <a:effectLst/>
@@ -9673,11 +9673,11 @@
             <a:avLst/>
           </a:prstGeom>
           <a:solidFill>
-            <a:srgbClr val="D0A1FF"/>
+            <a:srgbClr val="FDEDE7"/>
           </a:solidFill>
           <a:ln w="28575">
             <a:solidFill>
-              <a:srgbClr val="141A24"/>
+              <a:srgbClr val="0A0A0A"/>
             </a:solidFill>
           </a:ln>
           <a:effectLst/>
@@ -9708,9 +9708,9 @@
             <a:r>
               <a:rPr sz="1100" b="1" spc="120">
                 <a:solidFill>
-                  <a:srgbClr val="141A24"/>
-                </a:solidFill>
-                <a:latin typeface="JetBrains Mono"/>
+                  <a:srgbClr val="F4623A"/>
+                </a:solidFill>
+                <a:latin typeface="Geist Mono"/>
               </a:rPr>
               <a:t>Agent · MCP</a:t>
             </a:r>
@@ -9747,9 +9747,9 @@
             <a:r>
               <a:rPr sz="1300" b="0">
                 <a:solidFill>
-                  <a:srgbClr val="6B7482"/>
-                </a:solidFill>
-                <a:latin typeface="Inter"/>
+                  <a:srgbClr val="6B7280"/>
+                </a:solidFill>
+                <a:latin typeface="Geist"/>
               </a:rPr>
               <a:t>Claude pays across chains as a tool call, with spend caps enforced.</a:t>
             </a:r>
@@ -9771,7 +9771,7 @@
             <a:avLst/>
           </a:prstGeom>
           <a:solidFill>
-            <a:srgbClr val="141A24"/>
+            <a:srgbClr val="0A0A0A"/>
           </a:solidFill>
           <a:ln>
             <a:noFill/>
@@ -9815,11 +9815,11 @@
             <a:avLst/>
           </a:prstGeom>
           <a:solidFill>
-            <a:srgbClr val="FCFDFE"/>
+            <a:srgbClr val="FFFFFF"/>
           </a:solidFill>
           <a:ln w="28575">
             <a:solidFill>
-              <a:srgbClr val="141A24"/>
+              <a:srgbClr val="0A0A0A"/>
             </a:solidFill>
           </a:ln>
           <a:effectLst/>
@@ -9861,11 +9861,11 @@
             <a:avLst/>
           </a:prstGeom>
           <a:solidFill>
-            <a:srgbClr val="FFCC33"/>
+            <a:srgbClr val="FDEDE7"/>
           </a:solidFill>
           <a:ln w="28575">
             <a:solidFill>
-              <a:srgbClr val="141A24"/>
+              <a:srgbClr val="0A0A0A"/>
             </a:solidFill>
           </a:ln>
           <a:effectLst/>
@@ -9896,9 +9896,9 @@
             <a:r>
               <a:rPr sz="1100" b="1" spc="120">
                 <a:solidFill>
-                  <a:srgbClr val="141A24"/>
-                </a:solidFill>
-                <a:latin typeface="JetBrains Mono"/>
+                  <a:srgbClr val="F4623A"/>
+                </a:solidFill>
+                <a:latin typeface="Geist Mono"/>
               </a:rPr>
               <a:t>Agent · x402</a:t>
             </a:r>
@@ -9935,9 +9935,9 @@
             <a:r>
               <a:rPr sz="1300" b="0">
                 <a:solidFill>
-                  <a:srgbClr val="6B7482"/>
-                </a:solidFill>
-                <a:latin typeface="Inter"/>
+                  <a:srgbClr val="6B7280"/>
+                </a:solidFill>
+                <a:latin typeface="Geist"/>
               </a:rPr>
               <a:t>Hit a paywalled endpoint, settle, retry with proof. Cross-chain.</a:t>
             </a:r>
@@ -9974,9 +9974,9 @@
             <a:r>
               <a:rPr sz="1300" b="0">
                 <a:solidFill>
-                  <a:srgbClr val="6B7482"/>
-                </a:solidFill>
-                <a:latin typeface="Inter"/>
+                  <a:srgbClr val="6B7280"/>
+                </a:solidFill>
+                <a:latin typeface="Geist"/>
               </a:rPr>
               <a:t>All four consume the same SDK. The SDK is the product — the web app is just one client.</a:t>
             </a:r>
@@ -10016,7 +10016,7 @@
             <a:avLst/>
           </a:prstGeom>
           <a:solidFill>
-            <a:srgbClr val="F4F5F7"/>
+            <a:srgbClr val="FFFFFF"/>
           </a:solidFill>
           <a:ln>
             <a:noFill/>
@@ -10060,11 +10060,11 @@
             <a:avLst/>
           </a:prstGeom>
           <a:solidFill>
-            <a:srgbClr val="141A24"/>
+            <a:srgbClr val="0A0A0A"/>
           </a:solidFill>
           <a:ln w="28575">
             <a:solidFill>
-              <a:srgbClr val="141A24"/>
+              <a:srgbClr val="0A0A0A"/>
             </a:solidFill>
           </a:ln>
           <a:effectLst/>
@@ -10091,9 +10091,9 @@
             <a:r>
               <a:rPr sz="1100" b="1">
                 <a:solidFill>
-                  <a:srgbClr val="F4F5F7"/>
-                </a:solidFill>
-                <a:latin typeface="JetBrains Mono"/>
+                  <a:srgbClr val="FFFFFF"/>
+                </a:solidFill>
+                <a:latin typeface="Geist Mono"/>
               </a:rPr>
               <a:t>05</a:t>
             </a:r>
@@ -10130,9 +10130,9 @@
             <a:r>
               <a:rPr sz="1100" b="1" spc="160">
                 <a:solidFill>
-                  <a:srgbClr val="6B7482"/>
-                </a:solidFill>
-                <a:latin typeface="JetBrains Mono"/>
+                  <a:srgbClr val="6B7280"/>
+                </a:solidFill>
+                <a:latin typeface="Geist Mono"/>
               </a:rPr>
               <a:t>DEVELOPER EXPERIENCE</a:t>
             </a:r>
@@ -10169,9 +10169,9 @@
             <a:r>
               <a:rPr sz="3800" b="1">
                 <a:solidFill>
-                  <a:srgbClr val="141A24"/>
-                </a:solidFill>
-                <a:latin typeface="Space Grotesk"/>
+                  <a:srgbClr val="0A0A0A"/>
+                </a:solidFill>
+                <a:latin typeface="Geist"/>
               </a:rPr>
               <a:t>The whole integration.</a:t>
             </a:r>
@@ -10193,7 +10193,7 @@
             <a:avLst/>
           </a:prstGeom>
           <a:solidFill>
-            <a:srgbClr val="5BA4FF"/>
+            <a:srgbClr val="F4623A"/>
           </a:solidFill>
           <a:ln>
             <a:noFill/>
@@ -10237,11 +10237,11 @@
             <a:avLst/>
           </a:prstGeom>
           <a:solidFill>
-            <a:srgbClr val="141A24"/>
+            <a:srgbClr val="0A0A0A"/>
           </a:solidFill>
           <a:ln w="28575">
             <a:solidFill>
-              <a:srgbClr val="141A24"/>
+              <a:srgbClr val="0A0A0A"/>
             </a:solidFill>
           </a:ln>
           <a:effectLst/>
@@ -10298,36 +10298,36 @@
             <a:r>
               <a:rPr sz="1300" b="1">
                 <a:solidFill>
-                  <a:srgbClr val="D0A1FF"/>
-                </a:solidFill>
-                <a:latin typeface="JetBrains Mono"/>
+                  <a:srgbClr val="F4623A"/>
+                </a:solidFill>
+                <a:latin typeface="Geist Mono"/>
               </a:rPr>
               <a:t>import </a:t>
             </a:r>
             <a:r>
               <a:rPr sz="1300" b="1">
                 <a:solidFill>
-                  <a:srgbClr val="F4F5F7"/>
-                </a:solidFill>
-                <a:latin typeface="JetBrains Mono"/>
+                  <a:srgbClr val="FFFFFF"/>
+                </a:solidFill>
+                <a:latin typeface="Geist Mono"/>
               </a:rPr>
               <a:t>{ Breeja } </a:t>
             </a:r>
             <a:r>
               <a:rPr sz="1300" b="1">
                 <a:solidFill>
-                  <a:srgbClr val="D0A1FF"/>
-                </a:solidFill>
-                <a:latin typeface="JetBrains Mono"/>
+                  <a:srgbClr val="F4623A"/>
+                </a:solidFill>
+                <a:latin typeface="Geist Mono"/>
               </a:rPr>
               <a:t>from </a:t>
             </a:r>
             <a:r>
               <a:rPr sz="1300" b="1">
                 <a:solidFill>
-                  <a:srgbClr val="53DCA2"/>
-                </a:solidFill>
-                <a:latin typeface="JetBrains Mono"/>
+                  <a:srgbClr val="F4623A"/>
+                </a:solidFill>
+                <a:latin typeface="Geist Mono"/>
               </a:rPr>
               <a:t>"@breeja/sdk";</a:t>
             </a:r>
@@ -10341,9 +10341,9 @@
             <a:r>
               <a:rPr sz="1300" b="1">
                 <a:solidFill>
-                  <a:srgbClr val="F4F5F7"/>
-                </a:solidFill>
-                <a:latin typeface="JetBrains Mono"/>
+                  <a:srgbClr val="FFFFFF"/>
+                </a:solidFill>
+                <a:latin typeface="Geist Mono"/>
               </a:rPr>
               <a:t/>
             </a:r>
@@ -10357,54 +10357,54 @@
             <a:r>
               <a:rPr sz="1300" b="1">
                 <a:solidFill>
-                  <a:srgbClr val="D0A1FF"/>
-                </a:solidFill>
-                <a:latin typeface="JetBrains Mono"/>
+                  <a:srgbClr val="F4623A"/>
+                </a:solidFill>
+                <a:latin typeface="Geist Mono"/>
               </a:rPr>
               <a:t>const </a:t>
             </a:r>
             <a:r>
               <a:rPr sz="1300" b="1">
                 <a:solidFill>
-                  <a:srgbClr val="F4F5F7"/>
-                </a:solidFill>
-                <a:latin typeface="JetBrains Mono"/>
+                  <a:srgbClr val="FFFFFF"/>
+                </a:solidFill>
+                <a:latin typeface="Geist Mono"/>
               </a:rPr>
               <a:t>payment = </a:t>
             </a:r>
             <a:r>
               <a:rPr sz="1300" b="1">
                 <a:solidFill>
-                  <a:srgbClr val="D0A1FF"/>
-                </a:solidFill>
-                <a:latin typeface="JetBrains Mono"/>
+                  <a:srgbClr val="F4623A"/>
+                </a:solidFill>
+                <a:latin typeface="Geist Mono"/>
               </a:rPr>
               <a:t>await </a:t>
             </a:r>
             <a:r>
               <a:rPr sz="1300" b="1">
                 <a:solidFill>
-                  <a:srgbClr val="F4F5F7"/>
-                </a:solidFill>
-                <a:latin typeface="JetBrains Mono"/>
+                  <a:srgbClr val="FFFFFF"/>
+                </a:solidFill>
+                <a:latin typeface="Geist Mono"/>
               </a:rPr>
               <a:t>breeja.</a:t>
             </a:r>
             <a:r>
               <a:rPr sz="1300" b="1">
                 <a:solidFill>
-                  <a:srgbClr val="FFCC33"/>
-                </a:solidFill>
-                <a:latin typeface="JetBrains Mono"/>
+                  <a:srgbClr val="F4623A"/>
+                </a:solidFill>
+                <a:latin typeface="Geist Mono"/>
               </a:rPr>
               <a:t>pay</a:t>
             </a:r>
             <a:r>
               <a:rPr sz="1300" b="1">
                 <a:solidFill>
-                  <a:srgbClr val="F4F5F7"/>
-                </a:solidFill>
-                <a:latin typeface="JetBrains Mono"/>
+                  <a:srgbClr val="FFFFFF"/>
+                </a:solidFill>
+                <a:latin typeface="Geist Mono"/>
               </a:rPr>
               <a:t>({</a:t>
             </a:r>
@@ -10418,18 +10418,18 @@
             <a:r>
               <a:rPr sz="1300" b="1">
                 <a:solidFill>
-                  <a:srgbClr val="F4F5F7"/>
-                </a:solidFill>
-                <a:latin typeface="JetBrains Mono"/>
+                  <a:srgbClr val="FFFFFF"/>
+                </a:solidFill>
+                <a:latin typeface="Geist Mono"/>
               </a:rPr>
               <a:t>  from:      </a:t>
             </a:r>
             <a:r>
               <a:rPr sz="1300" b="1">
                 <a:solidFill>
-                  <a:srgbClr val="53DCA2"/>
-                </a:solidFill>
-                <a:latin typeface="JetBrains Mono"/>
+                  <a:srgbClr val="F4623A"/>
+                </a:solidFill>
+                <a:latin typeface="Geist Mono"/>
               </a:rPr>
               <a:t>"base-sepolia",</a:t>
             </a:r>
@@ -10443,18 +10443,18 @@
             <a:r>
               <a:rPr sz="1300" b="1">
                 <a:solidFill>
-                  <a:srgbClr val="F4F5F7"/>
-                </a:solidFill>
-                <a:latin typeface="JetBrains Mono"/>
+                  <a:srgbClr val="FFFFFF"/>
+                </a:solidFill>
+                <a:latin typeface="Geist Mono"/>
               </a:rPr>
               <a:t>  to:        </a:t>
             </a:r>
             <a:r>
               <a:rPr sz="1300" b="1">
                 <a:solidFill>
-                  <a:srgbClr val="53DCA2"/>
-                </a:solidFill>
-                <a:latin typeface="JetBrains Mono"/>
+                  <a:srgbClr val="F4623A"/>
+                </a:solidFill>
+                <a:latin typeface="Geist Mono"/>
               </a:rPr>
               <a:t>"arbitrum-sepolia",</a:t>
             </a:r>
@@ -10468,18 +10468,18 @@
             <a:r>
               <a:rPr sz="1300" b="1">
                 <a:solidFill>
-                  <a:srgbClr val="F4F5F7"/>
-                </a:solidFill>
-                <a:latin typeface="JetBrains Mono"/>
+                  <a:srgbClr val="FFFFFF"/>
+                </a:solidFill>
+                <a:latin typeface="Geist Mono"/>
               </a:rPr>
               <a:t>  amount:    </a:t>
             </a:r>
             <a:r>
               <a:rPr sz="1300" b="1">
                 <a:solidFill>
-                  <a:srgbClr val="53DCA2"/>
-                </a:solidFill>
-                <a:latin typeface="JetBrains Mono"/>
+                  <a:srgbClr val="F4623A"/>
+                </a:solidFill>
+                <a:latin typeface="Geist Mono"/>
               </a:rPr>
               <a:t>"10.00",</a:t>
             </a:r>
@@ -10493,18 +10493,18 @@
             <a:r>
               <a:rPr sz="1300" b="1">
                 <a:solidFill>
-                  <a:srgbClr val="F4F5F7"/>
-                </a:solidFill>
-                <a:latin typeface="JetBrains Mono"/>
+                  <a:srgbClr val="FFFFFF"/>
+                </a:solidFill>
+                <a:latin typeface="Geist Mono"/>
               </a:rPr>
               <a:t>  recipient: </a:t>
             </a:r>
             <a:r>
               <a:rPr sz="1300" b="1">
                 <a:solidFill>
-                  <a:srgbClr val="53DCA2"/>
-                </a:solidFill>
-                <a:latin typeface="JetBrains Mono"/>
+                  <a:srgbClr val="F4623A"/>
+                </a:solidFill>
+                <a:latin typeface="Geist Mono"/>
               </a:rPr>
               <a:t>"alice.eth",</a:t>
             </a:r>
@@ -10518,9 +10518,9 @@
             <a:r>
               <a:rPr sz="1300" b="1">
                 <a:solidFill>
-                  <a:srgbClr val="F4F5F7"/>
-                </a:solidFill>
-                <a:latin typeface="JetBrains Mono"/>
+                  <a:srgbClr val="FFFFFF"/>
+                </a:solidFill>
+                <a:latin typeface="Geist Mono"/>
               </a:rPr>
               <a:t>  signer:    account,</a:t>
             </a:r>
@@ -10534,9 +10534,9 @@
             <a:r>
               <a:rPr sz="1300" b="1">
                 <a:solidFill>
-                  <a:srgbClr val="F4F5F7"/>
-                </a:solidFill>
-                <a:latin typeface="JetBrains Mono"/>
+                  <a:srgbClr val="FFFFFF"/>
+                </a:solidFill>
+                <a:latin typeface="Geist Mono"/>
               </a:rPr>
               <a:t>});</a:t>
             </a:r>
@@ -10550,9 +10550,9 @@
             <a:r>
               <a:rPr sz="1300" b="1">
                 <a:solidFill>
-                  <a:srgbClr val="F4F5F7"/>
-                </a:solidFill>
-                <a:latin typeface="JetBrains Mono"/>
+                  <a:srgbClr val="FFFFFF"/>
+                </a:solidFill>
+                <a:latin typeface="Geist Mono"/>
               </a:rPr>
               <a:t/>
             </a:r>
@@ -10568,7 +10568,7 @@
                 <a:solidFill>
                   <a:srgbClr val="8FA3BF"/>
                 </a:solidFill>
-                <a:latin typeface="JetBrains Mono"/>
+                <a:latin typeface="Geist Mono"/>
               </a:rPr>
               <a:t>// → settled in seconds, no gas token held</a:t>
             </a:r>
@@ -10590,11 +10590,11 @@
             <a:avLst/>
           </a:prstGeom>
           <a:solidFill>
-            <a:srgbClr val="FCFDFE"/>
+            <a:srgbClr val="FFFFFF"/>
           </a:solidFill>
           <a:ln w="28575">
             <a:solidFill>
-              <a:srgbClr val="141A24"/>
+              <a:srgbClr val="0A0A0A"/>
             </a:solidFill>
           </a:ln>
           <a:effectLst/>
@@ -10636,7 +10636,7 @@
             <a:avLst/>
           </a:prstGeom>
           <a:solidFill>
-            <a:srgbClr val="5BA4FF"/>
+            <a:srgbClr val="F4623A"/>
           </a:solidFill>
           <a:ln>
             <a:noFill/>
@@ -10695,9 +10695,9 @@
             <a:r>
               <a:rPr sz="1400" b="1">
                 <a:solidFill>
-                  <a:srgbClr val="141A24"/>
-                </a:solidFill>
-                <a:latin typeface="Space Grotesk"/>
+                  <a:srgbClr val="0A0A0A"/>
+                </a:solidFill>
+                <a:latin typeface="Geist"/>
               </a:rPr>
               <a:t>Runtime discovery</a:t>
             </a:r>
@@ -10734,9 +10734,9 @@
             <a:r>
               <a:rPr sz="1100" b="0">
                 <a:solidFill>
-                  <a:srgbClr val="6B7482"/>
-                </a:solidFill>
-                <a:latin typeface="Inter"/>
+                  <a:srgbClr val="6B7280"/>
+                </a:solidFill>
+                <a:latin typeface="Geist"/>
               </a:rPr>
               <a:t>Agents call chains() — never a hardcoded list.</a:t>
             </a:r>
@@ -10758,11 +10758,11 @@
             <a:avLst/>
           </a:prstGeom>
           <a:solidFill>
-            <a:srgbClr val="FCFDFE"/>
+            <a:srgbClr val="FFFFFF"/>
           </a:solidFill>
           <a:ln w="28575">
             <a:solidFill>
-              <a:srgbClr val="141A24"/>
+              <a:srgbClr val="0A0A0A"/>
             </a:solidFill>
           </a:ln>
           <a:effectLst/>
@@ -10804,7 +10804,7 @@
             <a:avLst/>
           </a:prstGeom>
           <a:solidFill>
-            <a:srgbClr val="53DCA2"/>
+            <a:srgbClr val="F4623A"/>
           </a:solidFill>
           <a:ln>
             <a:noFill/>
@@ -10863,9 +10863,9 @@
             <a:r>
               <a:rPr sz="1400" b="1">
                 <a:solidFill>
-                  <a:srgbClr val="141A24"/>
-                </a:solidFill>
-                <a:latin typeface="Space Grotesk"/>
+                  <a:srgbClr val="0A0A0A"/>
+                </a:solidFill>
+                <a:latin typeface="Geist"/>
               </a:rPr>
               <a:t>Typed errors</a:t>
             </a:r>
@@ -10902,9 +10902,9 @@
             <a:r>
               <a:rPr sz="1100" b="0">
                 <a:solidFill>
-                  <a:srgbClr val="6B7482"/>
-                </a:solidFill>
-                <a:latin typeface="Inter"/>
+                  <a:srgbClr val="6B7280"/>
+                </a:solidFill>
+                <a:latin typeface="Geist"/>
               </a:rPr>
               <a:t>Stable codes an agent can branch on exhaustively.</a:t>
             </a:r>
@@ -10926,11 +10926,11 @@
             <a:avLst/>
           </a:prstGeom>
           <a:solidFill>
-            <a:srgbClr val="FCFDFE"/>
+            <a:srgbClr val="FFFFFF"/>
           </a:solidFill>
           <a:ln w="28575">
             <a:solidFill>
-              <a:srgbClr val="141A24"/>
+              <a:srgbClr val="0A0A0A"/>
             </a:solidFill>
           </a:ln>
           <a:effectLst/>
@@ -10972,7 +10972,7 @@
             <a:avLst/>
           </a:prstGeom>
           <a:solidFill>
-            <a:srgbClr val="FF841F"/>
+            <a:srgbClr val="F4623A"/>
           </a:solidFill>
           <a:ln>
             <a:noFill/>
@@ -11031,9 +11031,9 @@
             <a:r>
               <a:rPr sz="1400" b="1">
                 <a:solidFill>
-                  <a:srgbClr val="141A24"/>
-                </a:solidFill>
-                <a:latin typeface="Space Grotesk"/>
+                  <a:srgbClr val="0A0A0A"/>
+                </a:solidFill>
+                <a:latin typeface="Geist"/>
               </a:rPr>
               <a:t>Idempotent</a:t>
             </a:r>
@@ -11070,9 +11070,9 @@
             <a:r>
               <a:rPr sz="1100" b="0">
                 <a:solidFill>
-                  <a:srgbClr val="6B7482"/>
-                </a:solidFill>
-                <a:latin typeface="Inter"/>
+                  <a:srgbClr val="6B7280"/>
+                </a:solidFill>
+                <a:latin typeface="Geist"/>
               </a:rPr>
               <a:t>Keyed on the permit nonce. Retries never double-spend.</a:t>
             </a:r>
@@ -11112,7 +11112,7 @@
             <a:avLst/>
           </a:prstGeom>
           <a:solidFill>
-            <a:srgbClr val="F4F5F7"/>
+            <a:srgbClr val="FFFFFF"/>
           </a:solidFill>
           <a:ln>
             <a:noFill/>
@@ -11156,11 +11156,11 @@
             <a:avLst/>
           </a:prstGeom>
           <a:solidFill>
-            <a:srgbClr val="141A24"/>
+            <a:srgbClr val="0A0A0A"/>
           </a:solidFill>
           <a:ln w="28575">
             <a:solidFill>
-              <a:srgbClr val="141A24"/>
+              <a:srgbClr val="0A0A0A"/>
             </a:solidFill>
           </a:ln>
           <a:effectLst/>
@@ -11187,9 +11187,9 @@
             <a:r>
               <a:rPr sz="1100" b="1">
                 <a:solidFill>
-                  <a:srgbClr val="F4F5F7"/>
-                </a:solidFill>
-                <a:latin typeface="JetBrains Mono"/>
+                  <a:srgbClr val="FFFFFF"/>
+                </a:solidFill>
+                <a:latin typeface="Geist Mono"/>
               </a:rPr>
               <a:t>06</a:t>
             </a:r>
@@ -11226,9 +11226,9 @@
             <a:r>
               <a:rPr sz="1100" b="1" spc="160">
                 <a:solidFill>
-                  <a:srgbClr val="6B7482"/>
-                </a:solidFill>
-                <a:latin typeface="JetBrains Mono"/>
+                  <a:srgbClr val="6B7280"/>
+                </a:solidFill>
+                <a:latin typeface="Geist Mono"/>
               </a:rPr>
               <a:t>ROUTING</a:t>
             </a:r>
@@ -11265,9 +11265,9 @@
             <a:r>
               <a:rPr sz="3800" b="1">
                 <a:solidFill>
-                  <a:srgbClr val="141A24"/>
-                </a:solidFill>
-                <a:latin typeface="Space Grotesk"/>
+                  <a:srgbClr val="0A0A0A"/>
+                </a:solidFill>
+                <a:latin typeface="Geist"/>
               </a:rPr>
               <a:t>A real choice, not a single path.</a:t>
             </a:r>
@@ -11304,9 +11304,9 @@
             <a:r>
               <a:rPr sz="1600" b="0">
                 <a:solidFill>
-                  <a:srgbClr val="6B7482"/>
-                </a:solidFill>
-                <a:latin typeface="Inter"/>
+                  <a:srgbClr val="6B7280"/>
+                </a:solidFill>
+                <a:latin typeface="Geist"/>
               </a:rPr>
               <a:t>Every payment is quoted across routes and scored on live gas, pool liquidity, and caller preference.</a:t>
             </a:r>
@@ -11328,11 +11328,11 @@
             <a:avLst/>
           </a:prstGeom>
           <a:solidFill>
-            <a:srgbClr val="141A24"/>
+            <a:srgbClr val="0A0A0A"/>
           </a:solidFill>
           <a:ln w="28575">
             <a:solidFill>
-              <a:srgbClr val="141A24"/>
+              <a:srgbClr val="0A0A0A"/>
             </a:solidFill>
           </a:ln>
           <a:effectLst/>
@@ -11363,9 +11363,9 @@
             <a:r>
               <a:rPr sz="1100" b="1" spc="100">
                 <a:solidFill>
-                  <a:srgbClr val="F4F5F7"/>
-                </a:solidFill>
-                <a:latin typeface="JetBrains Mono"/>
+                  <a:srgbClr val="FFFFFF"/>
+                </a:solidFill>
+                <a:latin typeface="Geist Mono"/>
               </a:rPr>
               <a:t>Route</a:t>
             </a:r>
@@ -11387,11 +11387,11 @@
             <a:avLst/>
           </a:prstGeom>
           <a:solidFill>
-            <a:srgbClr val="141A24"/>
+            <a:srgbClr val="0A0A0A"/>
           </a:solidFill>
           <a:ln w="28575">
             <a:solidFill>
-              <a:srgbClr val="141A24"/>
+              <a:srgbClr val="0A0A0A"/>
             </a:solidFill>
           </a:ln>
           <a:effectLst/>
@@ -11422,9 +11422,9 @@
             <a:r>
               <a:rPr sz="1100" b="1" spc="100">
                 <a:solidFill>
-                  <a:srgbClr val="F4F5F7"/>
-                </a:solidFill>
-                <a:latin typeface="JetBrains Mono"/>
+                  <a:srgbClr val="FFFFFF"/>
+                </a:solidFill>
+                <a:latin typeface="Geist Mono"/>
               </a:rPr>
               <a:t>Latency</a:t>
             </a:r>
@@ -11446,11 +11446,11 @@
             <a:avLst/>
           </a:prstGeom>
           <a:solidFill>
-            <a:srgbClr val="141A24"/>
+            <a:srgbClr val="0A0A0A"/>
           </a:solidFill>
           <a:ln w="28575">
             <a:solidFill>
-              <a:srgbClr val="141A24"/>
+              <a:srgbClr val="0A0A0A"/>
             </a:solidFill>
           </a:ln>
           <a:effectLst/>
@@ -11481,9 +11481,9 @@
             <a:r>
               <a:rPr sz="1100" b="1" spc="100">
                 <a:solidFill>
-                  <a:srgbClr val="F4F5F7"/>
-                </a:solidFill>
-                <a:latin typeface="JetBrains Mono"/>
+                  <a:srgbClr val="FFFFFF"/>
+                </a:solidFill>
+                <a:latin typeface="Geist Mono"/>
               </a:rPr>
               <a:t>Cost</a:t>
             </a:r>
@@ -11505,11 +11505,11 @@
             <a:avLst/>
           </a:prstGeom>
           <a:solidFill>
-            <a:srgbClr val="141A24"/>
+            <a:srgbClr val="0A0A0A"/>
           </a:solidFill>
           <a:ln w="28575">
             <a:solidFill>
-              <a:srgbClr val="141A24"/>
+              <a:srgbClr val="0A0A0A"/>
             </a:solidFill>
           </a:ln>
           <a:effectLst/>
@@ -11540,9 +11540,9 @@
             <a:r>
               <a:rPr sz="1100" b="1" spc="100">
                 <a:solidFill>
-                  <a:srgbClr val="F4F5F7"/>
-                </a:solidFill>
-                <a:latin typeface="JetBrains Mono"/>
+                  <a:srgbClr val="FFFFFF"/>
+                </a:solidFill>
+                <a:latin typeface="Geist Mono"/>
               </a:rPr>
               <a:t>Custody</a:t>
             </a:r>
@@ -11564,11 +11564,11 @@
             <a:avLst/>
           </a:prstGeom>
           <a:solidFill>
-            <a:srgbClr val="141A24"/>
+            <a:srgbClr val="0A0A0A"/>
           </a:solidFill>
           <a:ln w="28575">
             <a:solidFill>
-              <a:srgbClr val="141A24"/>
+              <a:srgbClr val="0A0A0A"/>
             </a:solidFill>
           </a:ln>
           <a:effectLst/>
@@ -11599,9 +11599,9 @@
             <a:r>
               <a:rPr sz="1100" b="1" spc="100">
                 <a:solidFill>
-                  <a:srgbClr val="F4F5F7"/>
-                </a:solidFill>
-                <a:latin typeface="JetBrains Mono"/>
+                  <a:srgbClr val="FFFFFF"/>
+                </a:solidFill>
+                <a:latin typeface="Geist Mono"/>
               </a:rPr>
               <a:t>Best for</a:t>
             </a:r>
@@ -11623,11 +11623,11 @@
             <a:avLst/>
           </a:prstGeom>
           <a:solidFill>
-            <a:srgbClr val="FCFDFE"/>
+            <a:srgbClr val="FFFFFF"/>
           </a:solidFill>
           <a:ln w="28575">
             <a:solidFill>
-              <a:srgbClr val="141A24"/>
+              <a:srgbClr val="0A0A0A"/>
             </a:solidFill>
           </a:ln>
           <a:effectLst/>
@@ -11658,9 +11658,9 @@
             <a:r>
               <a:rPr sz="1300" b="1">
                 <a:solidFill>
-                  <a:srgbClr val="141A24"/>
-                </a:solidFill>
-                <a:latin typeface="Inter"/>
+                  <a:srgbClr val="0A0A0A"/>
+                </a:solidFill>
+                <a:latin typeface="Geist"/>
               </a:rPr>
               <a:t>Fast pool</a:t>
             </a:r>
@@ -11682,11 +11682,11 @@
             <a:avLst/>
           </a:prstGeom>
           <a:solidFill>
-            <a:srgbClr val="FCFDFE"/>
+            <a:srgbClr val="FFFFFF"/>
           </a:solidFill>
           <a:ln w="28575">
             <a:solidFill>
-              <a:srgbClr val="141A24"/>
+              <a:srgbClr val="0A0A0A"/>
             </a:solidFill>
           </a:ln>
           <a:effectLst/>
@@ -11717,9 +11717,9 @@
             <a:r>
               <a:rPr sz="1300" b="0">
                 <a:solidFill>
-                  <a:srgbClr val="141A24"/>
-                </a:solidFill>
-                <a:latin typeface="JetBrains Mono"/>
+                  <a:srgbClr val="0A0A0A"/>
+                </a:solidFill>
+                <a:latin typeface="Geist Mono"/>
               </a:rPr>
               <a:t>~10s</a:t>
             </a:r>
@@ -11741,11 +11741,11 @@
             <a:avLst/>
           </a:prstGeom>
           <a:solidFill>
-            <a:srgbClr val="FCFDFE"/>
+            <a:srgbClr val="FFFFFF"/>
           </a:solidFill>
           <a:ln w="28575">
             <a:solidFill>
-              <a:srgbClr val="141A24"/>
+              <a:srgbClr val="0A0A0A"/>
             </a:solidFill>
           </a:ln>
           <a:effectLst/>
@@ -11776,9 +11776,9 @@
             <a:r>
               <a:rPr sz="1300" b="0">
                 <a:solidFill>
-                  <a:srgbClr val="141A24"/>
-                </a:solidFill>
-                <a:latin typeface="JetBrains Mono"/>
+                  <a:srgbClr val="0A0A0A"/>
+                </a:solidFill>
+                <a:latin typeface="Geist Mono"/>
               </a:rPr>
               <a:t>0.5%</a:t>
             </a:r>
@@ -11800,11 +11800,11 @@
             <a:avLst/>
           </a:prstGeom>
           <a:solidFill>
-            <a:srgbClr val="FCFDFE"/>
+            <a:srgbClr val="FFFFFF"/>
           </a:solidFill>
           <a:ln w="28575">
             <a:solidFill>
-              <a:srgbClr val="141A24"/>
+              <a:srgbClr val="0A0A0A"/>
             </a:solidFill>
           </a:ln>
           <a:effectLst/>
@@ -11846,11 +11846,11 @@
             <a:avLst/>
           </a:prstGeom>
           <a:solidFill>
-            <a:srgbClr val="FFCC33"/>
+            <a:srgbClr val="6B7280"/>
           </a:solidFill>
           <a:ln w="28575">
             <a:solidFill>
-              <a:srgbClr val="141A24"/>
+              <a:srgbClr val="0A0A0A"/>
             </a:solidFill>
           </a:ln>
           <a:effectLst/>
@@ -11881,9 +11881,9 @@
             <a:r>
               <a:rPr sz="1000" b="1">
                 <a:solidFill>
-                  <a:srgbClr val="141A24"/>
-                </a:solidFill>
-                <a:latin typeface="JetBrains Mono"/>
+                  <a:srgbClr val="FFFFFF"/>
+                </a:solidFill>
+                <a:latin typeface="Geist Mono"/>
               </a:rPr>
               <a:t>Custodial</a:t>
             </a:r>
@@ -11905,11 +11905,11 @@
             <a:avLst/>
           </a:prstGeom>
           <a:solidFill>
-            <a:srgbClr val="FCFDFE"/>
+            <a:srgbClr val="FFFFFF"/>
           </a:solidFill>
           <a:ln w="28575">
             <a:solidFill>
-              <a:srgbClr val="141A24"/>
+              <a:srgbClr val="0A0A0A"/>
             </a:solidFill>
           </a:ln>
           <a:effectLst/>
@@ -11940,9 +11940,9 @@
             <a:r>
               <a:rPr sz="1300" b="0">
                 <a:solidFill>
-                  <a:srgbClr val="141A24"/>
-                </a:solidFill>
-                <a:latin typeface="Inter"/>
+                  <a:srgbClr val="0A0A0A"/>
+                </a:solidFill>
+                <a:latin typeface="Geist"/>
               </a:rPr>
               <a:t>Small, latency-sensitive payments</a:t>
             </a:r>
@@ -11964,11 +11964,11 @@
             <a:avLst/>
           </a:prstGeom>
           <a:solidFill>
-            <a:srgbClr val="FCFDFE"/>
+            <a:srgbClr val="FFFFFF"/>
           </a:solidFill>
           <a:ln w="28575">
             <a:solidFill>
-              <a:srgbClr val="141A24"/>
+              <a:srgbClr val="0A0A0A"/>
             </a:solidFill>
           </a:ln>
           <a:effectLst/>
@@ -11999,9 +11999,9 @@
             <a:r>
               <a:rPr sz="1300" b="1">
                 <a:solidFill>
-                  <a:srgbClr val="141A24"/>
-                </a:solidFill>
-                <a:latin typeface="Inter"/>
+                  <a:srgbClr val="0A0A0A"/>
+                </a:solidFill>
+                <a:latin typeface="Geist"/>
               </a:rPr>
               <a:t>CCTP</a:t>
             </a:r>
@@ -12023,11 +12023,11 @@
             <a:avLst/>
           </a:prstGeom>
           <a:solidFill>
-            <a:srgbClr val="FCFDFE"/>
+            <a:srgbClr val="FFFFFF"/>
           </a:solidFill>
           <a:ln w="28575">
             <a:solidFill>
-              <a:srgbClr val="141A24"/>
+              <a:srgbClr val="0A0A0A"/>
             </a:solidFill>
           </a:ln>
           <a:effectLst/>
@@ -12058,9 +12058,9 @@
             <a:r>
               <a:rPr sz="1300" b="0">
                 <a:solidFill>
-                  <a:srgbClr val="141A24"/>
-                </a:solidFill>
-                <a:latin typeface="JetBrains Mono"/>
+                  <a:srgbClr val="0A0A0A"/>
+                </a:solidFill>
+                <a:latin typeface="Geist Mono"/>
               </a:rPr>
               <a:t>~15m</a:t>
             </a:r>
@@ -12082,11 +12082,11 @@
             <a:avLst/>
           </a:prstGeom>
           <a:solidFill>
-            <a:srgbClr val="FCFDFE"/>
+            <a:srgbClr val="FFFFFF"/>
           </a:solidFill>
           <a:ln w="28575">
             <a:solidFill>
-              <a:srgbClr val="141A24"/>
+              <a:srgbClr val="0A0A0A"/>
             </a:solidFill>
           </a:ln>
           <a:effectLst/>
@@ -12117,9 +12117,9 @@
             <a:r>
               <a:rPr sz="1300" b="0">
                 <a:solidFill>
-                  <a:srgbClr val="141A24"/>
-                </a:solidFill>
-                <a:latin typeface="JetBrains Mono"/>
+                  <a:srgbClr val="0A0A0A"/>
+                </a:solidFill>
+                <a:latin typeface="Geist Mono"/>
               </a:rPr>
               <a:t>gas only</a:t>
             </a:r>
@@ -12141,11 +12141,11 @@
             <a:avLst/>
           </a:prstGeom>
           <a:solidFill>
-            <a:srgbClr val="FCFDFE"/>
+            <a:srgbClr val="FFFFFF"/>
           </a:solidFill>
           <a:ln w="28575">
             <a:solidFill>
-              <a:srgbClr val="141A24"/>
+              <a:srgbClr val="0A0A0A"/>
             </a:solidFill>
           </a:ln>
           <a:effectLst/>
@@ -12187,11 +12187,11 @@
             <a:avLst/>
           </a:prstGeom>
           <a:solidFill>
-            <a:srgbClr val="53DCA2"/>
+            <a:srgbClr val="FDEDE7"/>
           </a:solidFill>
           <a:ln w="28575">
             <a:solidFill>
-              <a:srgbClr val="141A24"/>
+              <a:srgbClr val="0A0A0A"/>
             </a:solidFill>
           </a:ln>
           <a:effectLst/>
@@ -12222,9 +12222,9 @@
             <a:r>
               <a:rPr sz="1000" b="1">
                 <a:solidFill>
-                  <a:srgbClr val="141A24"/>
-                </a:solidFill>
-                <a:latin typeface="JetBrains Mono"/>
+                  <a:srgbClr val="F4623A"/>
+                </a:solidFill>
+                <a:latin typeface="Geist Mono"/>
               </a:rPr>
               <a:t>Trust-minimized</a:t>
             </a:r>
@@ -12246,11 +12246,11 @@
             <a:avLst/>
           </a:prstGeom>
           <a:solidFill>
-            <a:srgbClr val="FCFDFE"/>
+            <a:srgbClr val="FFFFFF"/>
           </a:solidFill>
           <a:ln w="28575">
             <a:solidFill>
-              <a:srgbClr val="141A24"/>
+              <a:srgbClr val="0A0A0A"/>
             </a:solidFill>
           </a:ln>
           <a:effectLst/>
@@ -12281,9 +12281,9 @@
             <a:r>
               <a:rPr sz="1300" b="0">
                 <a:solidFill>
-                  <a:srgbClr val="141A24"/>
-                </a:solidFill>
-                <a:latin typeface="Inter"/>
+                  <a:srgbClr val="0A0A0A"/>
+                </a:solidFill>
+                <a:latin typeface="Geist"/>
               </a:rPr>
               <a:t>Large transfers, canonical guarantees</a:t>
             </a:r>
@@ -12320,9 +12320,9 @@
             <a:r>
               <a:rPr sz="1300" b="0">
                 <a:solidFill>
-                  <a:srgbClr val="6B7482"/>
-                </a:solidFill>
-                <a:latin typeface="Inter"/>
+                  <a:srgbClr val="6B7280"/>
+                </a:solidFill>
+                <a:latin typeface="Geist"/>
               </a:rPr>
               <a:t>Callers override with preference: "fast" | "cheap" | "trustless". Custody risk scales with amount; latency tolerance doesn't.</a:t>
             </a:r>
@@ -12362,7 +12362,7 @@
             <a:avLst/>
           </a:prstGeom>
           <a:solidFill>
-            <a:srgbClr val="F4F5F7"/>
+            <a:srgbClr val="FFFFFF"/>
           </a:solidFill>
           <a:ln>
             <a:noFill/>
@@ -12406,11 +12406,11 @@
             <a:avLst/>
           </a:prstGeom>
           <a:solidFill>
-            <a:srgbClr val="141A24"/>
+            <a:srgbClr val="0A0A0A"/>
           </a:solidFill>
           <a:ln w="28575">
             <a:solidFill>
-              <a:srgbClr val="141A24"/>
+              <a:srgbClr val="0A0A0A"/>
             </a:solidFill>
           </a:ln>
           <a:effectLst/>
@@ -12437,9 +12437,9 @@
             <a:r>
               <a:rPr sz="1100" b="1">
                 <a:solidFill>
-                  <a:srgbClr val="F4F5F7"/>
-                </a:solidFill>
-                <a:latin typeface="JetBrains Mono"/>
+                  <a:srgbClr val="FFFFFF"/>
+                </a:solidFill>
+                <a:latin typeface="Geist Mono"/>
               </a:rPr>
               <a:t>07</a:t>
             </a:r>
@@ -12476,9 +12476,9 @@
             <a:r>
               <a:rPr sz="1100" b="1" spc="160">
                 <a:solidFill>
-                  <a:srgbClr val="6B7482"/>
-                </a:solidFill>
-                <a:latin typeface="JetBrains Mono"/>
+                  <a:srgbClr val="6B7280"/>
+                </a:solidFill>
+                <a:latin typeface="Geist Mono"/>
               </a:rPr>
               <a:t>THE AI LAYER</a:t>
             </a:r>
@@ -12515,9 +12515,9 @@
             <a:r>
               <a:rPr sz="3800" b="1">
                 <a:solidFill>
-                  <a:srgbClr val="141A24"/>
-                </a:solidFill>
-                <a:latin typeface="Space Grotesk"/>
+                  <a:srgbClr val="0A0A0A"/>
+                </a:solidFill>
+                <a:latin typeface="Geist"/>
               </a:rPr>
               <a:t>Models explain. They never decide.</a:t>
             </a:r>
@@ -12554,9 +12554,9 @@
             <a:r>
               <a:rPr sz="1600" b="0">
                 <a:solidFill>
-                  <a:srgbClr val="6B7482"/>
-                </a:solidFill>
-                <a:latin typeface="Inter"/>
+                  <a:srgbClr val="6B7280"/>
+                </a:solidFill>
+                <a:latin typeface="Geist"/>
               </a:rPr>
               <a:t>The boundary is enforced in code, and it's why the system is auditable.</a:t>
             </a:r>
@@ -12578,11 +12578,11 @@
             <a:avLst/>
           </a:prstGeom>
           <a:solidFill>
-            <a:srgbClr val="FCFDFE"/>
+            <a:srgbClr val="FFFFFF"/>
           </a:solidFill>
           <a:ln w="28575">
             <a:solidFill>
-              <a:srgbClr val="141A24"/>
+              <a:srgbClr val="0A0A0A"/>
             </a:solidFill>
           </a:ln>
           <a:effectLst/>
@@ -12624,11 +12624,11 @@
             <a:avLst/>
           </a:prstGeom>
           <a:solidFill>
-            <a:srgbClr val="53DCA2"/>
+            <a:srgbClr val="FDEDE7"/>
           </a:solidFill>
           <a:ln w="28575">
             <a:solidFill>
-              <a:srgbClr val="141A24"/>
+              <a:srgbClr val="0A0A0A"/>
             </a:solidFill>
           </a:ln>
           <a:effectLst/>
@@ -12659,9 +12659,9 @@
             <a:r>
               <a:rPr sz="1100" b="1" spc="120">
                 <a:solidFill>
-                  <a:srgbClr val="141A24"/>
-                </a:solidFill>
-                <a:latin typeface="JetBrains Mono"/>
+                  <a:srgbClr val="0A0A0A"/>
+                </a:solidFill>
+                <a:latin typeface="Geist Mono"/>
               </a:rPr>
               <a:t>LLM permitted</a:t>
             </a:r>
@@ -12683,11 +12683,11 @@
             <a:avLst/>
           </a:prstGeom>
           <a:solidFill>
-            <a:srgbClr val="FCFDFE"/>
+            <a:srgbClr val="FFFFFF"/>
           </a:solidFill>
           <a:ln w="28575">
             <a:solidFill>
-              <a:srgbClr val="141A24"/>
+              <a:srgbClr val="0A0A0A"/>
             </a:solidFill>
           </a:ln>
           <a:effectLst/>
@@ -12718,9 +12718,9 @@
             <a:r>
               <a:rPr sz="1200" b="0">
                 <a:solidFill>
-                  <a:srgbClr val="141A24"/>
-                </a:solidFill>
-                <a:latin typeface="Inter"/>
+                  <a:srgbClr val="0A0A0A"/>
+                </a:solidFill>
+                <a:latin typeface="Geist"/>
               </a:rPr>
               <a:t>Parse natural-language intent</a:t>
             </a:r>
@@ -12742,11 +12742,11 @@
             <a:avLst/>
           </a:prstGeom>
           <a:solidFill>
-            <a:srgbClr val="FCFDFE"/>
+            <a:srgbClr val="FFFFFF"/>
           </a:solidFill>
           <a:ln w="28575">
             <a:solidFill>
-              <a:srgbClr val="141A24"/>
+              <a:srgbClr val="0A0A0A"/>
             </a:solidFill>
           </a:ln>
           <a:effectLst/>
@@ -12777,9 +12777,9 @@
             <a:r>
               <a:rPr sz="1200" b="0">
                 <a:solidFill>
-                  <a:srgbClr val="141A24"/>
-                </a:solidFill>
-                <a:latin typeface="Inter"/>
+                  <a:srgbClr val="0A0A0A"/>
+                </a:solidFill>
+                <a:latin typeface="Geist"/>
               </a:rPr>
               <a:t>Explain a completed decision</a:t>
             </a:r>
@@ -12801,11 +12801,11 @@
             <a:avLst/>
           </a:prstGeom>
           <a:solidFill>
-            <a:srgbClr val="5BA4FF"/>
+            <a:srgbClr val="0A0A0A"/>
           </a:solidFill>
           <a:ln w="28575">
             <a:solidFill>
-              <a:srgbClr val="141A24"/>
+              <a:srgbClr val="0A0A0A"/>
             </a:solidFill>
           </a:ln>
           <a:effectLst/>
@@ -12836,9 +12836,9 @@
             <a:r>
               <a:rPr sz="1100" b="1" spc="120">
                 <a:solidFill>
-                  <a:srgbClr val="141A24"/>
-                </a:solidFill>
-                <a:latin typeface="JetBrains Mono"/>
+                  <a:srgbClr val="FFFFFF"/>
+                </a:solidFill>
+                <a:latin typeface="Geist Mono"/>
               </a:rPr>
               <a:t>Deterministic</a:t>
             </a:r>
@@ -12860,11 +12860,11 @@
             <a:avLst/>
           </a:prstGeom>
           <a:solidFill>
-            <a:srgbClr val="FCFDFE"/>
+            <a:srgbClr val="FFFFFF"/>
           </a:solidFill>
           <a:ln w="28575">
             <a:solidFill>
-              <a:srgbClr val="141A24"/>
+              <a:srgbClr val="0A0A0A"/>
             </a:solidFill>
           </a:ln>
           <a:effectLst/>
@@ -12895,9 +12895,9 @@
             <a:r>
               <a:rPr sz="1200" b="0">
                 <a:solidFill>
-                  <a:srgbClr val="141A24"/>
-                </a:solidFill>
-                <a:latin typeface="Inter"/>
+                  <a:srgbClr val="0A0A0A"/>
+                </a:solidFill>
+                <a:latin typeface="Geist"/>
               </a:rPr>
               <a:t>Validate the request</a:t>
             </a:r>
@@ -12919,11 +12919,11 @@
             <a:avLst/>
           </a:prstGeom>
           <a:solidFill>
-            <a:srgbClr val="FCFDFE"/>
+            <a:srgbClr val="FFFFFF"/>
           </a:solidFill>
           <a:ln w="28575">
             <a:solidFill>
-              <a:srgbClr val="141A24"/>
+              <a:srgbClr val="0A0A0A"/>
             </a:solidFill>
           </a:ln>
           <a:effectLst/>
@@ -12954,9 +12954,9 @@
             <a:r>
               <a:rPr sz="1200" b="0">
                 <a:solidFill>
-                  <a:srgbClr val="141A24"/>
-                </a:solidFill>
-                <a:latin typeface="Inter"/>
+                  <a:srgbClr val="0A0A0A"/>
+                </a:solidFill>
+                <a:latin typeface="Geist"/>
               </a:rPr>
               <a:t>Select the route</a:t>
             </a:r>
@@ -12978,11 +12978,11 @@
             <a:avLst/>
           </a:prstGeom>
           <a:solidFill>
-            <a:srgbClr val="FCFDFE"/>
+            <a:srgbClr val="FFFFFF"/>
           </a:solidFill>
           <a:ln w="28575">
             <a:solidFill>
-              <a:srgbClr val="141A24"/>
+              <a:srgbClr val="0A0A0A"/>
             </a:solidFill>
           </a:ln>
           <a:effectLst/>
@@ -13013,9 +13013,9 @@
             <a:r>
               <a:rPr sz="1200" b="0">
                 <a:solidFill>
-                  <a:srgbClr val="141A24"/>
-                </a:solidFill>
-                <a:latin typeface="Inter"/>
+                  <a:srgbClr val="0A0A0A"/>
+                </a:solidFill>
+                <a:latin typeface="Geist"/>
               </a:rPr>
               <a:t>Compute the fee</a:t>
             </a:r>
@@ -13037,7 +13037,7 @@
             <a:avLst/>
           </a:prstGeom>
           <a:solidFill>
-            <a:srgbClr val="141A24"/>
+            <a:srgbClr val="0A0A0A"/>
           </a:solidFill>
           <a:ln>
             <a:noFill/>
@@ -13081,11 +13081,11 @@
             <a:avLst/>
           </a:prstGeom>
           <a:solidFill>
-            <a:srgbClr val="FF86B9"/>
+            <a:srgbClr val="6B7280"/>
           </a:solidFill>
           <a:ln w="28575">
             <a:solidFill>
-              <a:srgbClr val="141A24"/>
+              <a:srgbClr val="0A0A0A"/>
             </a:solidFill>
           </a:ln>
           <a:effectLst/>
@@ -13116,9 +13116,9 @@
             <a:r>
               <a:rPr sz="1100" b="1" spc="120">
                 <a:solidFill>
-                  <a:srgbClr val="141A24"/>
-                </a:solidFill>
-                <a:latin typeface="JetBrains Mono"/>
+                  <a:srgbClr val="FFFFFF"/>
+                </a:solidFill>
+                <a:latin typeface="Geist Mono"/>
               </a:rPr>
               <a:t>LLM forbidden</a:t>
             </a:r>
@@ -13140,11 +13140,11 @@
             <a:avLst/>
           </a:prstGeom>
           <a:solidFill>
-            <a:srgbClr val="FCFDFE"/>
+            <a:srgbClr val="FFFFFF"/>
           </a:solidFill>
           <a:ln w="28575">
             <a:solidFill>
-              <a:srgbClr val="141A24"/>
+              <a:srgbClr val="0A0A0A"/>
             </a:solidFill>
           </a:ln>
           <a:effectLst/>
@@ -13175,9 +13175,9 @@
             <a:r>
               <a:rPr sz="1200" b="0">
                 <a:solidFill>
-                  <a:srgbClr val="141A24"/>
-                </a:solidFill>
-                <a:latin typeface="Inter"/>
+                  <a:srgbClr val="0A0A0A"/>
+                </a:solidFill>
+                <a:latin typeface="Geist"/>
               </a:rPr>
               <a:t>Choosing where money goes</a:t>
             </a:r>
@@ -13199,11 +13199,11 @@
             <a:avLst/>
           </a:prstGeom>
           <a:solidFill>
-            <a:srgbClr val="FCFDFE"/>
+            <a:srgbClr val="FFFFFF"/>
           </a:solidFill>
           <a:ln w="28575">
             <a:solidFill>
-              <a:srgbClr val="141A24"/>
+              <a:srgbClr val="0A0A0A"/>
             </a:solidFill>
           </a:ln>
           <a:effectLst/>
@@ -13234,9 +13234,9 @@
             <a:r>
               <a:rPr sz="1200" b="0">
                 <a:solidFill>
-                  <a:srgbClr val="141A24"/>
-                </a:solidFill>
-                <a:latin typeface="Inter"/>
+                  <a:srgbClr val="0A0A0A"/>
+                </a:solidFill>
+                <a:latin typeface="Geist"/>
               </a:rPr>
               <a:t>Authorizing a release</a:t>
             </a:r>
@@ -13258,7 +13258,7 @@
             <a:avLst/>
           </a:prstGeom>
           <a:solidFill>
-            <a:srgbClr val="141A24"/>
+            <a:srgbClr val="0A0A0A"/>
           </a:solidFill>
           <a:ln>
             <a:noFill/>
@@ -13302,7 +13302,7 @@
             <a:avLst/>
           </a:prstGeom>
           <a:solidFill>
-            <a:srgbClr val="141A24"/>
+            <a:srgbClr val="0A0A0A"/>
           </a:solidFill>
           <a:ln>
             <a:noFill/>
@@ -13346,11 +13346,11 @@
             <a:avLst/>
           </a:prstGeom>
           <a:solidFill>
-            <a:srgbClr val="FFCC33"/>
+            <a:srgbClr val="FDEDE7"/>
           </a:solidFill>
           <a:ln w="28575">
             <a:solidFill>
-              <a:srgbClr val="141A24"/>
+              <a:srgbClr val="0A0A0A"/>
             </a:solidFill>
           </a:ln>
           <a:effectLst/>
@@ -13381,9 +13381,9 @@
             <a:r>
               <a:rPr sz="1350" b="1">
                 <a:solidFill>
-                  <a:srgbClr val="141A24"/>
-                </a:solidFill>
-                <a:latin typeface="Inter"/>
+                  <a:srgbClr val="0A0A0A"/>
+                </a:solidFill>
+                <a:latin typeface="Geist"/>
               </a:rPr>
               <a:t>Every number in a generated explanation is validated against the decision object. Mismatch falls back to a template — a model never states a fee the system didn't compute.</a:t>
             </a:r>
@@ -13423,7 +13423,7 @@
             <a:avLst/>
           </a:prstGeom>
           <a:solidFill>
-            <a:srgbClr val="F4F5F7"/>
+            <a:srgbClr val="FFFFFF"/>
           </a:solidFill>
           <a:ln>
             <a:noFill/>
@@ -13467,11 +13467,11 @@
             <a:avLst/>
           </a:prstGeom>
           <a:solidFill>
-            <a:srgbClr val="141A24"/>
+            <a:srgbClr val="0A0A0A"/>
           </a:solidFill>
           <a:ln w="28575">
             <a:solidFill>
-              <a:srgbClr val="141A24"/>
+              <a:srgbClr val="0A0A0A"/>
             </a:solidFill>
           </a:ln>
           <a:effectLst/>
@@ -13498,9 +13498,9 @@
             <a:r>
               <a:rPr sz="1100" b="1">
                 <a:solidFill>
-                  <a:srgbClr val="F4F5F7"/>
-                </a:solidFill>
-                <a:latin typeface="JetBrains Mono"/>
+                  <a:srgbClr val="FFFFFF"/>
+                </a:solidFill>
+                <a:latin typeface="Geist Mono"/>
               </a:rPr>
               <a:t>08</a:t>
             </a:r>
@@ -13537,9 +13537,9 @@
             <a:r>
               <a:rPr sz="1100" b="1" spc="160">
                 <a:solidFill>
-                  <a:srgbClr val="6B7482"/>
-                </a:solidFill>
-                <a:latin typeface="JetBrains Mono"/>
+                  <a:srgbClr val="6B7280"/>
+                </a:solidFill>
+                <a:latin typeface="Geist Mono"/>
               </a:rPr>
               <a:t>COVERAGE</a:t>
             </a:r>
@@ -13576,9 +13576,9 @@
             <a:r>
               <a:rPr sz="3400" b="1">
                 <a:solidFill>
-                  <a:srgbClr val="141A24"/>
-                </a:solidFill>
-                <a:latin typeface="Space Grotesk"/>
+                  <a:srgbClr val="0A0A0A"/>
+                </a:solidFill>
+                <a:latin typeface="Geist"/>
               </a:rPr>
               <a:t>Every chain is both a source and a destination.</a:t>
             </a:r>
@@ -13600,7 +13600,7 @@
             <a:avLst/>
           </a:prstGeom>
           <a:solidFill>
-            <a:srgbClr val="5BA4FF"/>
+            <a:srgbClr val="F4623A"/>
           </a:solidFill>
           <a:ln>
             <a:noFill/>
@@ -13644,11 +13644,11 @@
             <a:avLst/>
           </a:prstGeom>
           <a:solidFill>
-            <a:srgbClr val="FCFDFE"/>
+            <a:srgbClr val="FFFFFF"/>
           </a:solidFill>
           <a:ln w="28575">
             <a:solidFill>
-              <a:srgbClr val="141A24"/>
+              <a:srgbClr val="0A0A0A"/>
             </a:solidFill>
           </a:ln>
           <a:effectLst/>
@@ -13705,9 +13705,9 @@
             <a:r>
               <a:rPr sz="1800" b="1">
                 <a:solidFill>
-                  <a:srgbClr val="141A24"/>
-                </a:solidFill>
-                <a:latin typeface="Space Grotesk"/>
+                  <a:srgbClr val="0A0A0A"/>
+                </a:solidFill>
+                <a:latin typeface="Geist"/>
               </a:rPr>
               <a:t>Base</a:t>
             </a:r>
@@ -13744,9 +13744,9 @@
             <a:r>
               <a:rPr sz="1100" b="0">
                 <a:solidFill>
-                  <a:srgbClr val="6B7482"/>
-                </a:solidFill>
-                <a:latin typeface="JetBrains Mono"/>
+                  <a:srgbClr val="6B7280"/>
+                </a:solidFill>
+                <a:latin typeface="Geist Mono"/>
               </a:rPr>
               <a:t>Sepolia · 84532</a:t>
             </a:r>
@@ -13783,9 +13783,9 @@
             <a:r>
               <a:rPr sz="1100" b="1" spc="60">
                 <a:solidFill>
-                  <a:srgbClr val="141A24"/>
-                </a:solidFill>
-                <a:latin typeface="JetBrains Mono"/>
+                  <a:srgbClr val="0A0A0A"/>
+                </a:solidFill>
+                <a:latin typeface="Geist Mono"/>
               </a:rPr>
               <a:t>Fast pool · CCTP</a:t>
             </a:r>
@@ -13807,7 +13807,7 @@
             <a:avLst/>
           </a:prstGeom>
           <a:solidFill>
-            <a:srgbClr val="5BA4FF"/>
+            <a:srgbClr val="F4623A"/>
           </a:solidFill>
           <a:ln>
             <a:noFill/>
@@ -13851,11 +13851,11 @@
             <a:avLst/>
           </a:prstGeom>
           <a:solidFill>
-            <a:srgbClr val="FCFDFE"/>
+            <a:srgbClr val="FFFFFF"/>
           </a:solidFill>
           <a:ln w="28575">
             <a:solidFill>
-              <a:srgbClr val="141A24"/>
+              <a:srgbClr val="0A0A0A"/>
             </a:solidFill>
           </a:ln>
           <a:effectLst/>
@@ -13912,9 +13912,9 @@
             <a:r>
               <a:rPr sz="1800" b="1">
                 <a:solidFill>
-                  <a:srgbClr val="141A24"/>
-                </a:solidFill>
-                <a:latin typeface="Space Grotesk"/>
+                  <a:srgbClr val="0A0A0A"/>
+                </a:solidFill>
+                <a:latin typeface="Geist"/>
               </a:rPr>
               <a:t>Arbitrum</a:t>
             </a:r>
@@ -13951,9 +13951,9 @@
             <a:r>
               <a:rPr sz="1100" b="0">
                 <a:solidFill>
-                  <a:srgbClr val="6B7482"/>
-                </a:solidFill>
-                <a:latin typeface="JetBrains Mono"/>
+                  <a:srgbClr val="6B7280"/>
+                </a:solidFill>
+                <a:latin typeface="Geist Mono"/>
               </a:rPr>
               <a:t>Sepolia · 421614</a:t>
             </a:r>
@@ -13990,9 +13990,9 @@
             <a:r>
               <a:rPr sz="1100" b="1" spc="60">
                 <a:solidFill>
-                  <a:srgbClr val="141A24"/>
-                </a:solidFill>
-                <a:latin typeface="JetBrains Mono"/>
+                  <a:srgbClr val="0A0A0A"/>
+                </a:solidFill>
+                <a:latin typeface="Geist Mono"/>
               </a:rPr>
               <a:t>Fast pool · CCTP</a:t>
             </a:r>
@@ -14014,7 +14014,7 @@
             <a:avLst/>
           </a:prstGeom>
           <a:solidFill>
-            <a:srgbClr val="5BA4FF"/>
+            <a:srgbClr val="F4623A"/>
           </a:solidFill>
           <a:ln>
             <a:noFill/>
@@ -14058,11 +14058,11 @@
             <a:avLst/>
           </a:prstGeom>
           <a:solidFill>
-            <a:srgbClr val="FCFDFE"/>
+            <a:srgbClr val="FFFFFF"/>
           </a:solidFill>
           <a:ln w="28575">
             <a:solidFill>
-              <a:srgbClr val="141A24"/>
+              <a:srgbClr val="0A0A0A"/>
             </a:solidFill>
           </a:ln>
           <a:effectLst/>
@@ -14119,9 +14119,9 @@
             <a:r>
               <a:rPr sz="1800" b="1">
                 <a:solidFill>
-                  <a:srgbClr val="141A24"/>
-                </a:solidFill>
-                <a:latin typeface="Space Grotesk"/>
+                  <a:srgbClr val="0A0A0A"/>
+                </a:solidFill>
+                <a:latin typeface="Geist"/>
               </a:rPr>
               <a:t>Optimism</a:t>
             </a:r>
@@ -14158,9 +14158,9 @@
             <a:r>
               <a:rPr sz="1100" b="0">
                 <a:solidFill>
-                  <a:srgbClr val="6B7482"/>
-                </a:solidFill>
-                <a:latin typeface="JetBrains Mono"/>
+                  <a:srgbClr val="6B7280"/>
+                </a:solidFill>
+                <a:latin typeface="Geist Mono"/>
               </a:rPr>
               <a:t>Sepolia · 11155420</a:t>
             </a:r>
@@ -14197,9 +14197,9 @@
             <a:r>
               <a:rPr sz="1100" b="1" spc="60">
                 <a:solidFill>
-                  <a:srgbClr val="141A24"/>
-                </a:solidFill>
-                <a:latin typeface="JetBrains Mono"/>
+                  <a:srgbClr val="0A0A0A"/>
+                </a:solidFill>
+                <a:latin typeface="Geist Mono"/>
               </a:rPr>
               <a:t>Fast pool · CCTP</a:t>
             </a:r>
@@ -14221,7 +14221,7 @@
             <a:avLst/>
           </a:prstGeom>
           <a:solidFill>
-            <a:srgbClr val="53DCA2"/>
+            <a:srgbClr val="F4623A"/>
           </a:solidFill>
           <a:ln>
             <a:noFill/>
@@ -14265,11 +14265,11 @@
             <a:avLst/>
           </a:prstGeom>
           <a:solidFill>
-            <a:srgbClr val="FCFDFE"/>
+            <a:srgbClr val="FFFFFF"/>
           </a:solidFill>
           <a:ln w="28575">
             <a:solidFill>
-              <a:srgbClr val="141A24"/>
+              <a:srgbClr val="0A0A0A"/>
             </a:solidFill>
           </a:ln>
           <a:effectLst/>
@@ -14326,9 +14326,9 @@
             <a:r>
               <a:rPr sz="1800" b="1">
                 <a:solidFill>
-                  <a:srgbClr val="141A24"/>
-                </a:solidFill>
-                <a:latin typeface="Space Grotesk"/>
+                  <a:srgbClr val="0A0A0A"/>
+                </a:solidFill>
+                <a:latin typeface="Geist"/>
               </a:rPr>
               <a:t>Arc</a:t>
             </a:r>
@@ -14365,9 +14365,9 @@
             <a:r>
               <a:rPr sz="1100" b="0">
                 <a:solidFill>
-                  <a:srgbClr val="6B7482"/>
-                </a:solidFill>
-                <a:latin typeface="JetBrains Mono"/>
+                  <a:srgbClr val="6B7280"/>
+                </a:solidFill>
+                <a:latin typeface="Geist Mono"/>
               </a:rPr>
               <a:t>Circle's L1 · native USDC</a:t>
             </a:r>
@@ -14404,9 +14404,9 @@
             <a:r>
               <a:rPr sz="1100" b="1" spc="60">
                 <a:solidFill>
-                  <a:srgbClr val="141A24"/>
-                </a:solidFill>
-                <a:latin typeface="JetBrains Mono"/>
+                  <a:srgbClr val="0A0A0A"/>
+                </a:solidFill>
+                <a:latin typeface="Geist Mono"/>
               </a:rPr>
               <a:t>Fast pool · CCTP</a:t>
             </a:r>
@@ -14428,7 +14428,7 @@
             <a:avLst/>
           </a:prstGeom>
           <a:solidFill>
-            <a:srgbClr val="D0A1FF"/>
+            <a:srgbClr val="F4623A"/>
           </a:solidFill>
           <a:ln>
             <a:noFill/>
@@ -14472,11 +14472,11 @@
             <a:avLst/>
           </a:prstGeom>
           <a:solidFill>
-            <a:srgbClr val="FCFDFE"/>
+            <a:srgbClr val="FFFFFF"/>
           </a:solidFill>
           <a:ln w="28575">
             <a:solidFill>
-              <a:srgbClr val="141A24"/>
+              <a:srgbClr val="0A0A0A"/>
             </a:solidFill>
           </a:ln>
           <a:effectLst/>
@@ -14533,9 +14533,9 @@
             <a:r>
               <a:rPr sz="1800" b="1">
                 <a:solidFill>
-                  <a:srgbClr val="141A24"/>
-                </a:solidFill>
-                <a:latin typeface="Space Grotesk"/>
+                  <a:srgbClr val="0A0A0A"/>
+                </a:solidFill>
+                <a:latin typeface="Geist"/>
               </a:rPr>
               <a:t>Hedera</a:t>
             </a:r>
@@ -14572,9 +14572,9 @@
             <a:r>
               <a:rPr sz="1100" b="0">
                 <a:solidFill>
-                  <a:srgbClr val="6B7482"/>
-                </a:solidFill>
-                <a:latin typeface="JetBrains Mono"/>
+                  <a:srgbClr val="6B7280"/>
+                </a:solidFill>
+                <a:latin typeface="Geist Mono"/>
               </a:rPr>
               <a:t>Testnet · 296</a:t>
             </a:r>
@@ -14611,9 +14611,9 @@
             <a:r>
               <a:rPr sz="1100" b="1" spc="60">
                 <a:solidFill>
-                  <a:srgbClr val="141A24"/>
-                </a:solidFill>
-                <a:latin typeface="JetBrains Mono"/>
+                  <a:srgbClr val="0A0A0A"/>
+                </a:solidFill>
+                <a:latin typeface="Geist Mono"/>
               </a:rPr>
               <a:t>Fast pool</a:t>
             </a:r>
@@ -14635,7 +14635,7 @@
             <a:avLst/>
           </a:prstGeom>
           <a:solidFill>
-            <a:srgbClr val="141A24"/>
+            <a:srgbClr val="0A0A0A"/>
           </a:solidFill>
           <a:ln>
             <a:noFill/>
@@ -14679,11 +14679,11 @@
             <a:avLst/>
           </a:prstGeom>
           <a:solidFill>
-            <a:srgbClr val="FCFDFE"/>
+            <a:srgbClr val="FFFFFF"/>
           </a:solidFill>
           <a:ln w="28575">
             <a:solidFill>
-              <a:srgbClr val="141A24"/>
+              <a:srgbClr val="0A0A0A"/>
             </a:solidFill>
           </a:ln>
           <a:effectLst/>
@@ -14740,9 +14740,9 @@
             <a:r>
               <a:rPr sz="1800" b="1">
                 <a:solidFill>
-                  <a:srgbClr val="141A24"/>
-                </a:solidFill>
-                <a:latin typeface="Space Grotesk"/>
+                  <a:srgbClr val="0A0A0A"/>
+                </a:solidFill>
+                <a:latin typeface="Geist"/>
               </a:rPr>
               <a:t>Ethereum</a:t>
             </a:r>
@@ -14779,9 +14779,9 @@
             <a:r>
               <a:rPr sz="1100" b="0">
                 <a:solidFill>
-                  <a:srgbClr val="6B7482"/>
-                </a:solidFill>
-                <a:latin typeface="JetBrains Mono"/>
+                  <a:srgbClr val="6B7280"/>
+                </a:solidFill>
+                <a:latin typeface="Geist Mono"/>
               </a:rPr>
               <a:t>Sepolia · 11155111</a:t>
             </a:r>
@@ -14818,9 +14818,9 @@
             <a:r>
               <a:rPr sz="1100" b="1" spc="60">
                 <a:solidFill>
-                  <a:srgbClr val="141A24"/>
-                </a:solidFill>
-                <a:latin typeface="JetBrains Mono"/>
+                  <a:srgbClr val="0A0A0A"/>
+                </a:solidFill>
+                <a:latin typeface="Geist Mono"/>
               </a:rPr>
               <a:t>Source only</a:t>
             </a:r>
@@ -14857,9 +14857,9 @@
             <a:r>
               <a:rPr sz="1300" b="0">
                 <a:solidFill>
-                  <a:srgbClr val="6B7482"/>
-                </a:solidFill>
-                <a:latin typeface="Inter"/>
+                  <a:srgbClr val="6B7280"/>
+                </a:solidFill>
+                <a:latin typeface="Geist"/>
               </a:rPr>
               <a:t>A payment is a directed edge between any two. Not a hub-and-spoke bridge.</a:t>
             </a:r>
@@ -14899,7 +14899,7 @@
             <a:avLst/>
           </a:prstGeom>
           <a:solidFill>
-            <a:srgbClr val="F4F5F7"/>
+            <a:srgbClr val="FFFFFF"/>
           </a:solidFill>
           <a:ln>
             <a:noFill/>
@@ -14943,11 +14943,11 @@
             <a:avLst/>
           </a:prstGeom>
           <a:solidFill>
-            <a:srgbClr val="141A24"/>
+            <a:srgbClr val="0A0A0A"/>
           </a:solidFill>
           <a:ln w="28575">
             <a:solidFill>
-              <a:srgbClr val="141A24"/>
+              <a:srgbClr val="0A0A0A"/>
             </a:solidFill>
           </a:ln>
           <a:effectLst/>
@@ -14974,9 +14974,9 @@
             <a:r>
               <a:rPr sz="1100" b="1">
                 <a:solidFill>
-                  <a:srgbClr val="F4F5F7"/>
-                </a:solidFill>
-                <a:latin typeface="JetBrains Mono"/>
+                  <a:srgbClr val="FFFFFF"/>
+                </a:solidFill>
+                <a:latin typeface="Geist Mono"/>
               </a:rPr>
               <a:t>09</a:t>
             </a:r>
@@ -15013,9 +15013,9 @@
             <a:r>
               <a:rPr sz="1100" b="1" spc="160">
                 <a:solidFill>
-                  <a:srgbClr val="6B7482"/>
-                </a:solidFill>
-                <a:latin typeface="JetBrains Mono"/>
+                  <a:srgbClr val="6B7280"/>
+                </a:solidFill>
+                <a:latin typeface="Geist Mono"/>
               </a:rPr>
               <a:t>TRUST MODEL</a:t>
             </a:r>
@@ -15052,9 +15052,9 @@
             <a:r>
               <a:rPr sz="3800" b="1">
                 <a:solidFill>
-                  <a:srgbClr val="141A24"/>
-                </a:solidFill>
-                <a:latin typeface="Space Grotesk"/>
+                  <a:srgbClr val="0A0A0A"/>
+                </a:solidFill>
+                <a:latin typeface="Geist"/>
               </a:rPr>
               <a:t>Stated plainly, not buried.</a:t>
             </a:r>
@@ -15076,11 +15076,11 @@
             <a:avLst/>
           </a:prstGeom>
           <a:solidFill>
-            <a:srgbClr val="FCFDFE"/>
+            <a:srgbClr val="FFFFFF"/>
           </a:solidFill>
           <a:ln w="28575">
             <a:solidFill>
-              <a:srgbClr val="141A24"/>
+              <a:srgbClr val="0A0A0A"/>
             </a:solidFill>
           </a:ln>
           <a:effectLst/>
@@ -15122,7 +15122,7 @@
             <a:avLst/>
           </a:prstGeom>
           <a:solidFill>
-            <a:srgbClr val="141A24"/>
+            <a:srgbClr val="0A0A0A"/>
           </a:solidFill>
           <a:ln>
             <a:noFill/>
@@ -15181,9 +15181,9 @@
             <a:r>
               <a:rPr sz="1100" b="1" spc="120">
                 <a:solidFill>
-                  <a:srgbClr val="141A24"/>
-                </a:solidFill>
-                <a:latin typeface="JetBrains Mono"/>
+                  <a:srgbClr val="0A0A0A"/>
+                </a:solidFill>
+                <a:latin typeface="Geist Mono"/>
               </a:rPr>
               <a:t>WHAT WE MITIGATE</a:t>
             </a:r>
@@ -15220,9 +15220,9 @@
             <a:r>
               <a:rPr sz="1200" b="1">
                 <a:solidFill>
-                  <a:srgbClr val="141A24"/>
-                </a:solidFill>
-                <a:latin typeface="Inter"/>
+                  <a:srgbClr val="0A0A0A"/>
+                </a:solidFill>
+                <a:latin typeface="Geist"/>
               </a:rPr>
               <a:t>—</a:t>
             </a:r>
@@ -15259,9 +15259,9 @@
             <a:r>
               <a:rPr sz="1250" b="0">
                 <a:solidFill>
-                  <a:srgbClr val="6B7482"/>
-                </a:solidFill>
-                <a:latin typeface="Inter"/>
+                  <a:srgbClr val="6B7280"/>
+                </a:solidFill>
+                <a:latin typeface="Geist"/>
               </a:rPr>
               <a:t>CCTP offered as a trust-minimized alternative for the same payment</a:t>
             </a:r>
@@ -15298,9 +15298,9 @@
             <a:r>
               <a:rPr sz="1200" b="1">
                 <a:solidFill>
-                  <a:srgbClr val="141A24"/>
-                </a:solidFill>
-                <a:latin typeface="Inter"/>
+                  <a:srgbClr val="0A0A0A"/>
+                </a:solidFill>
+                <a:latin typeface="Geist"/>
               </a:rPr>
               <a:t>—</a:t>
             </a:r>
@@ -15337,9 +15337,9 @@
             <a:r>
               <a:rPr sz="1250" b="0">
                 <a:solidFill>
-                  <a:srgbClr val="6B7482"/>
-                </a:solidFill>
-                <a:latin typeface="Inter"/>
+                  <a:srgbClr val="6B7280"/>
+                </a:solidFill>
+                <a:latin typeface="Geist"/>
               </a:rPr>
               <a:t>Pool ownership held by a Safe multisig, not a single EOA</a:t>
             </a:r>
@@ -15376,9 +15376,9 @@
             <a:r>
               <a:rPr sz="1200" b="1">
                 <a:solidFill>
-                  <a:srgbClr val="141A24"/>
-                </a:solidFill>
-                <a:latin typeface="Inter"/>
+                  <a:srgbClr val="0A0A0A"/>
+                </a:solidFill>
+                <a:latin typeface="Geist"/>
               </a:rPr>
               <a:t>—</a:t>
             </a:r>
@@ -15415,9 +15415,9 @@
             <a:r>
               <a:rPr sz="1250" b="0">
                 <a:solidFill>
-                  <a:srgbClr val="6B7482"/>
-                </a:solidFill>
-                <a:latin typeface="Inter"/>
+                  <a:srgbClr val="6B7280"/>
+                </a:solidFill>
+                <a:latin typeface="Geist"/>
               </a:rPr>
               <a:t>Release authority is Ledger-backed, not a hot server key</a:t>
             </a:r>
@@ -15454,9 +15454,9 @@
             <a:r>
               <a:rPr sz="1200" b="1">
                 <a:solidFill>
-                  <a:srgbClr val="141A24"/>
-                </a:solidFill>
-                <a:latin typeface="Inter"/>
+                  <a:srgbClr val="0A0A0A"/>
+                </a:solidFill>
+                <a:latin typeface="Geist"/>
               </a:rPr>
               <a:t>—</a:t>
             </a:r>
@@ -15493,9 +15493,9 @@
             <a:r>
               <a:rPr sz="1250" b="0">
                 <a:solidFill>
-                  <a:srgbClr val="6B7482"/>
-                </a:solidFill>
-                <a:latin typeface="Inter"/>
+                  <a:srgbClr val="6B7280"/>
+                </a:solidFill>
+                <a:latin typeface="Geist"/>
               </a:rPr>
               <a:t>State is durable and reconciled from chain events</a:t>
             </a:r>
@@ -15532,9 +15532,9 @@
             <a:r>
               <a:rPr sz="1100" b="1" spc="120">
                 <a:solidFill>
-                  <a:srgbClr val="141A24"/>
-                </a:solidFill>
-                <a:latin typeface="JetBrains Mono"/>
+                  <a:srgbClr val="0A0A0A"/>
+                </a:solidFill>
+                <a:latin typeface="Geist Mono"/>
               </a:rPr>
               <a:t>WHAT WE DON'T CLAIM</a:t>
             </a:r>
@@ -15571,9 +15571,9 @@
             <a:r>
               <a:rPr sz="1200" b="1">
                 <a:solidFill>
-                  <a:srgbClr val="141A24"/>
-                </a:solidFill>
-                <a:latin typeface="Inter"/>
+                  <a:srgbClr val="0A0A0A"/>
+                </a:solidFill>
+                <a:latin typeface="Geist"/>
               </a:rPr>
               <a:t>—</a:t>
             </a:r>
@@ -15610,9 +15610,9 @@
             <a:r>
               <a:rPr sz="1250" b="0">
                 <a:solidFill>
-                  <a:srgbClr val="6B7482"/>
-                </a:solidFill>
-                <a:latin typeface="Inter"/>
+                  <a:srgbClr val="6B7280"/>
+                </a:solidFill>
+                <a:latin typeface="Geist"/>
               </a:rPr>
               <a:t>The fast-pool route is custodial — the relayer controls liquidity and decides when to release</a:t>
             </a:r>
@@ -15649,9 +15649,9 @@
             <a:r>
               <a:rPr sz="1200" b="1">
                 <a:solidFill>
-                  <a:srgbClr val="141A24"/>
-                </a:solidFill>
-                <a:latin typeface="Inter"/>
+                  <a:srgbClr val="0A0A0A"/>
+                </a:solidFill>
+                <a:latin typeface="Geist"/>
               </a:rPr>
               <a:t>—</a:t>
             </a:r>
@@ -15688,9 +15688,9 @@
             <a:r>
               <a:rPr sz="1250" b="0">
                 <a:solidFill>
-                  <a:srgbClr val="6B7482"/>
-                </a:solidFill>
-                <a:latin typeface="Inter"/>
+                  <a:srgbClr val="6B7280"/>
+                </a:solidFill>
+                <a:latin typeface="Geist"/>
               </a:rPr>
               <a:t>Release is not decentralized. A bonded watcher network is the next real trust reduction, and it is not in this build</a:t>
             </a:r>
@@ -15712,7 +15712,7 @@
             <a:avLst/>
           </a:prstGeom>
           <a:solidFill>
-            <a:srgbClr val="141A24"/>
+            <a:srgbClr val="0A0A0A"/>
           </a:solidFill>
           <a:ln>
             <a:noFill/>
@@ -15756,11 +15756,11 @@
             <a:avLst/>
           </a:prstGeom>
           <a:solidFill>
-            <a:srgbClr val="FFCC33"/>
+            <a:srgbClr val="FDEDE7"/>
           </a:solidFill>
           <a:ln w="28575">
             <a:solidFill>
-              <a:srgbClr val="141A24"/>
+              <a:srgbClr val="0A0A0A"/>
             </a:solidFill>
           </a:ln>
           <a:effectLst/>
@@ -15791,9 +15791,9 @@
             <a:r>
               <a:rPr sz="1400" b="1">
                 <a:solidFill>
-                  <a:srgbClr val="141A24"/>
-                </a:solidFill>
-                <a:latin typeface="Inter"/>
+                  <a:srgbClr val="0A0A0A"/>
+                </a:solidFill>
+                <a:latin typeface="Geist"/>
               </a:rPr>
               <a:t>Same tradeoff early Across and Hop shipped — and the honest reason the fast route is fast.</a:t>
             </a:r>

--- a/deck/Breeja-Pitch-Deck.pptx
+++ b/deck/Breeja-Pitch-Deck.pptx
@@ -1,24 +1,24 @@
 
 <file path=ppt/presentation.xml><?xml version="1.0" encoding="utf-8"?>
-<p:presentation xmlns:a="http://schemas.openxmlformats.org/drawingml/2006/main" xmlns:r="http://schemas.openxmlformats.org/officeDocument/2006/relationships" xmlns:p="http://schemas.openxmlformats.org/presentationml/2006/main" saveSubsetFonts="1" autoCompressPictures="0">
+<p:presentation xmlns:a="http://schemas.openxmlformats.org/drawingml/2006/main" xmlns:r="http://schemas.openxmlformats.org/officeDocument/2006/relationships" xmlns:p="http://schemas.openxmlformats.org/presentationml/2006/main" autoCompressPictures="0">
   <p:sldMasterIdLst>
     <p:sldMasterId id="2147483648" r:id="rId1"/>
   </p:sldMasterIdLst>
   <p:sldIdLst>
-    <p:sldId id="256" r:id="rId7"/>
-    <p:sldId id="257" r:id="rId8"/>
-    <p:sldId id="258" r:id="rId9"/>
-    <p:sldId id="259" r:id="rId10"/>
-    <p:sldId id="260" r:id="rId11"/>
-    <p:sldId id="261" r:id="rId12"/>
-    <p:sldId id="262" r:id="rId13"/>
-    <p:sldId id="263" r:id="rId14"/>
-    <p:sldId id="264" r:id="rId15"/>
-    <p:sldId id="265" r:id="rId16"/>
-    <p:sldId id="266" r:id="rId17"/>
-    <p:sldId id="267" r:id="rId18"/>
+    <p:sldId id="256" r:id="rId3"/>
+    <p:sldId id="257" r:id="rId4"/>
+    <p:sldId id="258" r:id="rId5"/>
+    <p:sldId id="259" r:id="rId6"/>
+    <p:sldId id="260" r:id="rId7"/>
+    <p:sldId id="261" r:id="rId8"/>
+    <p:sldId id="262" r:id="rId9"/>
+    <p:sldId id="263" r:id="rId10"/>
+    <p:sldId id="264" r:id="rId11"/>
+    <p:sldId id="265" r:id="rId12"/>
+    <p:sldId id="266" r:id="rId13"/>
+    <p:sldId id="267" r:id="rId14"/>
   </p:sldIdLst>
-  <p:sldSz cx="12191695" cy="6858000" type="screen4x3"/>
+  <p:sldSz cx="12191365" cy="6858000" type="screen4x3"/>
   <p:notesSz cx="6858000" cy="9144000"/>
   <p:defaultTextStyle>
     <a:defPPr>
@@ -115,6 +115,22 @@
       </a:defRPr>
     </a:lvl9pPr>
   </p:defaultTextStyle>
+  <p:extLst>
+    <p:ext uri="{EFAFB233-063F-42B5-8137-9DF3F51BA10A}">
+      <p15:sldGuideLst xmlns:p15="http://schemas.microsoft.com/office/powerpoint/2012/main">
+        <p15:guide id="1" orient="horz" pos="2160" userDrawn="1">
+          <p15:clr>
+            <a:srgbClr val="A4A3A4"/>
+          </p15:clr>
+        </p15:guide>
+        <p15:guide id="2" pos="2880" userDrawn="1">
+          <p15:clr>
+            <a:srgbClr val="A4A3A4"/>
+          </p15:clr>
+        </p15:guide>
+      </p15:sldGuideLst>
+    </p:ext>
+  </p:extLst>
 </p:presentation>
 </file>
 
@@ -299,7 +315,6 @@
           <a:p>
             <a:fld id="{5BCAD085-E8A6-8845-BD4E-CB4CCA059FC4}" type="datetimeFigureOut">
               <a:rPr lang="en-US" smtClean="0"/>
-              <a:t>1/27/13</a:t>
             </a:fld>
             <a:endParaRPr lang="en-US"/>
           </a:p>
@@ -341,18 +356,12 @@
           <a:p>
             <a:fld id="{C1FF6DA9-008F-8B48-92A6-B652298478BF}" type="slidenum">
               <a:rPr lang="en-US" smtClean="0"/>
-              <a:t>‹#›</a:t>
             </a:fld>
             <a:endParaRPr lang="en-US"/>
           </a:p>
         </p:txBody>
       </p:sp>
     </p:spTree>
-    <p:extLst>
-      <p:ext uri="{BB962C8B-B14F-4D97-AF65-F5344CB8AC3E}">
-        <p14:creationId xmlns:p14="http://schemas.microsoft.com/office/powerpoint/2010/main" val="3168075583"/>
-      </p:ext>
-    </p:extLst>
   </p:cSld>
   <p:clrMapOvr>
     <a:masterClrMapping/>
@@ -420,6 +429,7 @@
               <a:rPr lang="en-US" smtClean="0"/>
               <a:t>Click to edit Master text styles</a:t>
             </a:r>
+            <a:endParaRPr lang="en-US" smtClean="0"/>
           </a:p>
           <a:p>
             <a:pPr lvl="1"/>
@@ -427,6 +437,7 @@
               <a:rPr lang="en-US" smtClean="0"/>
               <a:t>Second level</a:t>
             </a:r>
+            <a:endParaRPr lang="en-US" smtClean="0"/>
           </a:p>
           <a:p>
             <a:pPr lvl="2"/>
@@ -434,6 +445,7 @@
               <a:rPr lang="en-US" smtClean="0"/>
               <a:t>Third level</a:t>
             </a:r>
+            <a:endParaRPr lang="en-US" smtClean="0"/>
           </a:p>
           <a:p>
             <a:pPr lvl="3"/>
@@ -441,6 +453,7 @@
               <a:rPr lang="en-US" smtClean="0"/>
               <a:t>Fourth level</a:t>
             </a:r>
+            <a:endParaRPr lang="en-US" smtClean="0"/>
           </a:p>
           <a:p>
             <a:pPr lvl="4"/>
@@ -469,7 +482,6 @@
           <a:p>
             <a:fld id="{5BCAD085-E8A6-8845-BD4E-CB4CCA059FC4}" type="datetimeFigureOut">
               <a:rPr lang="en-US" smtClean="0"/>
-              <a:t>1/27/13</a:t>
             </a:fld>
             <a:endParaRPr lang="en-US"/>
           </a:p>
@@ -511,18 +523,12 @@
           <a:p>
             <a:fld id="{C1FF6DA9-008F-8B48-92A6-B652298478BF}" type="slidenum">
               <a:rPr lang="en-US" smtClean="0"/>
-              <a:t>‹#›</a:t>
             </a:fld>
             <a:endParaRPr lang="en-US"/>
           </a:p>
         </p:txBody>
       </p:sp>
     </p:spTree>
-    <p:extLst>
-      <p:ext uri="{BB962C8B-B14F-4D97-AF65-F5344CB8AC3E}">
-        <p14:creationId xmlns:p14="http://schemas.microsoft.com/office/powerpoint/2010/main" val="2910927964"/>
-      </p:ext>
-    </p:extLst>
   </p:cSld>
   <p:clrMapOvr>
     <a:masterClrMapping/>
@@ -600,6 +606,7 @@
               <a:rPr lang="en-US" smtClean="0"/>
               <a:t>Click to edit Master text styles</a:t>
             </a:r>
+            <a:endParaRPr lang="en-US" smtClean="0"/>
           </a:p>
           <a:p>
             <a:pPr lvl="1"/>
@@ -607,6 +614,7 @@
               <a:rPr lang="en-US" smtClean="0"/>
               <a:t>Second level</a:t>
             </a:r>
+            <a:endParaRPr lang="en-US" smtClean="0"/>
           </a:p>
           <a:p>
             <a:pPr lvl="2"/>
@@ -614,6 +622,7 @@
               <a:rPr lang="en-US" smtClean="0"/>
               <a:t>Third level</a:t>
             </a:r>
+            <a:endParaRPr lang="en-US" smtClean="0"/>
           </a:p>
           <a:p>
             <a:pPr lvl="3"/>
@@ -621,6 +630,7 @@
               <a:rPr lang="en-US" smtClean="0"/>
               <a:t>Fourth level</a:t>
             </a:r>
+            <a:endParaRPr lang="en-US" smtClean="0"/>
           </a:p>
           <a:p>
             <a:pPr lvl="4"/>
@@ -649,7 +659,6 @@
           <a:p>
             <a:fld id="{5BCAD085-E8A6-8845-BD4E-CB4CCA059FC4}" type="datetimeFigureOut">
               <a:rPr lang="en-US" smtClean="0"/>
-              <a:t>1/27/13</a:t>
             </a:fld>
             <a:endParaRPr lang="en-US"/>
           </a:p>
@@ -691,18 +700,12 @@
           <a:p>
             <a:fld id="{C1FF6DA9-008F-8B48-92A6-B652298478BF}" type="slidenum">
               <a:rPr lang="en-US" smtClean="0"/>
-              <a:t>‹#›</a:t>
             </a:fld>
             <a:endParaRPr lang="en-US"/>
           </a:p>
         </p:txBody>
       </p:sp>
     </p:spTree>
-    <p:extLst>
-      <p:ext uri="{BB962C8B-B14F-4D97-AF65-F5344CB8AC3E}">
-        <p14:creationId xmlns:p14="http://schemas.microsoft.com/office/powerpoint/2010/main" val="3612223792"/>
-      </p:ext>
-    </p:extLst>
   </p:cSld>
   <p:clrMapOvr>
     <a:masterClrMapping/>
@@ -770,6 +773,7 @@
               <a:rPr lang="en-US" smtClean="0"/>
               <a:t>Click to edit Master text styles</a:t>
             </a:r>
+            <a:endParaRPr lang="en-US" smtClean="0"/>
           </a:p>
           <a:p>
             <a:pPr lvl="1"/>
@@ -777,6 +781,7 @@
               <a:rPr lang="en-US" smtClean="0"/>
               <a:t>Second level</a:t>
             </a:r>
+            <a:endParaRPr lang="en-US" smtClean="0"/>
           </a:p>
           <a:p>
             <a:pPr lvl="2"/>
@@ -784,6 +789,7 @@
               <a:rPr lang="en-US" smtClean="0"/>
               <a:t>Third level</a:t>
             </a:r>
+            <a:endParaRPr lang="en-US" smtClean="0"/>
           </a:p>
           <a:p>
             <a:pPr lvl="3"/>
@@ -791,6 +797,7 @@
               <a:rPr lang="en-US" smtClean="0"/>
               <a:t>Fourth level</a:t>
             </a:r>
+            <a:endParaRPr lang="en-US" smtClean="0"/>
           </a:p>
           <a:p>
             <a:pPr lvl="4"/>
@@ -819,7 +826,6 @@
           <a:p>
             <a:fld id="{5BCAD085-E8A6-8845-BD4E-CB4CCA059FC4}" type="datetimeFigureOut">
               <a:rPr lang="en-US" smtClean="0"/>
-              <a:t>1/27/13</a:t>
             </a:fld>
             <a:endParaRPr lang="en-US"/>
           </a:p>
@@ -861,18 +867,12 @@
           <a:p>
             <a:fld id="{C1FF6DA9-008F-8B48-92A6-B652298478BF}" type="slidenum">
               <a:rPr lang="en-US" smtClean="0"/>
-              <a:t>‹#›</a:t>
             </a:fld>
             <a:endParaRPr lang="en-US"/>
           </a:p>
         </p:txBody>
       </p:sp>
     </p:spTree>
-    <p:extLst>
-      <p:ext uri="{BB962C8B-B14F-4D97-AF65-F5344CB8AC3E}">
-        <p14:creationId xmlns:p14="http://schemas.microsoft.com/office/powerpoint/2010/main" val="2614314258"/>
-      </p:ext>
-    </p:extLst>
   </p:cSld>
   <p:clrMapOvr>
     <a:masterClrMapping/>
@@ -1045,6 +1045,7 @@
               <a:rPr lang="en-US" smtClean="0"/>
               <a:t>Click to edit Master text styles</a:t>
             </a:r>
+            <a:endParaRPr lang="en-US" smtClean="0"/>
           </a:p>
         </p:txBody>
       </p:sp>
@@ -1065,7 +1066,6 @@
           <a:p>
             <a:fld id="{5BCAD085-E8A6-8845-BD4E-CB4CCA059FC4}" type="datetimeFigureOut">
               <a:rPr lang="en-US" smtClean="0"/>
-              <a:t>1/27/13</a:t>
             </a:fld>
             <a:endParaRPr lang="en-US"/>
           </a:p>
@@ -1107,18 +1107,12 @@
           <a:p>
             <a:fld id="{C1FF6DA9-008F-8B48-92A6-B652298478BF}" type="slidenum">
               <a:rPr lang="en-US" smtClean="0"/>
-              <a:t>‹#›</a:t>
             </a:fld>
             <a:endParaRPr lang="en-US"/>
           </a:p>
         </p:txBody>
       </p:sp>
     </p:spTree>
-    <p:extLst>
-      <p:ext uri="{BB962C8B-B14F-4D97-AF65-F5344CB8AC3E}">
-        <p14:creationId xmlns:p14="http://schemas.microsoft.com/office/powerpoint/2010/main" val="960648375"/>
-      </p:ext>
-    </p:extLst>
   </p:cSld>
   <p:clrMapOvr>
     <a:masterClrMapping/>
@@ -1219,6 +1213,7 @@
               <a:rPr lang="en-US" smtClean="0"/>
               <a:t>Click to edit Master text styles</a:t>
             </a:r>
+            <a:endParaRPr lang="en-US" smtClean="0"/>
           </a:p>
           <a:p>
             <a:pPr lvl="1"/>
@@ -1226,6 +1221,7 @@
               <a:rPr lang="en-US" smtClean="0"/>
               <a:t>Second level</a:t>
             </a:r>
+            <a:endParaRPr lang="en-US" smtClean="0"/>
           </a:p>
           <a:p>
             <a:pPr lvl="2"/>
@@ -1233,6 +1229,7 @@
               <a:rPr lang="en-US" smtClean="0"/>
               <a:t>Third level</a:t>
             </a:r>
+            <a:endParaRPr lang="en-US" smtClean="0"/>
           </a:p>
           <a:p>
             <a:pPr lvl="3"/>
@@ -1240,6 +1237,7 @@
               <a:rPr lang="en-US" smtClean="0"/>
               <a:t>Fourth level</a:t>
             </a:r>
+            <a:endParaRPr lang="en-US" smtClean="0"/>
           </a:p>
           <a:p>
             <a:pPr lvl="4"/>
@@ -1304,6 +1302,7 @@
               <a:rPr lang="en-US" smtClean="0"/>
               <a:t>Click to edit Master text styles</a:t>
             </a:r>
+            <a:endParaRPr lang="en-US" smtClean="0"/>
           </a:p>
           <a:p>
             <a:pPr lvl="1"/>
@@ -1311,6 +1310,7 @@
               <a:rPr lang="en-US" smtClean="0"/>
               <a:t>Second level</a:t>
             </a:r>
+            <a:endParaRPr lang="en-US" smtClean="0"/>
           </a:p>
           <a:p>
             <a:pPr lvl="2"/>
@@ -1318,6 +1318,7 @@
               <a:rPr lang="en-US" smtClean="0"/>
               <a:t>Third level</a:t>
             </a:r>
+            <a:endParaRPr lang="en-US" smtClean="0"/>
           </a:p>
           <a:p>
             <a:pPr lvl="3"/>
@@ -1325,6 +1326,7 @@
               <a:rPr lang="en-US" smtClean="0"/>
               <a:t>Fourth level</a:t>
             </a:r>
+            <a:endParaRPr lang="en-US" smtClean="0"/>
           </a:p>
           <a:p>
             <a:pPr lvl="4"/>
@@ -1353,7 +1355,6 @@
           <a:p>
             <a:fld id="{5BCAD085-E8A6-8845-BD4E-CB4CCA059FC4}" type="datetimeFigureOut">
               <a:rPr lang="en-US" smtClean="0"/>
-              <a:t>1/27/13</a:t>
             </a:fld>
             <a:endParaRPr lang="en-US"/>
           </a:p>
@@ -1395,18 +1396,12 @@
           <a:p>
             <a:fld id="{C1FF6DA9-008F-8B48-92A6-B652298478BF}" type="slidenum">
               <a:rPr lang="en-US" smtClean="0"/>
-              <a:t>‹#›</a:t>
             </a:fld>
             <a:endParaRPr lang="en-US"/>
           </a:p>
         </p:txBody>
       </p:sp>
     </p:spTree>
-    <p:extLst>
-      <p:ext uri="{BB962C8B-B14F-4D97-AF65-F5344CB8AC3E}">
-        <p14:creationId xmlns:p14="http://schemas.microsoft.com/office/powerpoint/2010/main" val="2782244947"/>
-      </p:ext>
-    </p:extLst>
   </p:cSld>
   <p:clrMapOvr>
     <a:masterClrMapping/>
@@ -1520,6 +1515,7 @@
               <a:rPr lang="en-US" smtClean="0"/>
               <a:t>Click to edit Master text styles</a:t>
             </a:r>
+            <a:endParaRPr lang="en-US" smtClean="0"/>
           </a:p>
         </p:txBody>
       </p:sp>
@@ -1576,6 +1572,7 @@
               <a:rPr lang="en-US" smtClean="0"/>
               <a:t>Click to edit Master text styles</a:t>
             </a:r>
+            <a:endParaRPr lang="en-US" smtClean="0"/>
           </a:p>
           <a:p>
             <a:pPr lvl="1"/>
@@ -1583,6 +1580,7 @@
               <a:rPr lang="en-US" smtClean="0"/>
               <a:t>Second level</a:t>
             </a:r>
+            <a:endParaRPr lang="en-US" smtClean="0"/>
           </a:p>
           <a:p>
             <a:pPr lvl="2"/>
@@ -1590,6 +1588,7 @@
               <a:rPr lang="en-US" smtClean="0"/>
               <a:t>Third level</a:t>
             </a:r>
+            <a:endParaRPr lang="en-US" smtClean="0"/>
           </a:p>
           <a:p>
             <a:pPr lvl="3"/>
@@ -1597,6 +1596,7 @@
               <a:rPr lang="en-US" smtClean="0"/>
               <a:t>Fourth level</a:t>
             </a:r>
+            <a:endParaRPr lang="en-US" smtClean="0"/>
           </a:p>
           <a:p>
             <a:pPr lvl="4"/>
@@ -1670,6 +1670,7 @@
               <a:rPr lang="en-US" smtClean="0"/>
               <a:t>Click to edit Master text styles</a:t>
             </a:r>
+            <a:endParaRPr lang="en-US" smtClean="0"/>
           </a:p>
         </p:txBody>
       </p:sp>
@@ -1726,6 +1727,7 @@
               <a:rPr lang="en-US" smtClean="0"/>
               <a:t>Click to edit Master text styles</a:t>
             </a:r>
+            <a:endParaRPr lang="en-US" smtClean="0"/>
           </a:p>
           <a:p>
             <a:pPr lvl="1"/>
@@ -1733,6 +1735,7 @@
               <a:rPr lang="en-US" smtClean="0"/>
               <a:t>Second level</a:t>
             </a:r>
+            <a:endParaRPr lang="en-US" smtClean="0"/>
           </a:p>
           <a:p>
             <a:pPr lvl="2"/>
@@ -1740,6 +1743,7 @@
               <a:rPr lang="en-US" smtClean="0"/>
               <a:t>Third level</a:t>
             </a:r>
+            <a:endParaRPr lang="en-US" smtClean="0"/>
           </a:p>
           <a:p>
             <a:pPr lvl="3"/>
@@ -1747,6 +1751,7 @@
               <a:rPr lang="en-US" smtClean="0"/>
               <a:t>Fourth level</a:t>
             </a:r>
+            <a:endParaRPr lang="en-US" smtClean="0"/>
           </a:p>
           <a:p>
             <a:pPr lvl="4"/>
@@ -1775,7 +1780,6 @@
           <a:p>
             <a:fld id="{5BCAD085-E8A6-8845-BD4E-CB4CCA059FC4}" type="datetimeFigureOut">
               <a:rPr lang="en-US" smtClean="0"/>
-              <a:t>1/27/13</a:t>
             </a:fld>
             <a:endParaRPr lang="en-US"/>
           </a:p>
@@ -1817,18 +1821,12 @@
           <a:p>
             <a:fld id="{C1FF6DA9-008F-8B48-92A6-B652298478BF}" type="slidenum">
               <a:rPr lang="en-US" smtClean="0"/>
-              <a:t>‹#›</a:t>
             </a:fld>
             <a:endParaRPr lang="en-US"/>
           </a:p>
         </p:txBody>
       </p:sp>
     </p:spTree>
-    <p:extLst>
-      <p:ext uri="{BB962C8B-B14F-4D97-AF65-F5344CB8AC3E}">
-        <p14:creationId xmlns:p14="http://schemas.microsoft.com/office/powerpoint/2010/main" val="990158736"/>
-      </p:ext>
-    </p:extLst>
   </p:cSld>
   <p:clrMapOvr>
     <a:masterClrMapping/>
@@ -1893,7 +1891,6 @@
           <a:p>
             <a:fld id="{5BCAD085-E8A6-8845-BD4E-CB4CCA059FC4}" type="datetimeFigureOut">
               <a:rPr lang="en-US" smtClean="0"/>
-              <a:t>1/27/13</a:t>
             </a:fld>
             <a:endParaRPr lang="en-US"/>
           </a:p>
@@ -1935,18 +1932,12 @@
           <a:p>
             <a:fld id="{C1FF6DA9-008F-8B48-92A6-B652298478BF}" type="slidenum">
               <a:rPr lang="en-US" smtClean="0"/>
-              <a:t>‹#›</a:t>
             </a:fld>
             <a:endParaRPr lang="en-US"/>
           </a:p>
         </p:txBody>
       </p:sp>
     </p:spTree>
-    <p:extLst>
-      <p:ext uri="{BB962C8B-B14F-4D97-AF65-F5344CB8AC3E}">
-        <p14:creationId xmlns:p14="http://schemas.microsoft.com/office/powerpoint/2010/main" val="727027711"/>
-      </p:ext>
-    </p:extLst>
   </p:cSld>
   <p:clrMapOvr>
     <a:masterClrMapping/>
@@ -1988,7 +1979,6 @@
           <a:p>
             <a:fld id="{5BCAD085-E8A6-8845-BD4E-CB4CCA059FC4}" type="datetimeFigureOut">
               <a:rPr lang="en-US" smtClean="0"/>
-              <a:t>1/27/13</a:t>
             </a:fld>
             <a:endParaRPr lang="en-US"/>
           </a:p>
@@ -2030,18 +2020,12 @@
           <a:p>
             <a:fld id="{C1FF6DA9-008F-8B48-92A6-B652298478BF}" type="slidenum">
               <a:rPr lang="en-US" smtClean="0"/>
-              <a:t>‹#›</a:t>
             </a:fld>
             <a:endParaRPr lang="en-US"/>
           </a:p>
         </p:txBody>
       </p:sp>
     </p:spTree>
-    <p:extLst>
-      <p:ext uri="{BB962C8B-B14F-4D97-AF65-F5344CB8AC3E}">
-        <p14:creationId xmlns:p14="http://schemas.microsoft.com/office/powerpoint/2010/main" val="1212999818"/>
-      </p:ext>
-    </p:extLst>
   </p:cSld>
   <p:clrMapOvr>
     <a:masterClrMapping/>
@@ -2151,6 +2135,7 @@
               <a:rPr lang="en-US" smtClean="0"/>
               <a:t>Click to edit Master text styles</a:t>
             </a:r>
+            <a:endParaRPr lang="en-US" smtClean="0"/>
           </a:p>
           <a:p>
             <a:pPr lvl="1"/>
@@ -2158,6 +2143,7 @@
               <a:rPr lang="en-US" smtClean="0"/>
               <a:t>Second level</a:t>
             </a:r>
+            <a:endParaRPr lang="en-US" smtClean="0"/>
           </a:p>
           <a:p>
             <a:pPr lvl="2"/>
@@ -2165,6 +2151,7 @@
               <a:rPr lang="en-US" smtClean="0"/>
               <a:t>Third level</a:t>
             </a:r>
+            <a:endParaRPr lang="en-US" smtClean="0"/>
           </a:p>
           <a:p>
             <a:pPr lvl="3"/>
@@ -2172,6 +2159,7 @@
               <a:rPr lang="en-US" smtClean="0"/>
               <a:t>Fourth level</a:t>
             </a:r>
+            <a:endParaRPr lang="en-US" smtClean="0"/>
           </a:p>
           <a:p>
             <a:pPr lvl="4"/>
@@ -2245,6 +2233,7 @@
               <a:rPr lang="en-US" smtClean="0"/>
               <a:t>Click to edit Master text styles</a:t>
             </a:r>
+            <a:endParaRPr lang="en-US" smtClean="0"/>
           </a:p>
         </p:txBody>
       </p:sp>
@@ -2265,7 +2254,6 @@
           <a:p>
             <a:fld id="{5BCAD085-E8A6-8845-BD4E-CB4CCA059FC4}" type="datetimeFigureOut">
               <a:rPr lang="en-US" smtClean="0"/>
-              <a:t>1/27/13</a:t>
             </a:fld>
             <a:endParaRPr lang="en-US"/>
           </a:p>
@@ -2307,18 +2295,12 @@
           <a:p>
             <a:fld id="{C1FF6DA9-008F-8B48-92A6-B652298478BF}" type="slidenum">
               <a:rPr lang="en-US" smtClean="0"/>
-              <a:t>‹#›</a:t>
             </a:fld>
             <a:endParaRPr lang="en-US"/>
           </a:p>
         </p:txBody>
       </p:sp>
     </p:spTree>
-    <p:extLst>
-      <p:ext uri="{BB962C8B-B14F-4D97-AF65-F5344CB8AC3E}">
-        <p14:creationId xmlns:p14="http://schemas.microsoft.com/office/powerpoint/2010/main" val="1840726560"/>
-      </p:ext>
-    </p:extLst>
   </p:cSld>
   <p:clrMapOvr>
     <a:masterClrMapping/>
@@ -2498,6 +2480,7 @@
               <a:rPr lang="en-US" smtClean="0"/>
               <a:t>Click to edit Master text styles</a:t>
             </a:r>
+            <a:endParaRPr lang="en-US" smtClean="0"/>
           </a:p>
         </p:txBody>
       </p:sp>
@@ -2518,7 +2501,6 @@
           <a:p>
             <a:fld id="{5BCAD085-E8A6-8845-BD4E-CB4CCA059FC4}" type="datetimeFigureOut">
               <a:rPr lang="en-US" smtClean="0"/>
-              <a:t>1/27/13</a:t>
             </a:fld>
             <a:endParaRPr lang="en-US"/>
           </a:p>
@@ -2560,18 +2542,12 @@
           <a:p>
             <a:fld id="{C1FF6DA9-008F-8B48-92A6-B652298478BF}" type="slidenum">
               <a:rPr lang="en-US" smtClean="0"/>
-              <a:t>‹#›</a:t>
             </a:fld>
             <a:endParaRPr lang="en-US"/>
           </a:p>
         </p:txBody>
       </p:sp>
     </p:spTree>
-    <p:extLst>
-      <p:ext uri="{BB962C8B-B14F-4D97-AF65-F5344CB8AC3E}">
-        <p14:creationId xmlns:p14="http://schemas.microsoft.com/office/powerpoint/2010/main" val="3889236939"/>
-      </p:ext>
-    </p:extLst>
   </p:cSld>
   <p:clrMapOvr>
     <a:masterClrMapping/>
@@ -2664,6 +2640,7 @@
               <a:rPr lang="en-US" smtClean="0"/>
               <a:t>Click to edit Master text styles</a:t>
             </a:r>
+            <a:endParaRPr lang="en-US" smtClean="0"/>
           </a:p>
           <a:p>
             <a:pPr lvl="1"/>
@@ -2671,6 +2648,7 @@
               <a:rPr lang="en-US" smtClean="0"/>
               <a:t>Second level</a:t>
             </a:r>
+            <a:endParaRPr lang="en-US" smtClean="0"/>
           </a:p>
           <a:p>
             <a:pPr lvl="2"/>
@@ -2678,6 +2656,7 @@
               <a:rPr lang="en-US" smtClean="0"/>
               <a:t>Third level</a:t>
             </a:r>
+            <a:endParaRPr lang="en-US" smtClean="0"/>
           </a:p>
           <a:p>
             <a:pPr lvl="3"/>
@@ -2685,6 +2664,7 @@
               <a:rPr lang="en-US" smtClean="0"/>
               <a:t>Fourth level</a:t>
             </a:r>
+            <a:endParaRPr lang="en-US" smtClean="0"/>
           </a:p>
           <a:p>
             <a:pPr lvl="4"/>
@@ -2731,7 +2711,6 @@
           <a:p>
             <a:fld id="{5BCAD085-E8A6-8845-BD4E-CB4CCA059FC4}" type="datetimeFigureOut">
               <a:rPr lang="en-US" smtClean="0"/>
-              <a:t>1/27/13</a:t>
             </a:fld>
             <a:endParaRPr lang="en-US"/>
           </a:p>
@@ -2809,18 +2788,12 @@
           <a:p>
             <a:fld id="{C1FF6DA9-008F-8B48-92A6-B652298478BF}" type="slidenum">
               <a:rPr lang="en-US" smtClean="0"/>
-              <a:t>‹#›</a:t>
             </a:fld>
             <a:endParaRPr lang="en-US"/>
           </a:p>
         </p:txBody>
       </p:sp>
     </p:spTree>
-    <p:extLst>
-      <p:ext uri="{BB962C8B-B14F-4D97-AF65-F5344CB8AC3E}">
-        <p14:creationId xmlns:p14="http://schemas.microsoft.com/office/powerpoint/2010/main" val="2209977519"/>
-      </p:ext>
-    </p:extLst>
   </p:cSld>
   <p:clrMap bg1="lt1" tx1="dk1" bg2="lt2" tx2="dk2" accent1="accent1" accent2="accent2" accent3="accent3" accent4="accent4" accent5="accent5" accent6="accent6" hlink="hlink" folHlink="folHlink"/>
   <p:sldLayoutIdLst>
@@ -2858,7 +2831,7 @@
         <a:spcBef>
           <a:spcPct val="20000"/>
         </a:spcBef>
-        <a:buFont typeface="Arial"/>
+        <a:buFont typeface="Arial" panose="020B0704020202020204"/>
         <a:buChar char="•"/>
         <a:defRPr sz="3200" kern="1200">
           <a:solidFill>
@@ -2873,7 +2846,7 @@
         <a:spcBef>
           <a:spcPct val="20000"/>
         </a:spcBef>
-        <a:buFont typeface="Arial"/>
+        <a:buFont typeface="Arial" panose="020B0704020202020204"/>
         <a:buChar char="–"/>
         <a:defRPr sz="2800" kern="1200">
           <a:solidFill>
@@ -2888,7 +2861,7 @@
         <a:spcBef>
           <a:spcPct val="20000"/>
         </a:spcBef>
-        <a:buFont typeface="Arial"/>
+        <a:buFont typeface="Arial" panose="020B0704020202020204"/>
         <a:buChar char="•"/>
         <a:defRPr sz="2400" kern="1200">
           <a:solidFill>
@@ -2903,7 +2876,7 @@
         <a:spcBef>
           <a:spcPct val="20000"/>
         </a:spcBef>
-        <a:buFont typeface="Arial"/>
+        <a:buFont typeface="Arial" panose="020B0704020202020204"/>
         <a:buChar char="–"/>
         <a:defRPr sz="2000" kern="1200">
           <a:solidFill>
@@ -2918,7 +2891,7 @@
         <a:spcBef>
           <a:spcPct val="20000"/>
         </a:spcBef>
-        <a:buFont typeface="Arial"/>
+        <a:buFont typeface="Arial" panose="020B0704020202020204"/>
         <a:buChar char="»"/>
         <a:defRPr sz="2000" kern="1200">
           <a:solidFill>
@@ -2933,7 +2906,7 @@
         <a:spcBef>
           <a:spcPct val="20000"/>
         </a:spcBef>
-        <a:buFont typeface="Arial"/>
+        <a:buFont typeface="Arial" panose="020B0704020202020204"/>
         <a:buChar char="•"/>
         <a:defRPr sz="2000" kern="1200">
           <a:solidFill>
@@ -2948,7 +2921,7 @@
         <a:spcBef>
           <a:spcPct val="20000"/>
         </a:spcBef>
-        <a:buFont typeface="Arial"/>
+        <a:buFont typeface="Arial" panose="020B0704020202020204"/>
         <a:buChar char="•"/>
         <a:defRPr sz="2000" kern="1200">
           <a:solidFill>
@@ -2963,7 +2936,7 @@
         <a:spcBef>
           <a:spcPct val="20000"/>
         </a:spcBef>
-        <a:buFont typeface="Arial"/>
+        <a:buFont typeface="Arial" panose="020B0704020202020204"/>
         <a:buChar char="•"/>
         <a:defRPr sz="2000" kern="1200">
           <a:solidFill>
@@ -2978,7 +2951,7 @@
         <a:spcBef>
           <a:spcPct val="20000"/>
         </a:spcBef>
-        <a:buFont typeface="Arial"/>
+        <a:buFont typeface="Arial" panose="020B0704020202020204"/>
         <a:buChar char="•"/>
         <a:defRPr sz="2000" kern="1200">
           <a:solidFill>
@@ -3090,7 +3063,7 @@
 </file>
 
 <file path=ppt/slides/slide1.xml><?xml version="1.0" encoding="utf-8"?>
-<p:sld xmlns:a="http://schemas.openxmlformats.org/drawingml/2006/main" xmlns:p="http://schemas.openxmlformats.org/presentationml/2006/main" xmlns:r="http://schemas.openxmlformats.org/officeDocument/2006/relationships">
+<p:sld xmlns:a="http://schemas.openxmlformats.org/drawingml/2006/main" xmlns:r="http://schemas.openxmlformats.org/officeDocument/2006/relationships" xmlns:p="http://schemas.openxmlformats.org/presentationml/2006/main">
   <p:cSld>
     <p:spTree>
       <p:nvGrpSpPr>
@@ -3182,7 +3155,7 @@
           </a:fontRef>
         </p:style>
         <p:txBody>
-          <a:bodyPr rtlCol="0" anchor="ctr" lIns="0" rIns="0" tIns="0" bIns="0"/>
+          <a:bodyPr lIns="0" tIns="0" rIns="0" bIns="0" rtlCol="0" anchor="ctr"/>
           <a:lstStyle/>
           <a:p>
             <a:pPr algn="ctr"/>
@@ -3195,19 +3168,159 @@
               </a:rPr>
               <a:t>01</a:t>
             </a:r>
-          </a:p>
-        </p:txBody>
-      </p:sp>
-      <p:sp>
-        <p:nvSpPr>
-          <p:cNvPr id="4" name="Rectangle 3"/>
+            <a:endParaRPr sz="1100" b="1">
+              <a:solidFill>
+                <a:srgbClr val="FFFFFF"/>
+              </a:solidFill>
+              <a:latin typeface="Geist Mono"/>
+            </a:endParaRPr>
+          </a:p>
+        </p:txBody>
+      </p:sp>
+      <p:sp>
+        <p:nvSpPr>
+          <p:cNvPr id="7" name="TextBox 6"/>
+          <p:cNvSpPr txBox="1"/>
+          <p:nvPr/>
+        </p:nvSpPr>
+        <p:spPr>
+          <a:xfrm>
+            <a:off x="566928" y="1113282"/>
+            <a:ext cx="8778240" cy="2926080"/>
+          </a:xfrm>
+          <a:prstGeom prst="rect">
+            <a:avLst/>
+          </a:prstGeom>
+          <a:noFill/>
+        </p:spPr>
+        <p:txBody>
+          <a:bodyPr wrap="square" lIns="0" tIns="0" rIns="0" bIns="0" anchor="t">
+            <a:spAutoFit/>
+          </a:bodyPr>
+          <a:lstStyle/>
+          <a:p>
+            <a:pPr algn="l">
+              <a:lnSpc>
+                <a:spcPct val="90000"/>
+              </a:lnSpc>
+            </a:pPr>
+            <a:r>
+              <a:rPr sz="6200" b="1">
+                <a:solidFill>
+                  <a:srgbClr val="0A0A0A"/>
+                </a:solidFill>
+                <a:latin typeface="Geist"/>
+              </a:rPr>
+              <a:t>Money that</a:t>
+            </a:r>
+            <a:endParaRPr sz="6200" b="1">
+              <a:solidFill>
+                <a:srgbClr val="0A0A0A"/>
+              </a:solidFill>
+              <a:latin typeface="Geist"/>
+            </a:endParaRPr>
+          </a:p>
+          <a:p>
+            <a:pPr algn="l">
+              <a:lnSpc>
+                <a:spcPct val="90000"/>
+              </a:lnSpc>
+            </a:pPr>
+            <a:r>
+              <a:rPr sz="6200" b="1">
+                <a:solidFill>
+                  <a:srgbClr val="0A0A0A"/>
+                </a:solidFill>
+                <a:latin typeface="Geist"/>
+              </a:rPr>
+              <a:t>moves like</a:t>
+            </a:r>
+            <a:endParaRPr sz="6200" b="1">
+              <a:solidFill>
+                <a:srgbClr val="0A0A0A"/>
+              </a:solidFill>
+              <a:latin typeface="Geist"/>
+            </a:endParaRPr>
+          </a:p>
+          <a:p>
+            <a:pPr algn="l">
+              <a:lnSpc>
+                <a:spcPct val="90000"/>
+              </a:lnSpc>
+            </a:pPr>
+            <a:r>
+              <a:rPr sz="6200" b="1">
+                <a:solidFill>
+                  <a:srgbClr val="0A0A0A"/>
+                </a:solidFill>
+                <a:latin typeface="Geist"/>
+              </a:rPr>
+              <a:t>an API call.</a:t>
+            </a:r>
+            <a:endParaRPr sz="6200" b="1">
+              <a:solidFill>
+                <a:srgbClr val="0A0A0A"/>
+              </a:solidFill>
+              <a:latin typeface="Geist"/>
+            </a:endParaRPr>
+          </a:p>
+        </p:txBody>
+      </p:sp>
+      <p:sp>
+        <p:nvSpPr>
+          <p:cNvPr id="8" name="TextBox 7"/>
+          <p:cNvSpPr txBox="1"/>
+          <p:nvPr/>
+        </p:nvSpPr>
+        <p:spPr>
+          <a:xfrm>
+            <a:off x="566928" y="4087368"/>
+            <a:ext cx="6309360" cy="914400"/>
+          </a:xfrm>
+          <a:prstGeom prst="rect">
+            <a:avLst/>
+          </a:prstGeom>
+          <a:noFill/>
+        </p:spPr>
+        <p:txBody>
+          <a:bodyPr wrap="square" lIns="0" tIns="0" rIns="0" bIns="0" anchor="t">
+            <a:spAutoFit/>
+          </a:bodyPr>
+          <a:lstStyle/>
+          <a:p>
+            <a:pPr algn="l">
+              <a:lnSpc>
+                <a:spcPct val="130000"/>
+              </a:lnSpc>
+            </a:pPr>
+            <a:r>
+              <a:rPr sz="1900" b="1">
+                <a:solidFill>
+                  <a:srgbClr val="0A0A0A"/>
+                </a:solidFill>
+                <a:latin typeface="Geist"/>
+              </a:rPr>
+              <a:t>Cross-chain stablecoin settlement for agents and humans. Gasless, multi-route, one call.</a:t>
+            </a:r>
+            <a:endParaRPr sz="1900" b="1">
+              <a:solidFill>
+                <a:srgbClr val="0A0A0A"/>
+              </a:solidFill>
+              <a:latin typeface="Geist"/>
+            </a:endParaRPr>
+          </a:p>
+        </p:txBody>
+      </p:sp>
+      <p:sp>
+        <p:nvSpPr>
+          <p:cNvPr id="9" name="Rectangle 8"/>
           <p:cNvSpPr/>
           <p:nvPr/>
         </p:nvSpPr>
         <p:spPr>
           <a:xfrm>
-            <a:off x="612648" y="704088"/>
-            <a:ext cx="457200" cy="457200"/>
+            <a:off x="566928" y="5367528"/>
+            <a:ext cx="11057839" cy="28575"/>
           </a:xfrm>
           <a:prstGeom prst="rect">
             <a:avLst/>
@@ -3244,222 +3357,14 @@
       </p:sp>
       <p:sp>
         <p:nvSpPr>
-          <p:cNvPr id="5" name="Rectangle 4"/>
+          <p:cNvPr id="10" name="Rectangle 9"/>
           <p:cNvSpPr/>
           <p:nvPr/>
         </p:nvSpPr>
         <p:spPr>
           <a:xfrm>
-            <a:off x="566928" y="658368"/>
-            <a:ext cx="457200" cy="457200"/>
-          </a:xfrm>
-          <a:prstGeom prst="rect">
-            <a:avLst/>
-          </a:prstGeom>
-          <a:solidFill>
-            <a:srgbClr val="F4623A"/>
-          </a:solidFill>
-          <a:ln w="28575">
-            <a:solidFill>
-              <a:srgbClr val="0A0A0A"/>
-            </a:solidFill>
-          </a:ln>
-          <a:effectLst/>
-        </p:spPr>
-        <p:style>
-          <a:lnRef idx="1">
-            <a:schemeClr val="accent1"/>
-          </a:lnRef>
-          <a:fillRef idx="3">
-            <a:schemeClr val="accent1"/>
-          </a:fillRef>
-          <a:effectRef idx="2">
-            <a:schemeClr val="accent1"/>
-          </a:effectRef>
-          <a:fontRef idx="minor">
-            <a:schemeClr val="lt1"/>
-          </a:fontRef>
-        </p:style>
-        <p:txBody>
-          <a:bodyPr rtlCol="0" anchor="ctr" wrap="square" lIns="0" rIns="0" tIns="73152" bIns="73152"/>
-          <a:lstStyle/>
-          <a:p>
-            <a:pPr algn="ctr">
-              <a:lnSpc>
-                <a:spcPct val="130000"/>
-              </a:lnSpc>
-            </a:pPr>
-            <a:r>
-              <a:rPr sz="2000" b="1">
-                <a:solidFill>
-                  <a:srgbClr val="0A0A0A"/>
-                </a:solidFill>
-                <a:latin typeface="Geist"/>
-              </a:rPr>
-              <a:t>B</a:t>
-            </a:r>
-          </a:p>
-        </p:txBody>
-      </p:sp>
-      <p:sp>
-        <p:nvSpPr>
-          <p:cNvPr id="6" name="TextBox 5"/>
-          <p:cNvSpPr txBox="1"/>
-          <p:nvPr/>
-        </p:nvSpPr>
-        <p:spPr>
-          <a:xfrm>
-            <a:off x="1225296" y="758952"/>
-            <a:ext cx="3657600" cy="274320"/>
-          </a:xfrm>
-          <a:prstGeom prst="rect">
-            <a:avLst/>
-          </a:prstGeom>
-          <a:noFill/>
-        </p:spPr>
-        <p:txBody>
-          <a:bodyPr wrap="square" lIns="0" rIns="0" tIns="0" bIns="0" anchor="t">
-            <a:spAutoFit/>
-          </a:bodyPr>
-          <a:lstStyle/>
-          <a:p>
-            <a:pPr algn="l">
-              <a:lnSpc>
-                <a:spcPct val="125000"/>
-              </a:lnSpc>
-            </a:pPr>
-            <a:r>
-              <a:rPr sz="1200" b="1" spc="180">
-                <a:solidFill>
-                  <a:srgbClr val="0A0A0A"/>
-                </a:solidFill>
-                <a:latin typeface="Geist Mono"/>
-              </a:rPr>
-              <a:t>BREEJA</a:t>
-            </a:r>
-          </a:p>
-        </p:txBody>
-      </p:sp>
-      <p:sp>
-        <p:nvSpPr>
-          <p:cNvPr id="7" name="TextBox 6"/>
-          <p:cNvSpPr txBox="1"/>
-          <p:nvPr/>
-        </p:nvSpPr>
-        <p:spPr>
-          <a:xfrm>
-            <a:off x="566928" y="1536192"/>
-            <a:ext cx="8778240" cy="2926080"/>
-          </a:xfrm>
-          <a:prstGeom prst="rect">
-            <a:avLst/>
-          </a:prstGeom>
-          <a:noFill/>
-        </p:spPr>
-        <p:txBody>
-          <a:bodyPr wrap="square" lIns="0" rIns="0" tIns="0" bIns="0" anchor="t">
-            <a:spAutoFit/>
-          </a:bodyPr>
-          <a:lstStyle/>
-          <a:p>
-            <a:pPr algn="l">
-              <a:lnSpc>
-                <a:spcPct val="90000"/>
-              </a:lnSpc>
-            </a:pPr>
-            <a:r>
-              <a:rPr sz="6200" b="1">
-                <a:solidFill>
-                  <a:srgbClr val="0A0A0A"/>
-                </a:solidFill>
-                <a:latin typeface="Geist"/>
-              </a:rPr>
-              <a:t>Money that</a:t>
-            </a:r>
-          </a:p>
-          <a:p>
-            <a:pPr algn="l">
-              <a:lnSpc>
-                <a:spcPct val="90000"/>
-              </a:lnSpc>
-            </a:pPr>
-            <a:r>
-              <a:rPr sz="6200" b="1">
-                <a:solidFill>
-                  <a:srgbClr val="0A0A0A"/>
-                </a:solidFill>
-                <a:latin typeface="Geist"/>
-              </a:rPr>
-              <a:t>moves like</a:t>
-            </a:r>
-          </a:p>
-          <a:p>
-            <a:pPr algn="l">
-              <a:lnSpc>
-                <a:spcPct val="90000"/>
-              </a:lnSpc>
-            </a:pPr>
-            <a:r>
-              <a:rPr sz="6200" b="1">
-                <a:solidFill>
-                  <a:srgbClr val="0A0A0A"/>
-                </a:solidFill>
-                <a:latin typeface="Geist"/>
-              </a:rPr>
-              <a:t>an API call.</a:t>
-            </a:r>
-          </a:p>
-        </p:txBody>
-      </p:sp>
-      <p:sp>
-        <p:nvSpPr>
-          <p:cNvPr id="8" name="TextBox 7"/>
-          <p:cNvSpPr txBox="1"/>
-          <p:nvPr/>
-        </p:nvSpPr>
-        <p:spPr>
-          <a:xfrm>
-            <a:off x="566928" y="4224528"/>
-            <a:ext cx="6309360" cy="914400"/>
-          </a:xfrm>
-          <a:prstGeom prst="rect">
-            <a:avLst/>
-          </a:prstGeom>
-          <a:noFill/>
-        </p:spPr>
-        <p:txBody>
-          <a:bodyPr wrap="square" lIns="0" rIns="0" tIns="0" bIns="0" anchor="t">
-            <a:spAutoFit/>
-          </a:bodyPr>
-          <a:lstStyle/>
-          <a:p>
-            <a:pPr algn="l">
-              <a:lnSpc>
-                <a:spcPct val="130000"/>
-              </a:lnSpc>
-            </a:pPr>
-            <a:r>
-              <a:rPr sz="1900" b="1">
-                <a:solidFill>
-                  <a:srgbClr val="0A0A0A"/>
-                </a:solidFill>
-                <a:latin typeface="Geist"/>
-              </a:rPr>
-              <a:t>Cross-chain stablecoin settlement for agents and humans. Gasless, multi-route, one call.</a:t>
-            </a:r>
-          </a:p>
-        </p:txBody>
-      </p:sp>
-      <p:sp>
-        <p:nvSpPr>
-          <p:cNvPr id="9" name="Rectangle 8"/>
-          <p:cNvSpPr/>
-          <p:nvPr/>
-        </p:nvSpPr>
-        <p:spPr>
-          <a:xfrm>
-            <a:off x="566928" y="5230368"/>
-            <a:ext cx="11057839" cy="28575"/>
+            <a:off x="612648" y="5687568"/>
+            <a:ext cx="2327148" cy="384048"/>
           </a:xfrm>
           <a:prstGeom prst="rect">
             <a:avLst/>
@@ -3496,57 +3401,13 @@
       </p:sp>
       <p:sp>
         <p:nvSpPr>
-          <p:cNvPr id="10" name="Rectangle 9"/>
-          <p:cNvSpPr/>
-          <p:nvPr/>
-        </p:nvSpPr>
-        <p:spPr>
-          <a:xfrm>
-            <a:off x="612648" y="5550408"/>
-            <a:ext cx="2327148" cy="384048"/>
-          </a:xfrm>
-          <a:prstGeom prst="rect">
-            <a:avLst/>
-          </a:prstGeom>
-          <a:solidFill>
-            <a:srgbClr val="0A0A0A"/>
-          </a:solidFill>
-          <a:ln>
-            <a:noFill/>
-          </a:ln>
-          <a:effectLst/>
-        </p:spPr>
-        <p:style>
-          <a:lnRef idx="1">
-            <a:schemeClr val="accent1"/>
-          </a:lnRef>
-          <a:fillRef idx="3">
-            <a:schemeClr val="accent1"/>
-          </a:fillRef>
-          <a:effectRef idx="2">
-            <a:schemeClr val="accent1"/>
-          </a:effectRef>
-          <a:fontRef idx="minor">
-            <a:schemeClr val="lt1"/>
-          </a:fontRef>
-        </p:style>
-        <p:txBody>
-          <a:bodyPr rtlCol="0" anchor="ctr"/>
-          <a:lstStyle/>
-          <a:p>
-            <a:pPr algn="ctr"/>
-          </a:p>
-        </p:txBody>
-      </p:sp>
-      <p:sp>
-        <p:nvSpPr>
           <p:cNvPr id="11" name="Rectangle 10"/>
           <p:cNvSpPr/>
           <p:nvPr/>
         </p:nvSpPr>
         <p:spPr>
           <a:xfrm>
-            <a:off x="566928" y="5504688"/>
+            <a:off x="566928" y="5641848"/>
             <a:ext cx="2327148" cy="384048"/>
           </a:xfrm>
           <a:prstGeom prst="rect">
@@ -3577,7 +3438,7 @@
           </a:fontRef>
         </p:style>
         <p:txBody>
-          <a:bodyPr rtlCol="0" anchor="ctr" wrap="square" tIns="73152" bIns="73152"/>
+          <a:bodyPr wrap="square" tIns="73152" bIns="73152" rtlCol="0" anchor="ctr"/>
           <a:lstStyle/>
           <a:p>
             <a:pPr algn="ctr">
@@ -3594,6 +3455,12 @@
               </a:rPr>
               <a:t>ETHGlobal Online 2026</a:t>
             </a:r>
+            <a:endParaRPr sz="1100" b="1">
+              <a:solidFill>
+                <a:srgbClr val="0A0A0A"/>
+              </a:solidFill>
+              <a:latin typeface="Geist Mono"/>
+            </a:endParaRPr>
           </a:p>
         </p:txBody>
       </p:sp>
@@ -3605,7 +3472,7 @@
         </p:nvSpPr>
         <p:spPr>
           <a:xfrm>
-            <a:off x="3067812" y="5550408"/>
+            <a:off x="3067812" y="5687568"/>
             <a:ext cx="1078992" cy="384048"/>
           </a:xfrm>
           <a:prstGeom prst="rect">
@@ -3649,7 +3516,7 @@
         </p:nvSpPr>
         <p:spPr>
           <a:xfrm>
-            <a:off x="3022092" y="5504688"/>
+            <a:off x="3022092" y="5641848"/>
             <a:ext cx="1078992" cy="384048"/>
           </a:xfrm>
           <a:prstGeom prst="rect">
@@ -3680,7 +3547,7 @@
           </a:fontRef>
         </p:style>
         <p:txBody>
-          <a:bodyPr rtlCol="0" anchor="ctr" wrap="square" tIns="73152" bIns="73152"/>
+          <a:bodyPr wrap="square" tIns="73152" bIns="73152" rtlCol="0" anchor="ctr"/>
           <a:lstStyle/>
           <a:p>
             <a:pPr algn="ctr">
@@ -3697,6 +3564,12 @@
               </a:rPr>
               <a:t>6 chains</a:t>
             </a:r>
+            <a:endParaRPr sz="1100" b="1">
+              <a:solidFill>
+                <a:srgbClr val="0A0A0A"/>
+              </a:solidFill>
+              <a:latin typeface="Geist Mono"/>
+            </a:endParaRPr>
           </a:p>
         </p:txBody>
       </p:sp>
@@ -3708,7 +3581,7 @@
         </p:nvSpPr>
         <p:spPr>
           <a:xfrm>
-            <a:off x="4274820" y="5550408"/>
+            <a:off x="4274820" y="5687568"/>
             <a:ext cx="1847088" cy="384048"/>
           </a:xfrm>
           <a:prstGeom prst="rect">
@@ -3752,7 +3625,7 @@
         </p:nvSpPr>
         <p:spPr>
           <a:xfrm>
-            <a:off x="4229100" y="5504688"/>
+            <a:off x="4229100" y="5641848"/>
             <a:ext cx="1847088" cy="384048"/>
           </a:xfrm>
           <a:prstGeom prst="rect">
@@ -3783,7 +3656,7 @@
           </a:fontRef>
         </p:style>
         <p:txBody>
-          <a:bodyPr rtlCol="0" anchor="ctr" wrap="square" tIns="73152" bIns="73152"/>
+          <a:bodyPr wrap="square" tIns="73152" bIns="73152" rtlCol="0" anchor="ctr"/>
           <a:lstStyle/>
           <a:p>
             <a:pPr algn="ctr">
@@ -3800,9 +3673,39 @@
               </a:rPr>
               <a:t>SDK · MCP · x402</a:t>
             </a:r>
-          </a:p>
-        </p:txBody>
-      </p:sp>
+            <a:endParaRPr sz="1100" b="1">
+              <a:solidFill>
+                <a:srgbClr val="0A0A0A"/>
+              </a:solidFill>
+              <a:latin typeface="Geist Mono"/>
+            </a:endParaRPr>
+          </a:p>
+        </p:txBody>
+      </p:sp>
+      <p:pic>
+        <p:nvPicPr>
+          <p:cNvPr id="18" name="Picture 17" descr="breeja-logo"/>
+          <p:cNvPicPr>
+            <a:picLocks noChangeAspect="1"/>
+          </p:cNvPicPr>
+          <p:nvPr/>
+        </p:nvPicPr>
+        <p:blipFill>
+          <a:blip r:embed="rId1"/>
+          <a:stretch>
+            <a:fillRect/>
+          </a:stretch>
+        </p:blipFill>
+        <p:spPr>
+          <a:xfrm>
+            <a:off x="6956425" y="863600"/>
+            <a:ext cx="4121150" cy="4121150"/>
+          </a:xfrm>
+          <a:prstGeom prst="rect">
+            <a:avLst/>
+          </a:prstGeom>
+        </p:spPr>
+      </p:pic>
     </p:spTree>
   </p:cSld>
   <p:clrMapOvr>
@@ -3812,7 +3715,7 @@
 </file>
 
 <file path=ppt/slides/slide10.xml><?xml version="1.0" encoding="utf-8"?>
-<p:sld xmlns:a="http://schemas.openxmlformats.org/drawingml/2006/main" xmlns:p="http://schemas.openxmlformats.org/presentationml/2006/main" xmlns:r="http://schemas.openxmlformats.org/officeDocument/2006/relationships">
+<p:sld xmlns:a="http://schemas.openxmlformats.org/drawingml/2006/main" xmlns:r="http://schemas.openxmlformats.org/officeDocument/2006/relationships" xmlns:p="http://schemas.openxmlformats.org/presentationml/2006/main">
   <p:cSld>
     <p:spTree>
       <p:nvGrpSpPr>
@@ -3904,7 +3807,7 @@
           </a:fontRef>
         </p:style>
         <p:txBody>
-          <a:bodyPr rtlCol="0" anchor="ctr" lIns="0" rIns="0" tIns="0" bIns="0"/>
+          <a:bodyPr lIns="0" tIns="0" rIns="0" bIns="0" rtlCol="0" anchor="ctr"/>
           <a:lstStyle/>
           <a:p>
             <a:pPr algn="ctr"/>
@@ -3917,6 +3820,12 @@
               </a:rPr>
               <a:t>10</a:t>
             </a:r>
+            <a:endParaRPr sz="1100" b="1">
+              <a:solidFill>
+                <a:srgbClr val="FFFFFF"/>
+              </a:solidFill>
+              <a:latin typeface="Geist Mono"/>
+            </a:endParaRPr>
           </a:p>
         </p:txBody>
       </p:sp>
@@ -3937,7 +3846,7 @@
           <a:noFill/>
         </p:spPr>
         <p:txBody>
-          <a:bodyPr wrap="square" lIns="0" rIns="0" tIns="0" bIns="0" anchor="t">
+          <a:bodyPr wrap="square" lIns="0" tIns="0" rIns="0" bIns="0" anchor="t">
             <a:spAutoFit/>
           </a:bodyPr>
           <a:lstStyle/>
@@ -3956,6 +3865,12 @@
               </a:rPr>
               <a:t>INTEGRATIONS</a:t>
             </a:r>
+            <a:endParaRPr sz="1100" b="1" spc="160">
+              <a:solidFill>
+                <a:srgbClr val="6B7280"/>
+              </a:solidFill>
+              <a:latin typeface="Geist Mono"/>
+            </a:endParaRPr>
           </a:p>
         </p:txBody>
       </p:sp>
@@ -3976,7 +3891,7 @@
           <a:noFill/>
         </p:spPr>
         <p:txBody>
-          <a:bodyPr wrap="square" lIns="0" rIns="0" tIns="0" bIns="0" anchor="t">
+          <a:bodyPr wrap="square" lIns="0" tIns="0" rIns="0" bIns="0" anchor="t">
             <a:spAutoFit/>
           </a:bodyPr>
           <a:lstStyle/>
@@ -3995,6 +3910,12 @@
               </a:rPr>
               <a:t>Each one load-bearing.</a:t>
             </a:r>
+            <a:endParaRPr sz="3800" b="1">
+              <a:solidFill>
+                <a:srgbClr val="0A0A0A"/>
+              </a:solidFill>
+              <a:latin typeface="Geist"/>
+            </a:endParaRPr>
           </a:p>
         </p:txBody>
       </p:sp>
@@ -4061,7 +3982,7 @@
           <a:noFill/>
         </p:spPr>
         <p:txBody>
-          <a:bodyPr wrap="square" lIns="0" rIns="0" tIns="0" bIns="0" anchor="t">
+          <a:bodyPr wrap="square" lIns="0" tIns="0" rIns="0" bIns="0" anchor="t">
             <a:spAutoFit/>
           </a:bodyPr>
           <a:lstStyle/>
@@ -4080,6 +4001,12 @@
               </a:rPr>
               <a:t>Circle / Arc</a:t>
             </a:r>
+            <a:endParaRPr sz="1500" b="1">
+              <a:solidFill>
+                <a:srgbClr val="0A0A0A"/>
+              </a:solidFill>
+              <a:latin typeface="Geist"/>
+            </a:endParaRPr>
           </a:p>
         </p:txBody>
       </p:sp>
@@ -4100,7 +4027,7 @@
           <a:noFill/>
         </p:spPr>
         <p:txBody>
-          <a:bodyPr wrap="square" lIns="0" rIns="0" tIns="0" bIns="0" anchor="t">
+          <a:bodyPr wrap="square" lIns="0" tIns="0" rIns="0" bIns="0" anchor="t">
             <a:spAutoFit/>
           </a:bodyPr>
           <a:lstStyle/>
@@ -4119,6 +4046,12 @@
               </a:rPr>
               <a:t>CCTP settlement route + native USDC chain</a:t>
             </a:r>
+            <a:endParaRPr sz="1150" b="0">
+              <a:solidFill>
+                <a:srgbClr val="6B7280"/>
+              </a:solidFill>
+              <a:latin typeface="Geist"/>
+            </a:endParaRPr>
           </a:p>
         </p:txBody>
       </p:sp>
@@ -4183,7 +4116,7 @@
           <a:noFill/>
         </p:spPr>
         <p:txBody>
-          <a:bodyPr wrap="square" lIns="0" rIns="0" tIns="0" bIns="0" anchor="t">
+          <a:bodyPr wrap="square" lIns="0" tIns="0" rIns="0" bIns="0" anchor="t">
             <a:spAutoFit/>
           </a:bodyPr>
           <a:lstStyle/>
@@ -4202,6 +4135,12 @@
               </a:rPr>
               <a:t>The Graph</a:t>
             </a:r>
+            <a:endParaRPr sz="1500" b="1">
+              <a:solidFill>
+                <a:srgbClr val="0A0A0A"/>
+              </a:solidFill>
+              <a:latin typeface="Geist"/>
+            </a:endParaRPr>
           </a:p>
         </p:txBody>
       </p:sp>
@@ -4222,7 +4161,7 @@
           <a:noFill/>
         </p:spPr>
         <p:txBody>
-          <a:bodyPr wrap="square" lIns="0" rIns="0" tIns="0" bIns="0" anchor="t">
+          <a:bodyPr wrap="square" lIns="0" tIns="0" rIns="0" bIns="0" anchor="t">
             <a:spAutoFit/>
           </a:bodyPr>
           <a:lstStyle/>
@@ -4241,6 +4180,12 @@
               </a:rPr>
               <a:t>Indexed payment history across every chain</a:t>
             </a:r>
+            <a:endParaRPr sz="1150" b="0">
+              <a:solidFill>
+                <a:srgbClr val="6B7280"/>
+              </a:solidFill>
+              <a:latin typeface="Geist"/>
+            </a:endParaRPr>
           </a:p>
         </p:txBody>
       </p:sp>
@@ -4305,7 +4250,7 @@
           <a:noFill/>
         </p:spPr>
         <p:txBody>
-          <a:bodyPr wrap="square" lIns="0" rIns="0" tIns="0" bIns="0" anchor="t">
+          <a:bodyPr wrap="square" lIns="0" tIns="0" rIns="0" bIns="0" anchor="t">
             <a:spAutoFit/>
           </a:bodyPr>
           <a:lstStyle/>
@@ -4324,6 +4269,12 @@
               </a:rPr>
               <a:t>Privy</a:t>
             </a:r>
+            <a:endParaRPr sz="1500" b="1">
+              <a:solidFill>
+                <a:srgbClr val="0A0A0A"/>
+              </a:solidFill>
+              <a:latin typeface="Geist"/>
+            </a:endParaRPr>
           </a:p>
         </p:txBody>
       </p:sp>
@@ -4344,7 +4295,7 @@
           <a:noFill/>
         </p:spPr>
         <p:txBody>
-          <a:bodyPr wrap="square" lIns="0" rIns="0" tIns="0" bIns="0" anchor="t">
+          <a:bodyPr wrap="square" lIns="0" tIns="0" rIns="0" bIns="0" anchor="t">
             <a:spAutoFit/>
           </a:bodyPr>
           <a:lstStyle/>
@@ -4363,6 +4314,12 @@
               </a:rPr>
               <a:t>Embedded wallets and agent server wallets</a:t>
             </a:r>
+            <a:endParaRPr sz="1150" b="0">
+              <a:solidFill>
+                <a:srgbClr val="6B7280"/>
+              </a:solidFill>
+              <a:latin typeface="Geist"/>
+            </a:endParaRPr>
           </a:p>
         </p:txBody>
       </p:sp>
@@ -4427,7 +4384,7 @@
           <a:noFill/>
         </p:spPr>
         <p:txBody>
-          <a:bodyPr wrap="square" lIns="0" rIns="0" tIns="0" bIns="0" anchor="t">
+          <a:bodyPr wrap="square" lIns="0" tIns="0" rIns="0" bIns="0" anchor="t">
             <a:spAutoFit/>
           </a:bodyPr>
           <a:lstStyle/>
@@ -4446,6 +4403,12 @@
               </a:rPr>
               <a:t>ENS</a:t>
             </a:r>
+            <a:endParaRPr sz="1500" b="1">
+              <a:solidFill>
+                <a:srgbClr val="0A0A0A"/>
+              </a:solidFill>
+              <a:latin typeface="Geist"/>
+            </a:endParaRPr>
           </a:p>
         </p:txBody>
       </p:sp>
@@ -4466,7 +4429,7 @@
           <a:noFill/>
         </p:spPr>
         <p:txBody>
-          <a:bodyPr wrap="square" lIns="0" rIns="0" tIns="0" bIns="0" anchor="t">
+          <a:bodyPr wrap="square" lIns="0" tIns="0" rIns="0" bIns="0" anchor="t">
             <a:spAutoFit/>
           </a:bodyPr>
           <a:lstStyle/>
@@ -4485,6 +4448,12 @@
               </a:rPr>
               <a:t>Agent identity — pay a name, not a hex string</a:t>
             </a:r>
+            <a:endParaRPr sz="1150" b="0">
+              <a:solidFill>
+                <a:srgbClr val="6B7280"/>
+              </a:solidFill>
+              <a:latin typeface="Geist"/>
+            </a:endParaRPr>
           </a:p>
         </p:txBody>
       </p:sp>
@@ -4549,7 +4518,7 @@
           <a:noFill/>
         </p:spPr>
         <p:txBody>
-          <a:bodyPr wrap="square" lIns="0" rIns="0" tIns="0" bIns="0" anchor="t">
+          <a:bodyPr wrap="square" lIns="0" tIns="0" rIns="0" bIns="0" anchor="t">
             <a:spAutoFit/>
           </a:bodyPr>
           <a:lstStyle/>
@@ -4568,6 +4537,12 @@
               </a:rPr>
               <a:t>Ledger</a:t>
             </a:r>
+            <a:endParaRPr sz="1500" b="1">
+              <a:solidFill>
+                <a:srgbClr val="0A0A0A"/>
+              </a:solidFill>
+              <a:latin typeface="Geist"/>
+            </a:endParaRPr>
           </a:p>
         </p:txBody>
       </p:sp>
@@ -4588,7 +4563,7 @@
           <a:noFill/>
         </p:spPr>
         <p:txBody>
-          <a:bodyPr wrap="square" lIns="0" rIns="0" tIns="0" bIns="0" anchor="t">
+          <a:bodyPr wrap="square" lIns="0" tIns="0" rIns="0" bIns="0" anchor="t">
             <a:spAutoFit/>
           </a:bodyPr>
           <a:lstStyle/>
@@ -4607,6 +4582,12 @@
               </a:rPr>
               <a:t>Hardware-backed release authority</a:t>
             </a:r>
+            <a:endParaRPr sz="1150" b="0">
+              <a:solidFill>
+                <a:srgbClr val="6B7280"/>
+              </a:solidFill>
+              <a:latin typeface="Geist"/>
+            </a:endParaRPr>
           </a:p>
         </p:txBody>
       </p:sp>
@@ -4671,7 +4652,7 @@
           <a:noFill/>
         </p:spPr>
         <p:txBody>
-          <a:bodyPr wrap="square" lIns="0" rIns="0" tIns="0" bIns="0" anchor="t">
+          <a:bodyPr wrap="square" lIns="0" tIns="0" rIns="0" bIns="0" anchor="t">
             <a:spAutoFit/>
           </a:bodyPr>
           <a:lstStyle/>
@@ -4690,6 +4671,12 @@
               </a:rPr>
               <a:t>Hedera</a:t>
             </a:r>
+            <a:endParaRPr sz="1500" b="1">
+              <a:solidFill>
+                <a:srgbClr val="0A0A0A"/>
+              </a:solidFill>
+              <a:latin typeface="Geist"/>
+            </a:endParaRPr>
           </a:p>
         </p:txBody>
       </p:sp>
@@ -4710,7 +4697,7 @@
           <a:noFill/>
         </p:spPr>
         <p:txBody>
-          <a:bodyPr wrap="square" lIns="0" rIns="0" tIns="0" bIns="0" anchor="t">
+          <a:bodyPr wrap="square" lIns="0" tIns="0" rIns="0" bIns="0" anchor="t">
             <a:spAutoFit/>
           </a:bodyPr>
           <a:lstStyle/>
@@ -4729,6 +4716,12 @@
               </a:rPr>
               <a:t>Source and destination chain</a:t>
             </a:r>
+            <a:endParaRPr sz="1150" b="0">
+              <a:solidFill>
+                <a:srgbClr val="6B7280"/>
+              </a:solidFill>
+              <a:latin typeface="Geist"/>
+            </a:endParaRPr>
           </a:p>
         </p:txBody>
       </p:sp>
@@ -4793,7 +4786,7 @@
           <a:noFill/>
         </p:spPr>
         <p:txBody>
-          <a:bodyPr wrap="square" lIns="0" rIns="0" tIns="0" bIns="0" anchor="t">
+          <a:bodyPr wrap="square" lIns="0" tIns="0" rIns="0" bIns="0" anchor="t">
             <a:spAutoFit/>
           </a:bodyPr>
           <a:lstStyle/>
@@ -4812,6 +4805,12 @@
               </a:rPr>
               <a:t>Bazantic</a:t>
             </a:r>
+            <a:endParaRPr sz="1500" b="1">
+              <a:solidFill>
+                <a:srgbClr val="0A0A0A"/>
+              </a:solidFill>
+              <a:latin typeface="Geist"/>
+            </a:endParaRPr>
           </a:p>
         </p:txBody>
       </p:sp>
@@ -4832,7 +4831,7 @@
           <a:noFill/>
         </p:spPr>
         <p:txBody>
-          <a:bodyPr wrap="square" lIns="0" rIns="0" tIns="0" bIns="0" anchor="t">
+          <a:bodyPr wrap="square" lIns="0" tIns="0" rIns="0" bIns="0" anchor="t">
             <a:spAutoFit/>
           </a:bodyPr>
           <a:lstStyle/>
@@ -4851,6 +4850,12 @@
               </a:rPr>
               <a:t>Agent-ready SDK and MCP tooling</a:t>
             </a:r>
+            <a:endParaRPr sz="1150" b="0">
+              <a:solidFill>
+                <a:srgbClr val="6B7280"/>
+              </a:solidFill>
+              <a:latin typeface="Geist"/>
+            </a:endParaRPr>
           </a:p>
         </p:txBody>
       </p:sp>
@@ -4915,7 +4920,7 @@
           <a:noFill/>
         </p:spPr>
         <p:txBody>
-          <a:bodyPr wrap="square" lIns="0" rIns="0" tIns="0" bIns="0" anchor="t">
+          <a:bodyPr wrap="square" lIns="0" tIns="0" rIns="0" bIns="0" anchor="t">
             <a:spAutoFit/>
           </a:bodyPr>
           <a:lstStyle/>
@@ -4934,6 +4939,12 @@
               </a:rPr>
               <a:t>World</a:t>
             </a:r>
+            <a:endParaRPr sz="1500" b="1">
+              <a:solidFill>
+                <a:srgbClr val="0A0A0A"/>
+              </a:solidFill>
+              <a:latin typeface="Geist"/>
+            </a:endParaRPr>
           </a:p>
         </p:txBody>
       </p:sp>
@@ -4954,7 +4965,7 @@
           <a:noFill/>
         </p:spPr>
         <p:txBody>
-          <a:bodyPr wrap="square" lIns="0" rIns="0" tIns="0" bIns="0" anchor="t">
+          <a:bodyPr wrap="square" lIns="0" tIns="0" rIns="0" bIns="0" anchor="t">
             <a:spAutoFit/>
           </a:bodyPr>
           <a:lstStyle/>
@@ -4973,6 +4984,12 @@
               </a:rPr>
               <a:t>Verified human authorizes an agent's spend cap</a:t>
             </a:r>
+            <a:endParaRPr sz="1150" b="0">
+              <a:solidFill>
+                <a:srgbClr val="6B7280"/>
+              </a:solidFill>
+              <a:latin typeface="Geist"/>
+            </a:endParaRPr>
           </a:p>
         </p:txBody>
       </p:sp>
@@ -4993,7 +5010,7 @@
           <a:noFill/>
         </p:spPr>
         <p:txBody>
-          <a:bodyPr wrap="square" lIns="0" rIns="0" tIns="0" bIns="0" anchor="t">
+          <a:bodyPr wrap="square" lIns="0" tIns="0" rIns="0" bIns="0" anchor="t">
             <a:spAutoFit/>
           </a:bodyPr>
           <a:lstStyle/>
@@ -5012,6 +5029,12 @@
               </a:rPr>
               <a:t>Deliberately skipped: AMM and DeFi-position tracks. A swap bolted onto a payment rail is the integration judges see through.</a:t>
             </a:r>
+            <a:endParaRPr sz="1300" b="0">
+              <a:solidFill>
+                <a:srgbClr val="6B7280"/>
+              </a:solidFill>
+              <a:latin typeface="Geist"/>
+            </a:endParaRPr>
           </a:p>
         </p:txBody>
       </p:sp>
@@ -5024,7 +5047,7 @@
 </file>
 
 <file path=ppt/slides/slide11.xml><?xml version="1.0" encoding="utf-8"?>
-<p:sld xmlns:a="http://schemas.openxmlformats.org/drawingml/2006/main" xmlns:p="http://schemas.openxmlformats.org/presentationml/2006/main" xmlns:r="http://schemas.openxmlformats.org/officeDocument/2006/relationships">
+<p:sld xmlns:a="http://schemas.openxmlformats.org/drawingml/2006/main" xmlns:r="http://schemas.openxmlformats.org/officeDocument/2006/relationships" xmlns:p="http://schemas.openxmlformats.org/presentationml/2006/main">
   <p:cSld>
     <p:spTree>
       <p:nvGrpSpPr>
@@ -5116,7 +5139,7 @@
           </a:fontRef>
         </p:style>
         <p:txBody>
-          <a:bodyPr rtlCol="0" anchor="ctr" lIns="0" rIns="0" tIns="0" bIns="0"/>
+          <a:bodyPr lIns="0" tIns="0" rIns="0" bIns="0" rtlCol="0" anchor="ctr"/>
           <a:lstStyle/>
           <a:p>
             <a:pPr algn="ctr"/>
@@ -5129,6 +5152,12 @@
               </a:rPr>
               <a:t>11</a:t>
             </a:r>
+            <a:endParaRPr sz="1100" b="1">
+              <a:solidFill>
+                <a:srgbClr val="FFFFFF"/>
+              </a:solidFill>
+              <a:latin typeface="Geist Mono"/>
+            </a:endParaRPr>
           </a:p>
         </p:txBody>
       </p:sp>
@@ -5149,7 +5178,7 @@
           <a:noFill/>
         </p:spPr>
         <p:txBody>
-          <a:bodyPr wrap="square" lIns="0" rIns="0" tIns="0" bIns="0" anchor="t">
+          <a:bodyPr wrap="square" lIns="0" tIns="0" rIns="0" bIns="0" anchor="t">
             <a:spAutoFit/>
           </a:bodyPr>
           <a:lstStyle/>
@@ -5168,6 +5197,12 @@
               </a:rPr>
               <a:t>STATUS</a:t>
             </a:r>
+            <a:endParaRPr sz="1100" b="1" spc="160">
+              <a:solidFill>
+                <a:srgbClr val="6B7280"/>
+              </a:solidFill>
+              <a:latin typeface="Geist Mono"/>
+            </a:endParaRPr>
           </a:p>
         </p:txBody>
       </p:sp>
@@ -5188,7 +5223,7 @@
           <a:noFill/>
         </p:spPr>
         <p:txBody>
-          <a:bodyPr wrap="square" lIns="0" rIns="0" tIns="0" bIns="0" anchor="t">
+          <a:bodyPr wrap="square" lIns="0" tIns="0" rIns="0" bIns="0" anchor="t">
             <a:spAutoFit/>
           </a:bodyPr>
           <a:lstStyle/>
@@ -5207,6 +5242,12 @@
               </a:rPr>
               <a:t>Shipped, in flight, next.</a:t>
             </a:r>
+            <a:endParaRPr sz="3800" b="1">
+              <a:solidFill>
+                <a:srgbClr val="0A0A0A"/>
+              </a:solidFill>
+              <a:latin typeface="Geist"/>
+            </a:endParaRPr>
           </a:p>
         </p:txBody>
       </p:sp>
@@ -5319,7 +5360,7 @@
           <a:noFill/>
         </p:spPr>
         <p:txBody>
-          <a:bodyPr wrap="square" lIns="0" rIns="0" tIns="0" bIns="0" anchor="t">
+          <a:bodyPr wrap="square" lIns="0" tIns="0" rIns="0" bIns="0" anchor="t">
             <a:spAutoFit/>
           </a:bodyPr>
           <a:lstStyle/>
@@ -5338,6 +5379,12 @@
               </a:rPr>
               <a:t>EIP-3009 gasless permits, live on real testnets</a:t>
             </a:r>
+            <a:endParaRPr sz="1350" b="0">
+              <a:solidFill>
+                <a:srgbClr val="0A0A0A"/>
+              </a:solidFill>
+              <a:latin typeface="Geist"/>
+            </a:endParaRPr>
           </a:p>
         </p:txBody>
       </p:sp>
@@ -5358,7 +5405,7 @@
           <a:noFill/>
         </p:spPr>
         <p:txBody>
-          <a:bodyPr wrap="square" lIns="0" rIns="0" tIns="0" bIns="0" anchor="t">
+          <a:bodyPr wrap="square" lIns="0" tIns="0" rIns="0" bIns="0" anchor="t">
             <a:spAutoFit/>
           </a:bodyPr>
           <a:lstStyle/>
@@ -5377,6 +5424,12 @@
               </a:rPr>
               <a:t>SHIPPED</a:t>
             </a:r>
+            <a:endParaRPr sz="1050" b="1" spc="120">
+              <a:solidFill>
+                <a:srgbClr val="6B7280"/>
+              </a:solidFill>
+              <a:latin typeface="Geist Mono"/>
+            </a:endParaRPr>
           </a:p>
         </p:txBody>
       </p:sp>
@@ -5487,7 +5540,7 @@
           <a:noFill/>
         </p:spPr>
         <p:txBody>
-          <a:bodyPr wrap="square" lIns="0" rIns="0" tIns="0" bIns="0" anchor="t">
+          <a:bodyPr wrap="square" lIns="0" tIns="0" rIns="0" bIns="0" anchor="t">
             <a:spAutoFit/>
           </a:bodyPr>
           <a:lstStyle/>
@@ -5506,6 +5559,12 @@
               </a:rPr>
               <a:t>Contracts covered by tests, deployed and verified</a:t>
             </a:r>
+            <a:endParaRPr sz="1350" b="0">
+              <a:solidFill>
+                <a:srgbClr val="0A0A0A"/>
+              </a:solidFill>
+              <a:latin typeface="Geist"/>
+            </a:endParaRPr>
           </a:p>
         </p:txBody>
       </p:sp>
@@ -5526,7 +5585,7 @@
           <a:noFill/>
         </p:spPr>
         <p:txBody>
-          <a:bodyPr wrap="square" lIns="0" rIns="0" tIns="0" bIns="0" anchor="t">
+          <a:bodyPr wrap="square" lIns="0" tIns="0" rIns="0" bIns="0" anchor="t">
             <a:spAutoFit/>
           </a:bodyPr>
           <a:lstStyle/>
@@ -5545,6 +5604,12 @@
               </a:rPr>
               <a:t>SHIPPED</a:t>
             </a:r>
+            <a:endParaRPr sz="1050" b="1" spc="120">
+              <a:solidFill>
+                <a:srgbClr val="6B7280"/>
+              </a:solidFill>
+              <a:latin typeface="Geist Mono"/>
+            </a:endParaRPr>
           </a:p>
         </p:txBody>
       </p:sp>
@@ -5655,7 +5720,7 @@
           <a:noFill/>
         </p:spPr>
         <p:txBody>
-          <a:bodyPr wrap="square" lIns="0" rIns="0" tIns="0" bIns="0" anchor="t">
+          <a:bodyPr wrap="square" lIns="0" tIns="0" rIns="0" bIns="0" anchor="t">
             <a:spAutoFit/>
           </a:bodyPr>
           <a:lstStyle/>
@@ -5674,6 +5739,12 @@
               </a:rPr>
               <a:t>Agent-to-agent payment, no browser in the loop</a:t>
             </a:r>
+            <a:endParaRPr sz="1350" b="0">
+              <a:solidFill>
+                <a:srgbClr val="0A0A0A"/>
+              </a:solidFill>
+              <a:latin typeface="Geist"/>
+            </a:endParaRPr>
           </a:p>
         </p:txBody>
       </p:sp>
@@ -5694,7 +5765,7 @@
           <a:noFill/>
         </p:spPr>
         <p:txBody>
-          <a:bodyPr wrap="square" lIns="0" rIns="0" tIns="0" bIns="0" anchor="t">
+          <a:bodyPr wrap="square" lIns="0" tIns="0" rIns="0" bIns="0" anchor="t">
             <a:spAutoFit/>
           </a:bodyPr>
           <a:lstStyle/>
@@ -5713,6 +5784,12 @@
               </a:rPr>
               <a:t>SHIPPED</a:t>
             </a:r>
+            <a:endParaRPr sz="1050" b="1" spc="120">
+              <a:solidFill>
+                <a:srgbClr val="6B7280"/>
+              </a:solidFill>
+              <a:latin typeface="Geist Mono"/>
+            </a:endParaRPr>
           </a:p>
         </p:txBody>
       </p:sp>
@@ -5823,7 +5900,7 @@
           <a:noFill/>
         </p:spPr>
         <p:txBody>
-          <a:bodyPr wrap="square" lIns="0" rIns="0" tIns="0" bIns="0" anchor="t">
+          <a:bodyPr wrap="square" lIns="0" tIns="0" rIns="0" bIns="0" anchor="t">
             <a:spAutoFit/>
           </a:bodyPr>
           <a:lstStyle/>
@@ -5842,6 +5919,12 @@
               </a:rPr>
               <a:t>Durable state, idempotency, reconciliation</a:t>
             </a:r>
+            <a:endParaRPr sz="1350" b="0">
+              <a:solidFill>
+                <a:srgbClr val="0A0A0A"/>
+              </a:solidFill>
+              <a:latin typeface="Geist"/>
+            </a:endParaRPr>
           </a:p>
         </p:txBody>
       </p:sp>
@@ -5862,7 +5945,7 @@
           <a:noFill/>
         </p:spPr>
         <p:txBody>
-          <a:bodyPr wrap="square" lIns="0" rIns="0" tIns="0" bIns="0" anchor="t">
+          <a:bodyPr wrap="square" lIns="0" tIns="0" rIns="0" bIns="0" anchor="t">
             <a:spAutoFit/>
           </a:bodyPr>
           <a:lstStyle/>
@@ -5881,6 +5964,12 @@
               </a:rPr>
               <a:t>IN FLIGHT</a:t>
             </a:r>
+            <a:endParaRPr sz="1050" b="1" spc="120">
+              <a:solidFill>
+                <a:srgbClr val="6B7280"/>
+              </a:solidFill>
+              <a:latin typeface="Geist Mono"/>
+            </a:endParaRPr>
           </a:p>
         </p:txBody>
       </p:sp>
@@ -5991,7 +6080,7 @@
           <a:noFill/>
         </p:spPr>
         <p:txBody>
-          <a:bodyPr wrap="square" lIns="0" rIns="0" tIns="0" bIns="0" anchor="t">
+          <a:bodyPr wrap="square" lIns="0" tIns="0" rIns="0" bIns="0" anchor="t">
             <a:spAutoFit/>
           </a:bodyPr>
           <a:lstStyle/>
@@ -6010,6 +6099,12 @@
               </a:rPr>
               <a:t>Multi-chain mesh + CCTP route scoring</a:t>
             </a:r>
+            <a:endParaRPr sz="1350" b="0">
+              <a:solidFill>
+                <a:srgbClr val="0A0A0A"/>
+              </a:solidFill>
+              <a:latin typeface="Geist"/>
+            </a:endParaRPr>
           </a:p>
         </p:txBody>
       </p:sp>
@@ -6030,7 +6125,7 @@
           <a:noFill/>
         </p:spPr>
         <p:txBody>
-          <a:bodyPr wrap="square" lIns="0" rIns="0" tIns="0" bIns="0" anchor="t">
+          <a:bodyPr wrap="square" lIns="0" tIns="0" rIns="0" bIns="0" anchor="t">
             <a:spAutoFit/>
           </a:bodyPr>
           <a:lstStyle/>
@@ -6049,6 +6144,12 @@
               </a:rPr>
               <a:t>IN FLIGHT</a:t>
             </a:r>
+            <a:endParaRPr sz="1050" b="1" spc="120">
+              <a:solidFill>
+                <a:srgbClr val="6B7280"/>
+              </a:solidFill>
+              <a:latin typeface="Geist Mono"/>
+            </a:endParaRPr>
           </a:p>
         </p:txBody>
       </p:sp>
@@ -6159,7 +6260,7 @@
           <a:noFill/>
         </p:spPr>
         <p:txBody>
-          <a:bodyPr wrap="square" lIns="0" rIns="0" tIns="0" bIns="0" anchor="t">
+          <a:bodyPr wrap="square" lIns="0" tIns="0" rIns="0" bIns="0" anchor="t">
             <a:spAutoFit/>
           </a:bodyPr>
           <a:lstStyle/>
@@ -6178,6 +6279,12 @@
               </a:rPr>
               <a:t>SDK, MCP server, x402 demo</a:t>
             </a:r>
+            <a:endParaRPr sz="1350" b="0">
+              <a:solidFill>
+                <a:srgbClr val="0A0A0A"/>
+              </a:solidFill>
+              <a:latin typeface="Geist"/>
+            </a:endParaRPr>
           </a:p>
         </p:txBody>
       </p:sp>
@@ -6198,7 +6305,7 @@
           <a:noFill/>
         </p:spPr>
         <p:txBody>
-          <a:bodyPr wrap="square" lIns="0" rIns="0" tIns="0" bIns="0" anchor="t">
+          <a:bodyPr wrap="square" lIns="0" tIns="0" rIns="0" bIns="0" anchor="t">
             <a:spAutoFit/>
           </a:bodyPr>
           <a:lstStyle/>
@@ -6217,6 +6324,12 @@
               </a:rPr>
               <a:t>IN FLIGHT</a:t>
             </a:r>
+            <a:endParaRPr sz="1050" b="1" spc="120">
+              <a:solidFill>
+                <a:srgbClr val="6B7280"/>
+              </a:solidFill>
+              <a:latin typeface="Geist Mono"/>
+            </a:endParaRPr>
           </a:p>
         </p:txBody>
       </p:sp>
@@ -6327,7 +6440,7 @@
           <a:noFill/>
         </p:spPr>
         <p:txBody>
-          <a:bodyPr wrap="square" lIns="0" rIns="0" tIns="0" bIns="0" anchor="t">
+          <a:bodyPr wrap="square" lIns="0" tIns="0" rIns="0" bIns="0" anchor="t">
             <a:spAutoFit/>
           </a:bodyPr>
           <a:lstStyle/>
@@ -6346,6 +6459,12 @@
               </a:rPr>
               <a:t>Bonded watcher network — decentralized release</a:t>
             </a:r>
+            <a:endParaRPr sz="1350" b="0">
+              <a:solidFill>
+                <a:srgbClr val="0A0A0A"/>
+              </a:solidFill>
+              <a:latin typeface="Geist"/>
+            </a:endParaRPr>
           </a:p>
         </p:txBody>
       </p:sp>
@@ -6366,7 +6485,7 @@
           <a:noFill/>
         </p:spPr>
         <p:txBody>
-          <a:bodyPr wrap="square" lIns="0" rIns="0" tIns="0" bIns="0" anchor="t">
+          <a:bodyPr wrap="square" lIns="0" tIns="0" rIns="0" bIns="0" anchor="t">
             <a:spAutoFit/>
           </a:bodyPr>
           <a:lstStyle/>
@@ -6385,6 +6504,12 @@
               </a:rPr>
               <a:t>NEXT</a:t>
             </a:r>
+            <a:endParaRPr sz="1050" b="1" spc="120">
+              <a:solidFill>
+                <a:srgbClr val="6B7280"/>
+              </a:solidFill>
+              <a:latin typeface="Geist Mono"/>
+            </a:endParaRPr>
           </a:p>
         </p:txBody>
       </p:sp>
@@ -6495,7 +6620,7 @@
           <a:noFill/>
         </p:spPr>
         <p:txBody>
-          <a:bodyPr wrap="square" lIns="0" rIns="0" tIns="0" bIns="0" anchor="t">
+          <a:bodyPr wrap="square" lIns="0" tIns="0" rIns="0" bIns="0" anchor="t">
             <a:spAutoFit/>
           </a:bodyPr>
           <a:lstStyle/>
@@ -6514,6 +6639,12 @@
               </a:rPr>
               <a:t>Mainnet with funded liquidity and multisig custody</a:t>
             </a:r>
+            <a:endParaRPr sz="1350" b="0">
+              <a:solidFill>
+                <a:srgbClr val="0A0A0A"/>
+              </a:solidFill>
+              <a:latin typeface="Geist"/>
+            </a:endParaRPr>
           </a:p>
         </p:txBody>
       </p:sp>
@@ -6534,7 +6665,7 @@
           <a:noFill/>
         </p:spPr>
         <p:txBody>
-          <a:bodyPr wrap="square" lIns="0" rIns="0" tIns="0" bIns="0" anchor="t">
+          <a:bodyPr wrap="square" lIns="0" tIns="0" rIns="0" bIns="0" anchor="t">
             <a:spAutoFit/>
           </a:bodyPr>
           <a:lstStyle/>
@@ -6553,6 +6684,12 @@
               </a:rPr>
               <a:t>NEXT</a:t>
             </a:r>
+            <a:endParaRPr sz="1050" b="1" spc="120">
+              <a:solidFill>
+                <a:srgbClr val="6B7280"/>
+              </a:solidFill>
+              <a:latin typeface="Geist Mono"/>
+            </a:endParaRPr>
           </a:p>
         </p:txBody>
       </p:sp>
@@ -6565,7 +6702,7 @@
 </file>
 
 <file path=ppt/slides/slide12.xml><?xml version="1.0" encoding="utf-8"?>
-<p:sld xmlns:a="http://schemas.openxmlformats.org/drawingml/2006/main" xmlns:p="http://schemas.openxmlformats.org/presentationml/2006/main" xmlns:r="http://schemas.openxmlformats.org/officeDocument/2006/relationships">
+<p:sld xmlns:a="http://schemas.openxmlformats.org/drawingml/2006/main" xmlns:r="http://schemas.openxmlformats.org/officeDocument/2006/relationships" xmlns:p="http://schemas.openxmlformats.org/presentationml/2006/main">
   <p:cSld>
     <p:spTree>
       <p:nvGrpSpPr>
@@ -6657,7 +6794,7 @@
           </a:fontRef>
         </p:style>
         <p:txBody>
-          <a:bodyPr rtlCol="0" anchor="ctr" lIns="0" rIns="0" tIns="0" bIns="0"/>
+          <a:bodyPr lIns="0" tIns="0" rIns="0" bIns="0" rtlCol="0" anchor="ctr"/>
           <a:lstStyle/>
           <a:p>
             <a:pPr algn="ctr"/>
@@ -6670,6 +6807,12 @@
               </a:rPr>
               <a:t>12</a:t>
             </a:r>
+            <a:endParaRPr sz="1100" b="1">
+              <a:solidFill>
+                <a:srgbClr val="0A0A0A"/>
+              </a:solidFill>
+              <a:latin typeface="Geist Mono"/>
+            </a:endParaRPr>
           </a:p>
         </p:txBody>
       </p:sp>
@@ -6690,7 +6833,7 @@
           <a:noFill/>
         </p:spPr>
         <p:txBody>
-          <a:bodyPr wrap="square" lIns="0" rIns="0" tIns="0" bIns="0" anchor="t">
+          <a:bodyPr wrap="square" lIns="0" tIns="0" rIns="0" bIns="0" anchor="t">
             <a:spAutoFit/>
           </a:bodyPr>
           <a:lstStyle/>
@@ -6709,6 +6852,12 @@
               </a:rPr>
               <a:t>THE ASK</a:t>
             </a:r>
+            <a:endParaRPr sz="1100" b="1" spc="160">
+              <a:solidFill>
+                <a:srgbClr val="F4623A"/>
+              </a:solidFill>
+              <a:latin typeface="Geist Mono"/>
+            </a:endParaRPr>
           </a:p>
         </p:txBody>
       </p:sp>
@@ -6729,7 +6878,7 @@
           <a:noFill/>
         </p:spPr>
         <p:txBody>
-          <a:bodyPr wrap="square" lIns="0" rIns="0" tIns="0" bIns="0" anchor="t">
+          <a:bodyPr wrap="square" lIns="0" tIns="0" rIns="0" bIns="0" anchor="t">
             <a:spAutoFit/>
           </a:bodyPr>
           <a:lstStyle/>
@@ -6748,6 +6897,12 @@
               </a:rPr>
               <a:t>Agents are about to need</a:t>
             </a:r>
+            <a:endParaRPr sz="4200" b="1">
+              <a:solidFill>
+                <a:srgbClr val="FFFFFF"/>
+              </a:solidFill>
+              <a:latin typeface="Geist"/>
+            </a:endParaRPr>
           </a:p>
           <a:p>
             <a:pPr algn="l">
@@ -6764,6 +6919,12 @@
               </a:rPr>
               <a:t>a way to pay each other.</a:t>
             </a:r>
+            <a:endParaRPr sz="4200" b="1">
+              <a:solidFill>
+                <a:srgbClr val="FFFFFF"/>
+              </a:solidFill>
+              <a:latin typeface="Geist"/>
+            </a:endParaRPr>
           </a:p>
         </p:txBody>
       </p:sp>
@@ -6784,7 +6945,7 @@
           <a:noFill/>
         </p:spPr>
         <p:txBody>
-          <a:bodyPr wrap="square" lIns="0" rIns="0" tIns="0" bIns="0" anchor="t">
+          <a:bodyPr wrap="square" lIns="0" tIns="0" rIns="0" bIns="0" anchor="t">
             <a:spAutoFit/>
           </a:bodyPr>
           <a:lstStyle/>
@@ -6803,6 +6964,12 @@
               </a:rPr>
               <a:t>Breeja is that rail — and it works for people too, through the same contracts.</a:t>
             </a:r>
+            <a:endParaRPr sz="1700" b="0">
+              <a:solidFill>
+                <a:srgbClr val="C3CCD8"/>
+              </a:solidFill>
+              <a:latin typeface="Geist"/>
+            </a:endParaRPr>
           </a:p>
         </p:txBody>
       </p:sp>
@@ -6867,7 +7034,7 @@
           <a:noFill/>
         </p:spPr>
         <p:txBody>
-          <a:bodyPr wrap="square" lIns="0" rIns="0" tIns="0" bIns="0" anchor="t">
+          <a:bodyPr wrap="square" lIns="0" tIns="0" rIns="0" bIns="0" anchor="t">
             <a:spAutoFit/>
           </a:bodyPr>
           <a:lstStyle/>
@@ -6886,6 +7053,12 @@
               </a:rPr>
               <a:t>TRY IT</a:t>
             </a:r>
+            <a:endParaRPr sz="1100" b="1" spc="120">
+              <a:solidFill>
+                <a:srgbClr val="F4623A"/>
+              </a:solidFill>
+              <a:latin typeface="Geist Mono"/>
+            </a:endParaRPr>
           </a:p>
         </p:txBody>
       </p:sp>
@@ -6906,7 +7079,7 @@
           <a:noFill/>
         </p:spPr>
         <p:txBody>
-          <a:bodyPr wrap="square" lIns="0" rIns="0" tIns="0" bIns="0" anchor="t">
+          <a:bodyPr wrap="square" lIns="0" tIns="0" rIns="0" bIns="0" anchor="t">
             <a:spAutoFit/>
           </a:bodyPr>
           <a:lstStyle/>
@@ -6925,6 +7098,12 @@
               </a:rPr>
               <a:t>Install the SDK and settle a cross-chain payment in one call.</a:t>
             </a:r>
+            <a:endParaRPr sz="1300" b="0">
+              <a:solidFill>
+                <a:srgbClr val="FFFFFF"/>
+              </a:solidFill>
+              <a:latin typeface="Geist"/>
+            </a:endParaRPr>
           </a:p>
         </p:txBody>
       </p:sp>
@@ -6989,7 +7168,7 @@
           <a:noFill/>
         </p:spPr>
         <p:txBody>
-          <a:bodyPr wrap="square" lIns="0" rIns="0" tIns="0" bIns="0" anchor="t">
+          <a:bodyPr wrap="square" lIns="0" tIns="0" rIns="0" bIns="0" anchor="t">
             <a:spAutoFit/>
           </a:bodyPr>
           <a:lstStyle/>
@@ -7008,6 +7187,12 @@
               </a:rPr>
               <a:t>PLUG IN</a:t>
             </a:r>
+            <a:endParaRPr sz="1100" b="1" spc="120">
+              <a:solidFill>
+                <a:srgbClr val="F4623A"/>
+              </a:solidFill>
+              <a:latin typeface="Geist Mono"/>
+            </a:endParaRPr>
           </a:p>
         </p:txBody>
       </p:sp>
@@ -7028,7 +7213,7 @@
           <a:noFill/>
         </p:spPr>
         <p:txBody>
-          <a:bodyPr wrap="square" lIns="0" rIns="0" tIns="0" bIns="0" anchor="t">
+          <a:bodyPr wrap="square" lIns="0" tIns="0" rIns="0" bIns="0" anchor="t">
             <a:spAutoFit/>
           </a:bodyPr>
           <a:lstStyle/>
@@ -7047,6 +7232,12 @@
               </a:rPr>
               <a:t>Add the MCP server and let your agent pay across chains today.</a:t>
             </a:r>
+            <a:endParaRPr sz="1300" b="0">
+              <a:solidFill>
+                <a:srgbClr val="FFFFFF"/>
+              </a:solidFill>
+              <a:latin typeface="Geist"/>
+            </a:endParaRPr>
           </a:p>
         </p:txBody>
       </p:sp>
@@ -7111,7 +7302,7 @@
           <a:noFill/>
         </p:spPr>
         <p:txBody>
-          <a:bodyPr wrap="square" lIns="0" rIns="0" tIns="0" bIns="0" anchor="t">
+          <a:bodyPr wrap="square" lIns="0" tIns="0" rIns="0" bIns="0" anchor="t">
             <a:spAutoFit/>
           </a:bodyPr>
           <a:lstStyle/>
@@ -7130,6 +7321,12 @@
               </a:rPr>
               <a:t>BUILD ON IT</a:t>
             </a:r>
+            <a:endParaRPr sz="1100" b="1" spc="120">
+              <a:solidFill>
+                <a:srgbClr val="F4623A"/>
+              </a:solidFill>
+              <a:latin typeface="Geist Mono"/>
+            </a:endParaRPr>
           </a:p>
         </p:txBody>
       </p:sp>
@@ -7150,7 +7347,7 @@
           <a:noFill/>
         </p:spPr>
         <p:txBody>
-          <a:bodyPr wrap="square" lIns="0" rIns="0" tIns="0" bIns="0" anchor="t">
+          <a:bodyPr wrap="square" lIns="0" tIns="0" rIns="0" bIns="0" anchor="t">
             <a:spAutoFit/>
           </a:bodyPr>
           <a:lstStyle/>
@@ -7169,6 +7366,12 @@
               </a:rPr>
               <a:t>Use Breeja as the settlement leg behind your own x402 endpoint.</a:t>
             </a:r>
+            <a:endParaRPr sz="1300" b="0">
+              <a:solidFill>
+                <a:srgbClr val="FFFFFF"/>
+              </a:solidFill>
+              <a:latin typeface="Geist"/>
+            </a:endParaRPr>
           </a:p>
         </p:txBody>
       </p:sp>
@@ -7181,7 +7384,7 @@
 </file>
 
 <file path=ppt/slides/slide2.xml><?xml version="1.0" encoding="utf-8"?>
-<p:sld xmlns:a="http://schemas.openxmlformats.org/drawingml/2006/main" xmlns:p="http://schemas.openxmlformats.org/presentationml/2006/main" xmlns:r="http://schemas.openxmlformats.org/officeDocument/2006/relationships">
+<p:sld xmlns:a="http://schemas.openxmlformats.org/drawingml/2006/main" xmlns:r="http://schemas.openxmlformats.org/officeDocument/2006/relationships" xmlns:p="http://schemas.openxmlformats.org/presentationml/2006/main">
   <p:cSld>
     <p:spTree>
       <p:nvGrpSpPr>
@@ -7273,7 +7476,7 @@
           </a:fontRef>
         </p:style>
         <p:txBody>
-          <a:bodyPr rtlCol="0" anchor="ctr" lIns="0" rIns="0" tIns="0" bIns="0"/>
+          <a:bodyPr lIns="0" tIns="0" rIns="0" bIns="0" rtlCol="0" anchor="ctr"/>
           <a:lstStyle/>
           <a:p>
             <a:pPr algn="ctr"/>
@@ -7286,6 +7489,12 @@
               </a:rPr>
               <a:t>02</a:t>
             </a:r>
+            <a:endParaRPr sz="1100" b="1">
+              <a:solidFill>
+                <a:srgbClr val="FFFFFF"/>
+              </a:solidFill>
+              <a:latin typeface="Geist Mono"/>
+            </a:endParaRPr>
           </a:p>
         </p:txBody>
       </p:sp>
@@ -7306,7 +7515,7 @@
           <a:noFill/>
         </p:spPr>
         <p:txBody>
-          <a:bodyPr wrap="square" lIns="0" rIns="0" tIns="0" bIns="0" anchor="t">
+          <a:bodyPr wrap="square" lIns="0" tIns="0" rIns="0" bIns="0" anchor="t">
             <a:spAutoFit/>
           </a:bodyPr>
           <a:lstStyle/>
@@ -7325,6 +7534,12 @@
               </a:rPr>
               <a:t>THE PROBLEM</a:t>
             </a:r>
+            <a:endParaRPr sz="1100" b="1" spc="160">
+              <a:solidFill>
+                <a:srgbClr val="6B7280"/>
+              </a:solidFill>
+              <a:latin typeface="Geist Mono"/>
+            </a:endParaRPr>
           </a:p>
         </p:txBody>
       </p:sp>
@@ -7345,7 +7560,7 @@
           <a:noFill/>
         </p:spPr>
         <p:txBody>
-          <a:bodyPr wrap="square" lIns="0" rIns="0" tIns="0" bIns="0" anchor="t">
+          <a:bodyPr wrap="square" lIns="0" tIns="0" rIns="0" bIns="0" anchor="t">
             <a:spAutoFit/>
           </a:bodyPr>
           <a:lstStyle/>
@@ -7364,6 +7579,12 @@
               </a:rPr>
               <a:t>Agents can think. They can't pay.</a:t>
             </a:r>
+            <a:endParaRPr sz="3800" b="1">
+              <a:solidFill>
+                <a:srgbClr val="0A0A0A"/>
+              </a:solidFill>
+              <a:latin typeface="Geist"/>
+            </a:endParaRPr>
           </a:p>
         </p:txBody>
       </p:sp>
@@ -7384,7 +7605,7 @@
           <a:noFill/>
         </p:spPr>
         <p:txBody>
-          <a:bodyPr wrap="square" lIns="0" rIns="0" tIns="0" bIns="0" anchor="t">
+          <a:bodyPr wrap="square" lIns="0" tIns="0" rIns="0" bIns="0" anchor="t">
             <a:spAutoFit/>
           </a:bodyPr>
           <a:lstStyle/>
@@ -7403,6 +7624,12 @@
               </a:rPr>
               <a:t>An AI agent that owes another agent $5 for an API call has no way to settle it across chains. Neither does a person holding USDC on the wrong network.</a:t>
             </a:r>
+            <a:endParaRPr sz="1600" b="0">
+              <a:solidFill>
+                <a:srgbClr val="6B7280"/>
+              </a:solidFill>
+              <a:latin typeface="Geist"/>
+            </a:endParaRPr>
           </a:p>
         </p:txBody>
       </p:sp>
@@ -7491,7 +7718,7 @@
           </a:fontRef>
         </p:style>
         <p:txBody>
-          <a:bodyPr rtlCol="0" anchor="ctr" wrap="square" lIns="0" rIns="0" tIns="73152" bIns="73152"/>
+          <a:bodyPr wrap="square" lIns="0" tIns="73152" rIns="0" bIns="73152" rtlCol="0" anchor="ctr"/>
           <a:lstStyle/>
           <a:p>
             <a:pPr algn="ctr">
@@ -7508,6 +7735,12 @@
               </a:rPr>
               <a:t>01</a:t>
             </a:r>
+            <a:endParaRPr sz="1200" b="1">
+              <a:solidFill>
+                <a:srgbClr val="FFFFFF"/>
+              </a:solidFill>
+              <a:latin typeface="Geist Mono"/>
+            </a:endParaRPr>
           </a:p>
         </p:txBody>
       </p:sp>
@@ -7528,7 +7761,7 @@
           <a:noFill/>
         </p:spPr>
         <p:txBody>
-          <a:bodyPr wrap="square" lIns="0" rIns="0" tIns="0" bIns="0" anchor="t">
+          <a:bodyPr wrap="square" lIns="0" tIns="0" rIns="0" bIns="0" anchor="t">
             <a:spAutoFit/>
           </a:bodyPr>
           <a:lstStyle/>
@@ -7547,6 +7780,12 @@
               </a:rPr>
               <a:t>Gas is a dead end</a:t>
             </a:r>
+            <a:endParaRPr sz="1600" b="1">
+              <a:solidFill>
+                <a:srgbClr val="0A0A0A"/>
+              </a:solidFill>
+              <a:latin typeface="Geist"/>
+            </a:endParaRPr>
           </a:p>
         </p:txBody>
       </p:sp>
@@ -7567,7 +7806,7 @@
           <a:noFill/>
         </p:spPr>
         <p:txBody>
-          <a:bodyPr wrap="square" lIns="0" rIns="0" tIns="0" bIns="0" anchor="t">
+          <a:bodyPr wrap="square" lIns="0" tIns="0" rIns="0" bIns="0" anchor="t">
             <a:spAutoFit/>
           </a:bodyPr>
           <a:lstStyle/>
@@ -7586,6 +7825,12 @@
               </a:rPr>
               <a:t>You need the native token of a chain you've never touched, before you can move the stablecoin you already hold.</a:t>
             </a:r>
+            <a:endParaRPr sz="1300" b="0">
+              <a:solidFill>
+                <a:srgbClr val="6B7280"/>
+              </a:solidFill>
+              <a:latin typeface="Geist"/>
+            </a:endParaRPr>
           </a:p>
         </p:txBody>
       </p:sp>
@@ -7674,7 +7919,7 @@
           </a:fontRef>
         </p:style>
         <p:txBody>
-          <a:bodyPr rtlCol="0" anchor="ctr" wrap="square" lIns="0" rIns="0" tIns="73152" bIns="73152"/>
+          <a:bodyPr wrap="square" lIns="0" tIns="73152" rIns="0" bIns="73152" rtlCol="0" anchor="ctr"/>
           <a:lstStyle/>
           <a:p>
             <a:pPr algn="ctr">
@@ -7691,6 +7936,12 @@
               </a:rPr>
               <a:t>02</a:t>
             </a:r>
+            <a:endParaRPr sz="1200" b="1">
+              <a:solidFill>
+                <a:srgbClr val="FFFFFF"/>
+              </a:solidFill>
+              <a:latin typeface="Geist Mono"/>
+            </a:endParaRPr>
           </a:p>
         </p:txBody>
       </p:sp>
@@ -7711,7 +7962,7 @@
           <a:noFill/>
         </p:spPr>
         <p:txBody>
-          <a:bodyPr wrap="square" lIns="0" rIns="0" tIns="0" bIns="0" anchor="t">
+          <a:bodyPr wrap="square" lIns="0" tIns="0" rIns="0" bIns="0" anchor="t">
             <a:spAutoFit/>
           </a:bodyPr>
           <a:lstStyle/>
@@ -7730,6 +7981,12 @@
               </a:rPr>
               <a:t>Bridges assume a browser</a:t>
             </a:r>
+            <a:endParaRPr sz="1600" b="1">
+              <a:solidFill>
+                <a:srgbClr val="0A0A0A"/>
+              </a:solidFill>
+              <a:latin typeface="Geist"/>
+            </a:endParaRPr>
           </a:p>
         </p:txBody>
       </p:sp>
@@ -7750,7 +8007,7 @@
           <a:noFill/>
         </p:spPr>
         <p:txBody>
-          <a:bodyPr wrap="square" lIns="0" rIns="0" tIns="0" bIns="0" anchor="t">
+          <a:bodyPr wrap="square" lIns="0" tIns="0" rIns="0" bIns="0" anchor="t">
             <a:spAutoFit/>
           </a:bodyPr>
           <a:lstStyle/>
@@ -7769,6 +8026,12 @@
               </a:rPr>
               <a:t>Connect wallet, approve, sign, wait. There is no programmatic path for software that has no hands.</a:t>
             </a:r>
+            <a:endParaRPr sz="1300" b="0">
+              <a:solidFill>
+                <a:srgbClr val="6B7280"/>
+              </a:solidFill>
+              <a:latin typeface="Geist"/>
+            </a:endParaRPr>
           </a:p>
         </p:txBody>
       </p:sp>
@@ -7857,7 +8120,7 @@
           </a:fontRef>
         </p:style>
         <p:txBody>
-          <a:bodyPr rtlCol="0" anchor="ctr" wrap="square" lIns="0" rIns="0" tIns="73152" bIns="73152"/>
+          <a:bodyPr wrap="square" lIns="0" tIns="73152" rIns="0" bIns="73152" rtlCol="0" anchor="ctr"/>
           <a:lstStyle/>
           <a:p>
             <a:pPr algn="ctr">
@@ -7874,6 +8137,12 @@
               </a:rPr>
               <a:t>03</a:t>
             </a:r>
+            <a:endParaRPr sz="1200" b="1">
+              <a:solidFill>
+                <a:srgbClr val="FFFFFF"/>
+              </a:solidFill>
+              <a:latin typeface="Geist Mono"/>
+            </a:endParaRPr>
           </a:p>
         </p:txBody>
       </p:sp>
@@ -7894,7 +8163,7 @@
           <a:noFill/>
         </p:spPr>
         <p:txBody>
-          <a:bodyPr wrap="square" lIns="0" rIns="0" tIns="0" bIns="0" anchor="t">
+          <a:bodyPr wrap="square" lIns="0" tIns="0" rIns="0" bIns="0" anchor="t">
             <a:spAutoFit/>
           </a:bodyPr>
           <a:lstStyle/>
@@ -7913,6 +8182,12 @@
               </a:rPr>
               <a:t>Bridges assume you pay yourself</a:t>
             </a:r>
+            <a:endParaRPr sz="1600" b="1">
+              <a:solidFill>
+                <a:srgbClr val="0A0A0A"/>
+              </a:solidFill>
+              <a:latin typeface="Geist"/>
+            </a:endParaRPr>
           </a:p>
         </p:txBody>
       </p:sp>
@@ -7933,7 +8208,7 @@
           <a:noFill/>
         </p:spPr>
         <p:txBody>
-          <a:bodyPr wrap="square" lIns="0" rIns="0" tIns="0" bIns="0" anchor="t">
+          <a:bodyPr wrap="square" lIns="0" tIns="0" rIns="0" bIns="0" anchor="t">
             <a:spAutoFit/>
           </a:bodyPr>
           <a:lstStyle/>
@@ -7952,6 +8227,12 @@
               </a:rPr>
               <a:t>Most move funds between your own addresses. Paying someone else on another chain is a different product.</a:t>
             </a:r>
+            <a:endParaRPr sz="1300" b="0">
+              <a:solidFill>
+                <a:srgbClr val="6B7280"/>
+              </a:solidFill>
+              <a:latin typeface="Geist"/>
+            </a:endParaRPr>
           </a:p>
         </p:txBody>
       </p:sp>
@@ -7964,7 +8245,7 @@
 </file>
 
 <file path=ppt/slides/slide3.xml><?xml version="1.0" encoding="utf-8"?>
-<p:sld xmlns:a="http://schemas.openxmlformats.org/drawingml/2006/main" xmlns:p="http://schemas.openxmlformats.org/presentationml/2006/main" xmlns:r="http://schemas.openxmlformats.org/officeDocument/2006/relationships">
+<p:sld xmlns:a="http://schemas.openxmlformats.org/drawingml/2006/main" xmlns:r="http://schemas.openxmlformats.org/officeDocument/2006/relationships" xmlns:p="http://schemas.openxmlformats.org/presentationml/2006/main">
   <p:cSld>
     <p:spTree>
       <p:nvGrpSpPr>
@@ -8056,7 +8337,7 @@
           </a:fontRef>
         </p:style>
         <p:txBody>
-          <a:bodyPr rtlCol="0" anchor="ctr" lIns="0" rIns="0" tIns="0" bIns="0"/>
+          <a:bodyPr lIns="0" tIns="0" rIns="0" bIns="0" rtlCol="0" anchor="ctr"/>
           <a:lstStyle/>
           <a:p>
             <a:pPr algn="ctr"/>
@@ -8069,6 +8350,12 @@
               </a:rPr>
               <a:t>03</a:t>
             </a:r>
+            <a:endParaRPr sz="1100" b="1">
+              <a:solidFill>
+                <a:srgbClr val="FFFFFF"/>
+              </a:solidFill>
+              <a:latin typeface="Geist Mono"/>
+            </a:endParaRPr>
           </a:p>
         </p:txBody>
       </p:sp>
@@ -8089,7 +8376,7 @@
           <a:noFill/>
         </p:spPr>
         <p:txBody>
-          <a:bodyPr wrap="square" lIns="0" rIns="0" tIns="0" bIns="0" anchor="t">
+          <a:bodyPr wrap="square" lIns="0" tIns="0" rIns="0" bIns="0" anchor="t">
             <a:spAutoFit/>
           </a:bodyPr>
           <a:lstStyle/>
@@ -8108,6 +8395,12 @@
               </a:rPr>
               <a:t>THE PRODUCT</a:t>
             </a:r>
+            <a:endParaRPr sz="1100" b="1" spc="160">
+              <a:solidFill>
+                <a:srgbClr val="6B7280"/>
+              </a:solidFill>
+              <a:latin typeface="Geist Mono"/>
+            </a:endParaRPr>
           </a:p>
         </p:txBody>
       </p:sp>
@@ -8128,7 +8421,7 @@
           <a:noFill/>
         </p:spPr>
         <p:txBody>
-          <a:bodyPr wrap="square" lIns="0" rIns="0" tIns="0" bIns="0" anchor="t">
+          <a:bodyPr wrap="square" lIns="0" tIns="0" rIns="0" bIns="0" anchor="t">
             <a:spAutoFit/>
           </a:bodyPr>
           <a:lstStyle/>
@@ -8147,6 +8440,12 @@
               </a:rPr>
               <a:t>A settlement rail with four front doors.</a:t>
             </a:r>
+            <a:endParaRPr sz="3800" b="1">
+              <a:solidFill>
+                <a:srgbClr val="0A0A0A"/>
+              </a:solidFill>
+              <a:latin typeface="Geist"/>
+            </a:endParaRPr>
           </a:p>
         </p:txBody>
       </p:sp>
@@ -8167,7 +8466,7 @@
           <a:noFill/>
         </p:spPr>
         <p:txBody>
-          <a:bodyPr wrap="square" lIns="0" rIns="0" tIns="0" bIns="0" anchor="t">
+          <a:bodyPr wrap="square" lIns="0" tIns="0" rIns="0" bIns="0" anchor="t">
             <a:spAutoFit/>
           </a:bodyPr>
           <a:lstStyle/>
@@ -8186,6 +8485,12 @@
               </a:rPr>
               <a:t>One signature. No gas. Funds land with anyone the payer names, on any supported chain.</a:t>
             </a:r>
+            <a:endParaRPr sz="1600" b="0">
+              <a:solidFill>
+                <a:srgbClr val="6B7280"/>
+              </a:solidFill>
+              <a:latin typeface="Geist"/>
+            </a:endParaRPr>
           </a:p>
         </p:txBody>
       </p:sp>
@@ -8252,7 +8557,7 @@
           <a:noFill/>
         </p:spPr>
         <p:txBody>
-          <a:bodyPr wrap="square" lIns="0" rIns="0" tIns="0" bIns="0" anchor="t">
+          <a:bodyPr wrap="square" lIns="0" tIns="0" rIns="0" bIns="0" anchor="t">
             <a:spAutoFit/>
           </a:bodyPr>
           <a:lstStyle/>
@@ -8271,6 +8576,12 @@
               </a:rPr>
               <a:t>STEP 01</a:t>
             </a:r>
+            <a:endParaRPr sz="1000" b="1" spc="140">
+              <a:solidFill>
+                <a:srgbClr val="6B7280"/>
+              </a:solidFill>
+              <a:latin typeface="Geist Mono"/>
+            </a:endParaRPr>
           </a:p>
         </p:txBody>
       </p:sp>
@@ -8291,7 +8602,7 @@
           <a:noFill/>
         </p:spPr>
         <p:txBody>
-          <a:bodyPr wrap="square" lIns="0" rIns="0" tIns="0" bIns="0" anchor="t">
+          <a:bodyPr wrap="square" lIns="0" tIns="0" rIns="0" bIns="0" anchor="t">
             <a:spAutoFit/>
           </a:bodyPr>
           <a:lstStyle/>
@@ -8310,6 +8621,12 @@
               </a:rPr>
               <a:t>Sign</a:t>
             </a:r>
+            <a:endParaRPr sz="1700" b="1">
+              <a:solidFill>
+                <a:srgbClr val="0A0A0A"/>
+              </a:solidFill>
+              <a:latin typeface="Geist"/>
+            </a:endParaRPr>
           </a:p>
         </p:txBody>
       </p:sp>
@@ -8330,7 +8647,7 @@
           <a:noFill/>
         </p:spPr>
         <p:txBody>
-          <a:bodyPr wrap="square" lIns="0" rIns="0" tIns="0" bIns="0" anchor="t">
+          <a:bodyPr wrap="square" lIns="0" tIns="0" rIns="0" bIns="0" anchor="t">
             <a:spAutoFit/>
           </a:bodyPr>
           <a:lstStyle/>
@@ -8349,6 +8666,12 @@
               </a:rPr>
               <a:t>Payer signs an EIP-3009 permit. A signature, not a transaction.</a:t>
             </a:r>
+            <a:endParaRPr sz="1200" b="0">
+              <a:solidFill>
+                <a:srgbClr val="6B7280"/>
+              </a:solidFill>
+              <a:latin typeface="Geist"/>
+            </a:endParaRPr>
           </a:p>
         </p:txBody>
       </p:sp>
@@ -8413,7 +8736,7 @@
           <a:noFill/>
         </p:spPr>
         <p:txBody>
-          <a:bodyPr wrap="square" lIns="0" rIns="0" tIns="0" bIns="0" anchor="t">
+          <a:bodyPr wrap="square" lIns="0" tIns="0" rIns="0" bIns="0" anchor="t">
             <a:spAutoFit/>
           </a:bodyPr>
           <a:lstStyle/>
@@ -8432,6 +8755,12 @@
               </a:rPr>
               <a:t>STEP 02</a:t>
             </a:r>
+            <a:endParaRPr sz="1000" b="1" spc="140">
+              <a:solidFill>
+                <a:srgbClr val="6B7280"/>
+              </a:solidFill>
+              <a:latin typeface="Geist Mono"/>
+            </a:endParaRPr>
           </a:p>
         </p:txBody>
       </p:sp>
@@ -8452,7 +8781,7 @@
           <a:noFill/>
         </p:spPr>
         <p:txBody>
-          <a:bodyPr wrap="square" lIns="0" rIns="0" tIns="0" bIns="0" anchor="t">
+          <a:bodyPr wrap="square" lIns="0" tIns="0" rIns="0" bIns="0" anchor="t">
             <a:spAutoFit/>
           </a:bodyPr>
           <a:lstStyle/>
@@ -8471,6 +8800,12 @@
               </a:rPr>
               <a:t>Relay</a:t>
             </a:r>
+            <a:endParaRPr sz="1700" b="1">
+              <a:solidFill>
+                <a:srgbClr val="0A0A0A"/>
+              </a:solidFill>
+              <a:latin typeface="Geist"/>
+            </a:endParaRPr>
           </a:p>
         </p:txBody>
       </p:sp>
@@ -8491,7 +8826,7 @@
           <a:noFill/>
         </p:spPr>
         <p:txBody>
-          <a:bodyPr wrap="square" lIns="0" rIns="0" tIns="0" bIns="0" anchor="t">
+          <a:bodyPr wrap="square" lIns="0" tIns="0" rIns="0" bIns="0" anchor="t">
             <a:spAutoFit/>
           </a:bodyPr>
           <a:lstStyle/>
@@ -8510,6 +8845,12 @@
               </a:rPr>
               <a:t>Breeja submits the deposit on the source chain and pays the gas.</a:t>
             </a:r>
+            <a:endParaRPr sz="1200" b="0">
+              <a:solidFill>
+                <a:srgbClr val="6B7280"/>
+              </a:solidFill>
+              <a:latin typeface="Geist"/>
+            </a:endParaRPr>
           </a:p>
         </p:txBody>
       </p:sp>
@@ -8574,7 +8915,7 @@
           <a:noFill/>
         </p:spPr>
         <p:txBody>
-          <a:bodyPr wrap="square" lIns="0" rIns="0" tIns="0" bIns="0" anchor="t">
+          <a:bodyPr wrap="square" lIns="0" tIns="0" rIns="0" bIns="0" anchor="t">
             <a:spAutoFit/>
           </a:bodyPr>
           <a:lstStyle/>
@@ -8593,6 +8934,12 @@
               </a:rPr>
               <a:t>STEP 03</a:t>
             </a:r>
+            <a:endParaRPr sz="1000" b="1" spc="140">
+              <a:solidFill>
+                <a:srgbClr val="6B7280"/>
+              </a:solidFill>
+              <a:latin typeface="Geist Mono"/>
+            </a:endParaRPr>
           </a:p>
         </p:txBody>
       </p:sp>
@@ -8613,7 +8960,7 @@
           <a:noFill/>
         </p:spPr>
         <p:txBody>
-          <a:bodyPr wrap="square" lIns="0" rIns="0" tIns="0" bIns="0" anchor="t">
+          <a:bodyPr wrap="square" lIns="0" tIns="0" rIns="0" bIns="0" anchor="t">
             <a:spAutoFit/>
           </a:bodyPr>
           <a:lstStyle/>
@@ -8632,6 +8979,12 @@
               </a:rPr>
               <a:t>Route</a:t>
             </a:r>
+            <a:endParaRPr sz="1700" b="1">
+              <a:solidFill>
+                <a:srgbClr val="0A0A0A"/>
+              </a:solidFill>
+              <a:latin typeface="Geist"/>
+            </a:endParaRPr>
           </a:p>
         </p:txBody>
       </p:sp>
@@ -8652,7 +9005,7 @@
           <a:noFill/>
         </p:spPr>
         <p:txBody>
-          <a:bodyPr wrap="square" lIns="0" rIns="0" tIns="0" bIns="0" anchor="t">
+          <a:bodyPr wrap="square" lIns="0" tIns="0" rIns="0" bIns="0" anchor="t">
             <a:spAutoFit/>
           </a:bodyPr>
           <a:lstStyle/>
@@ -8671,6 +9024,12 @@
               </a:rPr>
               <a:t>Router scores live gas, liquidity and preference, then picks a path.</a:t>
             </a:r>
+            <a:endParaRPr sz="1200" b="0">
+              <a:solidFill>
+                <a:srgbClr val="6B7280"/>
+              </a:solidFill>
+              <a:latin typeface="Geist"/>
+            </a:endParaRPr>
           </a:p>
         </p:txBody>
       </p:sp>
@@ -8735,7 +9094,7 @@
           <a:noFill/>
         </p:spPr>
         <p:txBody>
-          <a:bodyPr wrap="square" lIns="0" rIns="0" tIns="0" bIns="0" anchor="t">
+          <a:bodyPr wrap="square" lIns="0" tIns="0" rIns="0" bIns="0" anchor="t">
             <a:spAutoFit/>
           </a:bodyPr>
           <a:lstStyle/>
@@ -8754,6 +9113,12 @@
               </a:rPr>
               <a:t>STEP 04</a:t>
             </a:r>
+            <a:endParaRPr sz="1000" b="1" spc="140">
+              <a:solidFill>
+                <a:srgbClr val="6B7280"/>
+              </a:solidFill>
+              <a:latin typeface="Geist Mono"/>
+            </a:endParaRPr>
           </a:p>
         </p:txBody>
       </p:sp>
@@ -8774,7 +9139,7 @@
           <a:noFill/>
         </p:spPr>
         <p:txBody>
-          <a:bodyPr wrap="square" lIns="0" rIns="0" tIns="0" bIns="0" anchor="t">
+          <a:bodyPr wrap="square" lIns="0" tIns="0" rIns="0" bIns="0" anchor="t">
             <a:spAutoFit/>
           </a:bodyPr>
           <a:lstStyle/>
@@ -8793,6 +9158,12 @@
               </a:rPr>
               <a:t>Settle</a:t>
             </a:r>
+            <a:endParaRPr sz="1700" b="1">
+              <a:solidFill>
+                <a:srgbClr val="0A0A0A"/>
+              </a:solidFill>
+              <a:latin typeface="Geist"/>
+            </a:endParaRPr>
           </a:p>
         </p:txBody>
       </p:sp>
@@ -8813,7 +9184,7 @@
           <a:noFill/>
         </p:spPr>
         <p:txBody>
-          <a:bodyPr wrap="square" lIns="0" rIns="0" tIns="0" bIns="0" anchor="t">
+          <a:bodyPr wrap="square" lIns="0" tIns="0" rIns="0" bIns="0" anchor="t">
             <a:spAutoFit/>
           </a:bodyPr>
           <a:lstStyle/>
@@ -8832,6 +9203,12 @@
               </a:rPr>
               <a:t>Funds released to the named recipient on the destination chain.</a:t>
             </a:r>
+            <a:endParaRPr sz="1200" b="0">
+              <a:solidFill>
+                <a:srgbClr val="6B7280"/>
+              </a:solidFill>
+              <a:latin typeface="Geist"/>
+            </a:endParaRPr>
           </a:p>
         </p:txBody>
       </p:sp>
@@ -8918,7 +9295,7 @@
           </a:fontRef>
         </p:style>
         <p:txBody>
-          <a:bodyPr rtlCol="0" anchor="ctr" wrap="square" lIns="0" rIns="0" tIns="73152" bIns="73152"/>
+          <a:bodyPr wrap="square" lIns="0" tIns="73152" rIns="0" bIns="73152" rtlCol="0" anchor="ctr"/>
           <a:lstStyle/>
           <a:p>
             <a:pPr algn="ctr">
@@ -8935,6 +9312,12 @@
               </a:rPr>
               <a:t>Neither payer nor recipient ever holds a gas token.</a:t>
             </a:r>
+            <a:endParaRPr sz="1400" b="1">
+              <a:solidFill>
+                <a:srgbClr val="0A0A0A"/>
+              </a:solidFill>
+              <a:latin typeface="Geist Mono"/>
+            </a:endParaRPr>
           </a:p>
         </p:txBody>
       </p:sp>
@@ -8947,7 +9330,7 @@
 </file>
 
 <file path=ppt/slides/slide4.xml><?xml version="1.0" encoding="utf-8"?>
-<p:sld xmlns:a="http://schemas.openxmlformats.org/drawingml/2006/main" xmlns:p="http://schemas.openxmlformats.org/presentationml/2006/main" xmlns:r="http://schemas.openxmlformats.org/officeDocument/2006/relationships">
+<p:sld xmlns:a="http://schemas.openxmlformats.org/drawingml/2006/main" xmlns:r="http://schemas.openxmlformats.org/officeDocument/2006/relationships" xmlns:p="http://schemas.openxmlformats.org/presentationml/2006/main">
   <p:cSld>
     <p:spTree>
       <p:nvGrpSpPr>
@@ -9039,7 +9422,7 @@
           </a:fontRef>
         </p:style>
         <p:txBody>
-          <a:bodyPr rtlCol="0" anchor="ctr" lIns="0" rIns="0" tIns="0" bIns="0"/>
+          <a:bodyPr lIns="0" tIns="0" rIns="0" bIns="0" rtlCol="0" anchor="ctr"/>
           <a:lstStyle/>
           <a:p>
             <a:pPr algn="ctr"/>
@@ -9052,6 +9435,12 @@
               </a:rPr>
               <a:t>04</a:t>
             </a:r>
+            <a:endParaRPr sz="1100" b="1">
+              <a:solidFill>
+                <a:srgbClr val="FFFFFF"/>
+              </a:solidFill>
+              <a:latin typeface="Geist Mono"/>
+            </a:endParaRPr>
           </a:p>
         </p:txBody>
       </p:sp>
@@ -9072,7 +9461,7 @@
           <a:noFill/>
         </p:spPr>
         <p:txBody>
-          <a:bodyPr wrap="square" lIns="0" rIns="0" tIns="0" bIns="0" anchor="t">
+          <a:bodyPr wrap="square" lIns="0" tIns="0" rIns="0" bIns="0" anchor="t">
             <a:spAutoFit/>
           </a:bodyPr>
           <a:lstStyle/>
@@ -9091,6 +9480,12 @@
               </a:rPr>
               <a:t>SAME RAIL, FOUR CALLERS</a:t>
             </a:r>
+            <a:endParaRPr sz="1100" b="1" spc="160">
+              <a:solidFill>
+                <a:srgbClr val="6B7280"/>
+              </a:solidFill>
+              <a:latin typeface="Geist Mono"/>
+            </a:endParaRPr>
           </a:p>
         </p:txBody>
       </p:sp>
@@ -9111,7 +9506,7 @@
           <a:noFill/>
         </p:spPr>
         <p:txBody>
-          <a:bodyPr wrap="square" lIns="0" rIns="0" tIns="0" bIns="0" anchor="t">
+          <a:bodyPr wrap="square" lIns="0" tIns="0" rIns="0" bIns="0" anchor="t">
             <a:spAutoFit/>
           </a:bodyPr>
           <a:lstStyle/>
@@ -9130,6 +9525,12 @@
               </a:rPr>
               <a:t>Built for software first.</a:t>
             </a:r>
+            <a:endParaRPr sz="3800" b="1">
+              <a:solidFill>
+                <a:srgbClr val="0A0A0A"/>
+              </a:solidFill>
+              <a:latin typeface="Geist"/>
+            </a:endParaRPr>
           </a:p>
         </p:txBody>
       </p:sp>
@@ -9262,7 +9663,7 @@
           </a:fontRef>
         </p:style>
         <p:txBody>
-          <a:bodyPr rtlCol="0" anchor="ctr" wrap="square" lIns="146304" rIns="146304" tIns="73152" bIns="73152"/>
+          <a:bodyPr wrap="square" lIns="146304" tIns="73152" rIns="146304" bIns="73152" rtlCol="0" anchor="ctr"/>
           <a:lstStyle/>
           <a:p>
             <a:pPr algn="l">
@@ -9279,6 +9680,12 @@
               </a:rPr>
               <a:t>Human · Web app</a:t>
             </a:r>
+            <a:endParaRPr sz="1100" b="1" spc="120">
+              <a:solidFill>
+                <a:srgbClr val="F4623A"/>
+              </a:solidFill>
+              <a:latin typeface="Geist Mono"/>
+            </a:endParaRPr>
           </a:p>
         </p:txBody>
       </p:sp>
@@ -9299,7 +9706,7 @@
           <a:noFill/>
         </p:spPr>
         <p:txBody>
-          <a:bodyPr wrap="square" lIns="0" rIns="0" tIns="0" bIns="0" anchor="t">
+          <a:bodyPr wrap="square" lIns="0" tIns="0" rIns="0" bIns="0" anchor="t">
             <a:spAutoFit/>
           </a:bodyPr>
           <a:lstStyle/>
@@ -9318,6 +9725,12 @@
               </a:rPr>
               <a:t>Connect a wallet, pick chains, sign, watch it land live.</a:t>
             </a:r>
+            <a:endParaRPr sz="1300" b="0">
+              <a:solidFill>
+                <a:srgbClr val="6B7280"/>
+              </a:solidFill>
+              <a:latin typeface="Geist"/>
+            </a:endParaRPr>
           </a:p>
         </p:txBody>
       </p:sp>
@@ -9450,7 +9863,7 @@
           </a:fontRef>
         </p:style>
         <p:txBody>
-          <a:bodyPr rtlCol="0" anchor="ctr" wrap="square" lIns="146304" rIns="146304" tIns="73152" bIns="73152"/>
+          <a:bodyPr wrap="square" lIns="146304" tIns="73152" rIns="146304" bIns="73152" rtlCol="0" anchor="ctr"/>
           <a:lstStyle/>
           <a:p>
             <a:pPr algn="l">
@@ -9467,6 +9880,12 @@
               </a:rPr>
               <a:t>Agent · SDK</a:t>
             </a:r>
+            <a:endParaRPr sz="1100" b="1" spc="120">
+              <a:solidFill>
+                <a:srgbClr val="F4623A"/>
+              </a:solidFill>
+              <a:latin typeface="Geist Mono"/>
+            </a:endParaRPr>
           </a:p>
         </p:txBody>
       </p:sp>
@@ -9487,7 +9906,7 @@
           <a:noFill/>
         </p:spPr>
         <p:txBody>
-          <a:bodyPr wrap="square" lIns="0" rIns="0" tIns="0" bIns="0" anchor="t">
+          <a:bodyPr wrap="square" lIns="0" tIns="0" rIns="0" bIns="0" anchor="t">
             <a:spAutoFit/>
           </a:bodyPr>
           <a:lstStyle/>
@@ -9506,6 +9925,12 @@
               </a:rPr>
               <a:t>One call, no browser, no gas.</a:t>
             </a:r>
+            <a:endParaRPr sz="1300" b="0">
+              <a:solidFill>
+                <a:srgbClr val="6B7280"/>
+              </a:solidFill>
+              <a:latin typeface="Geist"/>
+            </a:endParaRPr>
           </a:p>
         </p:txBody>
       </p:sp>
@@ -9548,7 +9973,7 @@
           </a:fontRef>
         </p:style>
         <p:txBody>
-          <a:bodyPr rtlCol="0" anchor="ctr" wrap="square" tIns="73152" bIns="73152"/>
+          <a:bodyPr wrap="square" tIns="73152" bIns="73152" rtlCol="0" anchor="ctr"/>
           <a:lstStyle/>
           <a:p>
             <a:pPr algn="l">
@@ -9565,6 +9990,12 @@
               </a:rPr>
               <a:t>await breeja.pay({ … })</a:t>
             </a:r>
+            <a:endParaRPr sz="1100" b="0">
+              <a:solidFill>
+                <a:srgbClr val="0A0A0A"/>
+              </a:solidFill>
+              <a:latin typeface="Geist Mono"/>
+            </a:endParaRPr>
           </a:p>
         </p:txBody>
       </p:sp>
@@ -9697,7 +10128,7 @@
           </a:fontRef>
         </p:style>
         <p:txBody>
-          <a:bodyPr rtlCol="0" anchor="ctr" wrap="square" lIns="146304" rIns="146304" tIns="73152" bIns="73152"/>
+          <a:bodyPr wrap="square" lIns="146304" tIns="73152" rIns="146304" bIns="73152" rtlCol="0" anchor="ctr"/>
           <a:lstStyle/>
           <a:p>
             <a:pPr algn="l">
@@ -9714,6 +10145,12 @@
               </a:rPr>
               <a:t>Agent · MCP</a:t>
             </a:r>
+            <a:endParaRPr sz="1100" b="1" spc="120">
+              <a:solidFill>
+                <a:srgbClr val="F4623A"/>
+              </a:solidFill>
+              <a:latin typeface="Geist Mono"/>
+            </a:endParaRPr>
           </a:p>
         </p:txBody>
       </p:sp>
@@ -9734,7 +10171,7 @@
           <a:noFill/>
         </p:spPr>
         <p:txBody>
-          <a:bodyPr wrap="square" lIns="0" rIns="0" tIns="0" bIns="0" anchor="t">
+          <a:bodyPr wrap="square" lIns="0" tIns="0" rIns="0" bIns="0" anchor="t">
             <a:spAutoFit/>
           </a:bodyPr>
           <a:lstStyle/>
@@ -9753,6 +10190,12 @@
               </a:rPr>
               <a:t>Claude pays across chains as a tool call, with spend caps enforced.</a:t>
             </a:r>
+            <a:endParaRPr sz="1300" b="0">
+              <a:solidFill>
+                <a:srgbClr val="6B7280"/>
+              </a:solidFill>
+              <a:latin typeface="Geist"/>
+            </a:endParaRPr>
           </a:p>
         </p:txBody>
       </p:sp>
@@ -9885,7 +10328,7 @@
           </a:fontRef>
         </p:style>
         <p:txBody>
-          <a:bodyPr rtlCol="0" anchor="ctr" wrap="square" lIns="146304" rIns="146304" tIns="73152" bIns="73152"/>
+          <a:bodyPr wrap="square" lIns="146304" tIns="73152" rIns="146304" bIns="73152" rtlCol="0" anchor="ctr"/>
           <a:lstStyle/>
           <a:p>
             <a:pPr algn="l">
@@ -9902,6 +10345,12 @@
               </a:rPr>
               <a:t>Agent · x402</a:t>
             </a:r>
+            <a:endParaRPr sz="1100" b="1" spc="120">
+              <a:solidFill>
+                <a:srgbClr val="F4623A"/>
+              </a:solidFill>
+              <a:latin typeface="Geist Mono"/>
+            </a:endParaRPr>
           </a:p>
         </p:txBody>
       </p:sp>
@@ -9922,7 +10371,7 @@
           <a:noFill/>
         </p:spPr>
         <p:txBody>
-          <a:bodyPr wrap="square" lIns="0" rIns="0" tIns="0" bIns="0" anchor="t">
+          <a:bodyPr wrap="square" lIns="0" tIns="0" rIns="0" bIns="0" anchor="t">
             <a:spAutoFit/>
           </a:bodyPr>
           <a:lstStyle/>
@@ -9941,6 +10390,12 @@
               </a:rPr>
               <a:t>Hit a paywalled endpoint, settle, retry with proof. Cross-chain.</a:t>
             </a:r>
+            <a:endParaRPr sz="1300" b="0">
+              <a:solidFill>
+                <a:srgbClr val="6B7280"/>
+              </a:solidFill>
+              <a:latin typeface="Geist"/>
+            </a:endParaRPr>
           </a:p>
         </p:txBody>
       </p:sp>
@@ -9961,7 +10416,7 @@
           <a:noFill/>
         </p:spPr>
         <p:txBody>
-          <a:bodyPr wrap="square" lIns="0" rIns="0" tIns="0" bIns="0" anchor="t">
+          <a:bodyPr wrap="square" lIns="0" tIns="0" rIns="0" bIns="0" anchor="t">
             <a:spAutoFit/>
           </a:bodyPr>
           <a:lstStyle/>
@@ -9980,6 +10435,12 @@
               </a:rPr>
               <a:t>All four consume the same SDK. The SDK is the product — the web app is just one client.</a:t>
             </a:r>
+            <a:endParaRPr sz="1300" b="0">
+              <a:solidFill>
+                <a:srgbClr val="6B7280"/>
+              </a:solidFill>
+              <a:latin typeface="Geist"/>
+            </a:endParaRPr>
           </a:p>
         </p:txBody>
       </p:sp>
@@ -9992,7 +10453,7 @@
 </file>
 
 <file path=ppt/slides/slide5.xml><?xml version="1.0" encoding="utf-8"?>
-<p:sld xmlns:a="http://schemas.openxmlformats.org/drawingml/2006/main" xmlns:p="http://schemas.openxmlformats.org/presentationml/2006/main" xmlns:r="http://schemas.openxmlformats.org/officeDocument/2006/relationships">
+<p:sld xmlns:a="http://schemas.openxmlformats.org/drawingml/2006/main" xmlns:r="http://schemas.openxmlformats.org/officeDocument/2006/relationships" xmlns:p="http://schemas.openxmlformats.org/presentationml/2006/main">
   <p:cSld>
     <p:spTree>
       <p:nvGrpSpPr>
@@ -10084,7 +10545,7 @@
           </a:fontRef>
         </p:style>
         <p:txBody>
-          <a:bodyPr rtlCol="0" anchor="ctr" lIns="0" rIns="0" tIns="0" bIns="0"/>
+          <a:bodyPr lIns="0" tIns="0" rIns="0" bIns="0" rtlCol="0" anchor="ctr"/>
           <a:lstStyle/>
           <a:p>
             <a:pPr algn="ctr"/>
@@ -10097,6 +10558,12 @@
               </a:rPr>
               <a:t>05</a:t>
             </a:r>
+            <a:endParaRPr sz="1100" b="1">
+              <a:solidFill>
+                <a:srgbClr val="FFFFFF"/>
+              </a:solidFill>
+              <a:latin typeface="Geist Mono"/>
+            </a:endParaRPr>
           </a:p>
         </p:txBody>
       </p:sp>
@@ -10117,7 +10584,7 @@
           <a:noFill/>
         </p:spPr>
         <p:txBody>
-          <a:bodyPr wrap="square" lIns="0" rIns="0" tIns="0" bIns="0" anchor="t">
+          <a:bodyPr wrap="square" lIns="0" tIns="0" rIns="0" bIns="0" anchor="t">
             <a:spAutoFit/>
           </a:bodyPr>
           <a:lstStyle/>
@@ -10136,6 +10603,12 @@
               </a:rPr>
               <a:t>DEVELOPER EXPERIENCE</a:t>
             </a:r>
+            <a:endParaRPr sz="1100" b="1" spc="160">
+              <a:solidFill>
+                <a:srgbClr val="6B7280"/>
+              </a:solidFill>
+              <a:latin typeface="Geist Mono"/>
+            </a:endParaRPr>
           </a:p>
         </p:txBody>
       </p:sp>
@@ -10156,7 +10629,7 @@
           <a:noFill/>
         </p:spPr>
         <p:txBody>
-          <a:bodyPr wrap="square" lIns="0" rIns="0" tIns="0" bIns="0" anchor="t">
+          <a:bodyPr wrap="square" lIns="0" tIns="0" rIns="0" bIns="0" anchor="t">
             <a:spAutoFit/>
           </a:bodyPr>
           <a:lstStyle/>
@@ -10175,6 +10648,12 @@
               </a:rPr>
               <a:t>The whole integration.</a:t>
             </a:r>
+            <a:endParaRPr sz="3800" b="1">
+              <a:solidFill>
+                <a:srgbClr val="0A0A0A"/>
+              </a:solidFill>
+              <a:latin typeface="Geist"/>
+            </a:endParaRPr>
           </a:p>
         </p:txBody>
       </p:sp>
@@ -10186,8 +10665,8 @@
         </p:nvSpPr>
         <p:spPr>
           <a:xfrm>
-            <a:off x="630936" y="1911096"/>
-            <a:ext cx="6766560" cy="2606040"/>
+            <a:off x="631190" y="1911350"/>
+            <a:ext cx="6766560" cy="2863215"/>
           </a:xfrm>
           <a:prstGeom prst="rect">
             <a:avLst/>
@@ -10230,8 +10709,8 @@
         </p:nvSpPr>
         <p:spPr>
           <a:xfrm>
-            <a:off x="566928" y="1847088"/>
-            <a:ext cx="6766560" cy="2606040"/>
+            <a:off x="567055" y="1847215"/>
+            <a:ext cx="6766560" cy="2863215"/>
           </a:xfrm>
           <a:prstGeom prst="rect">
             <a:avLst/>
@@ -10285,7 +10764,7 @@
           <a:noFill/>
         </p:spPr>
         <p:txBody>
-          <a:bodyPr wrap="none" lIns="0" rIns="0" tIns="0" bIns="0">
+          <a:bodyPr wrap="none" lIns="0" tIns="0" rIns="0" bIns="0">
             <a:spAutoFit/>
           </a:bodyPr>
           <a:lstStyle/>
@@ -10331,6 +10810,12 @@
               </a:rPr>
               <a:t>"@breeja/sdk";</a:t>
             </a:r>
+            <a:endParaRPr sz="1300" b="1">
+              <a:solidFill>
+                <a:srgbClr val="F4623A"/>
+              </a:solidFill>
+              <a:latin typeface="Geist Mono"/>
+            </a:endParaRPr>
           </a:p>
           <a:p>
             <a:pPr>
@@ -10338,15 +10823,73 @@
                 <a:spcPct val="132000"/>
               </a:lnSpc>
             </a:pPr>
+          </a:p>
+          <a:p>
+            <a:pPr>
+              <a:lnSpc>
+                <a:spcPct val="132000"/>
+              </a:lnSpc>
+            </a:pPr>
             <a:r>
               <a:rPr sz="1300" b="1">
                 <a:solidFill>
+                  <a:srgbClr val="F4623A"/>
+                </a:solidFill>
+                <a:latin typeface="Geist Mono"/>
+              </a:rPr>
+              <a:t>const </a:t>
+            </a:r>
+            <a:r>
+              <a:rPr sz="1300" b="1">
+                <a:solidFill>
                   <a:srgbClr val="FFFFFF"/>
                 </a:solidFill>
                 <a:latin typeface="Geist Mono"/>
               </a:rPr>
-              <a:t/>
-            </a:r>
+              <a:t>payment = </a:t>
+            </a:r>
+            <a:r>
+              <a:rPr sz="1300" b="1">
+                <a:solidFill>
+                  <a:srgbClr val="F4623A"/>
+                </a:solidFill>
+                <a:latin typeface="Geist Mono"/>
+              </a:rPr>
+              <a:t>await </a:t>
+            </a:r>
+            <a:r>
+              <a:rPr sz="1300" b="1">
+                <a:solidFill>
+                  <a:srgbClr val="FFFFFF"/>
+                </a:solidFill>
+                <a:latin typeface="Geist Mono"/>
+              </a:rPr>
+              <a:t>breeja.</a:t>
+            </a:r>
+            <a:r>
+              <a:rPr sz="1300" b="1">
+                <a:solidFill>
+                  <a:srgbClr val="F4623A"/>
+                </a:solidFill>
+                <a:latin typeface="Geist Mono"/>
+              </a:rPr>
+              <a:t>pay</a:t>
+            </a:r>
+            <a:r>
+              <a:rPr sz="1300" b="1">
+                <a:solidFill>
+                  <a:srgbClr val="FFFFFF"/>
+                </a:solidFill>
+                <a:latin typeface="Geist Mono"/>
+              </a:rPr>
+              <a:t>({</a:t>
+            </a:r>
+            <a:endParaRPr sz="1300" b="1">
+              <a:solidFill>
+                <a:srgbClr val="FFFFFF"/>
+              </a:solidFill>
+              <a:latin typeface="Geist Mono"/>
+            </a:endParaRPr>
           </a:p>
           <a:p>
             <a:pPr>
@@ -10357,12 +10900,34 @@
             <a:r>
               <a:rPr sz="1300" b="1">
                 <a:solidFill>
+                  <a:srgbClr val="FFFFFF"/>
+                </a:solidFill>
+                <a:latin typeface="Geist Mono"/>
+              </a:rPr>
+              <a:t>  from:      </a:t>
+            </a:r>
+            <a:r>
+              <a:rPr sz="1300" b="1">
+                <a:solidFill>
                   <a:srgbClr val="F4623A"/>
                 </a:solidFill>
                 <a:latin typeface="Geist Mono"/>
               </a:rPr>
-              <a:t>const </a:t>
-            </a:r>
+              <a:t>"base-sepolia",</a:t>
+            </a:r>
+            <a:endParaRPr sz="1300" b="1">
+              <a:solidFill>
+                <a:srgbClr val="F4623A"/>
+              </a:solidFill>
+              <a:latin typeface="Geist Mono"/>
+            </a:endParaRPr>
+          </a:p>
+          <a:p>
+            <a:pPr>
+              <a:lnSpc>
+                <a:spcPct val="132000"/>
+              </a:lnSpc>
+            </a:pPr>
             <a:r>
               <a:rPr sz="1300" b="1">
                 <a:solidFill>
@@ -10370,7 +10935,7 @@
                 </a:solidFill>
                 <a:latin typeface="Geist Mono"/>
               </a:rPr>
-              <a:t>payment = </a:t>
+              <a:t>  to:        </a:t>
             </a:r>
             <a:r>
               <a:rPr sz="1300" b="1">
@@ -10379,8 +10944,21 @@
                 </a:solidFill>
                 <a:latin typeface="Geist Mono"/>
               </a:rPr>
-              <a:t>await </a:t>
-            </a:r>
+              <a:t>"arbitrum-sepolia",</a:t>
+            </a:r>
+            <a:endParaRPr sz="1300" b="1">
+              <a:solidFill>
+                <a:srgbClr val="F4623A"/>
+              </a:solidFill>
+              <a:latin typeface="Geist Mono"/>
+            </a:endParaRPr>
+          </a:p>
+          <a:p>
+            <a:pPr>
+              <a:lnSpc>
+                <a:spcPct val="132000"/>
+              </a:lnSpc>
+            </a:pPr>
             <a:r>
               <a:rPr sz="1300" b="1">
                 <a:solidFill>
@@ -10388,7 +10966,7 @@
                 </a:solidFill>
                 <a:latin typeface="Geist Mono"/>
               </a:rPr>
-              <a:t>breeja.</a:t>
+              <a:t>  amount:    </a:t>
             </a:r>
             <a:r>
               <a:rPr sz="1300" b="1">
@@ -10397,8 +10975,21 @@
                 </a:solidFill>
                 <a:latin typeface="Geist Mono"/>
               </a:rPr>
-              <a:t>pay</a:t>
-            </a:r>
+              <a:t>"10.00",</a:t>
+            </a:r>
+            <a:endParaRPr sz="1300" b="1">
+              <a:solidFill>
+                <a:srgbClr val="F4623A"/>
+              </a:solidFill>
+              <a:latin typeface="Geist Mono"/>
+            </a:endParaRPr>
+          </a:p>
+          <a:p>
+            <a:pPr>
+              <a:lnSpc>
+                <a:spcPct val="132000"/>
+              </a:lnSpc>
+            </a:pPr>
             <a:r>
               <a:rPr sz="1300" b="1">
                 <a:solidFill>
@@ -10406,8 +10997,23 @@
                 </a:solidFill>
                 <a:latin typeface="Geist Mono"/>
               </a:rPr>
-              <a:t>({</a:t>
-            </a:r>
+              <a:t>  recipient: </a:t>
+            </a:r>
+            <a:r>
+              <a:rPr sz="1300" b="1">
+                <a:solidFill>
+                  <a:srgbClr val="F4623A"/>
+                </a:solidFill>
+                <a:latin typeface="Geist Mono"/>
+              </a:rPr>
+              <a:t>"alice.eth",</a:t>
+            </a:r>
+            <a:endParaRPr sz="1300" b="1">
+              <a:solidFill>
+                <a:srgbClr val="F4623A"/>
+              </a:solidFill>
+              <a:latin typeface="Geist Mono"/>
+            </a:endParaRPr>
           </a:p>
           <a:p>
             <a:pPr>
@@ -10422,17 +11028,36 @@
                 </a:solidFill>
                 <a:latin typeface="Geist Mono"/>
               </a:rPr>
-              <a:t>  from:      </a:t>
-            </a:r>
+              <a:t>  signer:    account,</a:t>
+            </a:r>
+            <a:endParaRPr sz="1300" b="1">
+              <a:solidFill>
+                <a:srgbClr val="FFFFFF"/>
+              </a:solidFill>
+              <a:latin typeface="Geist Mono"/>
+            </a:endParaRPr>
+          </a:p>
+          <a:p>
+            <a:pPr>
+              <a:lnSpc>
+                <a:spcPct val="132000"/>
+              </a:lnSpc>
+            </a:pPr>
             <a:r>
               <a:rPr sz="1300" b="1">
                 <a:solidFill>
-                  <a:srgbClr val="F4623A"/>
+                  <a:srgbClr val="FFFFFF"/>
                 </a:solidFill>
                 <a:latin typeface="Geist Mono"/>
               </a:rPr>
-              <a:t>"base-sepolia",</a:t>
-            </a:r>
+              <a:t>});</a:t>
+            </a:r>
+            <a:endParaRPr sz="1300" b="1">
+              <a:solidFill>
+                <a:srgbClr val="FFFFFF"/>
+              </a:solidFill>
+              <a:latin typeface="Geist Mono"/>
+            </a:endParaRPr>
           </a:p>
           <a:p>
             <a:pPr>
@@ -10440,138 +11065,28 @@
                 <a:spcPct val="132000"/>
               </a:lnSpc>
             </a:pPr>
+          </a:p>
+          <a:p>
+            <a:pPr>
+              <a:lnSpc>
+                <a:spcPct val="132000"/>
+              </a:lnSpc>
+            </a:pPr>
             <a:r>
               <a:rPr sz="1300" b="1">
                 <a:solidFill>
-                  <a:srgbClr val="FFFFFF"/>
+                  <a:srgbClr val="8FA3BF"/>
                 </a:solidFill>
                 <a:latin typeface="Geist Mono"/>
               </a:rPr>
-              <a:t>  to:        </a:t>
-            </a:r>
-            <a:r>
-              <a:rPr sz="1300" b="1">
-                <a:solidFill>
-                  <a:srgbClr val="F4623A"/>
-                </a:solidFill>
-                <a:latin typeface="Geist Mono"/>
-              </a:rPr>
-              <a:t>"arbitrum-sepolia",</a:t>
-            </a:r>
-          </a:p>
-          <a:p>
-            <a:pPr>
-              <a:lnSpc>
-                <a:spcPct val="132000"/>
-              </a:lnSpc>
-            </a:pPr>
-            <a:r>
-              <a:rPr sz="1300" b="1">
-                <a:solidFill>
-                  <a:srgbClr val="FFFFFF"/>
-                </a:solidFill>
-                <a:latin typeface="Geist Mono"/>
-              </a:rPr>
-              <a:t>  amount:    </a:t>
-            </a:r>
-            <a:r>
-              <a:rPr sz="1300" b="1">
-                <a:solidFill>
-                  <a:srgbClr val="F4623A"/>
-                </a:solidFill>
-                <a:latin typeface="Geist Mono"/>
-              </a:rPr>
-              <a:t>"10.00",</a:t>
-            </a:r>
-          </a:p>
-          <a:p>
-            <a:pPr>
-              <a:lnSpc>
-                <a:spcPct val="132000"/>
-              </a:lnSpc>
-            </a:pPr>
-            <a:r>
-              <a:rPr sz="1300" b="1">
-                <a:solidFill>
-                  <a:srgbClr val="FFFFFF"/>
-                </a:solidFill>
-                <a:latin typeface="Geist Mono"/>
-              </a:rPr>
-              <a:t>  recipient: </a:t>
-            </a:r>
-            <a:r>
-              <a:rPr sz="1300" b="1">
-                <a:solidFill>
-                  <a:srgbClr val="F4623A"/>
-                </a:solidFill>
-                <a:latin typeface="Geist Mono"/>
-              </a:rPr>
-              <a:t>"alice.eth",</a:t>
-            </a:r>
-          </a:p>
-          <a:p>
-            <a:pPr>
-              <a:lnSpc>
-                <a:spcPct val="132000"/>
-              </a:lnSpc>
-            </a:pPr>
-            <a:r>
-              <a:rPr sz="1300" b="1">
-                <a:solidFill>
-                  <a:srgbClr val="FFFFFF"/>
-                </a:solidFill>
-                <a:latin typeface="Geist Mono"/>
-              </a:rPr>
-              <a:t>  signer:    account,</a:t>
-            </a:r>
-          </a:p>
-          <a:p>
-            <a:pPr>
-              <a:lnSpc>
-                <a:spcPct val="132000"/>
-              </a:lnSpc>
-            </a:pPr>
-            <a:r>
-              <a:rPr sz="1300" b="1">
-                <a:solidFill>
-                  <a:srgbClr val="FFFFFF"/>
-                </a:solidFill>
-                <a:latin typeface="Geist Mono"/>
-              </a:rPr>
-              <a:t>});</a:t>
-            </a:r>
-          </a:p>
-          <a:p>
-            <a:pPr>
-              <a:lnSpc>
-                <a:spcPct val="132000"/>
-              </a:lnSpc>
-            </a:pPr>
-            <a:r>
-              <a:rPr sz="1300" b="1">
-                <a:solidFill>
-                  <a:srgbClr val="FFFFFF"/>
-                </a:solidFill>
-                <a:latin typeface="Geist Mono"/>
-              </a:rPr>
-              <a:t/>
-            </a:r>
-          </a:p>
-          <a:p>
-            <a:pPr>
-              <a:lnSpc>
-                <a:spcPct val="132000"/>
-              </a:lnSpc>
-            </a:pPr>
-            <a:r>
-              <a:rPr sz="1300" b="1">
-                <a:solidFill>
-                  <a:srgbClr val="8FA3BF"/>
-                </a:solidFill>
-                <a:latin typeface="Geist Mono"/>
-              </a:rPr>
               <a:t>// → settled in seconds, no gas token held</a:t>
             </a:r>
+            <a:endParaRPr sz="1300" b="1">
+              <a:solidFill>
+                <a:srgbClr val="8FA3BF"/>
+              </a:solidFill>
+              <a:latin typeface="Geist Mono"/>
+            </a:endParaRPr>
           </a:p>
         </p:txBody>
       </p:sp>
@@ -10682,7 +11197,7 @@
           <a:noFill/>
         </p:spPr>
         <p:txBody>
-          <a:bodyPr wrap="square" lIns="0" rIns="0" tIns="0" bIns="0" anchor="t">
+          <a:bodyPr wrap="square" lIns="0" tIns="0" rIns="0" bIns="0" anchor="t">
             <a:spAutoFit/>
           </a:bodyPr>
           <a:lstStyle/>
@@ -10701,6 +11216,12 @@
               </a:rPr>
               <a:t>Runtime discovery</a:t>
             </a:r>
+            <a:endParaRPr sz="1400" b="1">
+              <a:solidFill>
+                <a:srgbClr val="0A0A0A"/>
+              </a:solidFill>
+              <a:latin typeface="Geist"/>
+            </a:endParaRPr>
           </a:p>
         </p:txBody>
       </p:sp>
@@ -10721,7 +11242,7 @@
           <a:noFill/>
         </p:spPr>
         <p:txBody>
-          <a:bodyPr wrap="square" lIns="0" rIns="0" tIns="0" bIns="0" anchor="t">
+          <a:bodyPr wrap="square" lIns="0" tIns="0" rIns="0" bIns="0" anchor="t">
             <a:spAutoFit/>
           </a:bodyPr>
           <a:lstStyle/>
@@ -10740,6 +11261,12 @@
               </a:rPr>
               <a:t>Agents call chains() — never a hardcoded list.</a:t>
             </a:r>
+            <a:endParaRPr sz="1100" b="0">
+              <a:solidFill>
+                <a:srgbClr val="6B7280"/>
+              </a:solidFill>
+              <a:latin typeface="Geist"/>
+            </a:endParaRPr>
           </a:p>
         </p:txBody>
       </p:sp>
@@ -10850,7 +11377,7 @@
           <a:noFill/>
         </p:spPr>
         <p:txBody>
-          <a:bodyPr wrap="square" lIns="0" rIns="0" tIns="0" bIns="0" anchor="t">
+          <a:bodyPr wrap="square" lIns="0" tIns="0" rIns="0" bIns="0" anchor="t">
             <a:spAutoFit/>
           </a:bodyPr>
           <a:lstStyle/>
@@ -10869,6 +11396,12 @@
               </a:rPr>
               <a:t>Typed errors</a:t>
             </a:r>
+            <a:endParaRPr sz="1400" b="1">
+              <a:solidFill>
+                <a:srgbClr val="0A0A0A"/>
+              </a:solidFill>
+              <a:latin typeface="Geist"/>
+            </a:endParaRPr>
           </a:p>
         </p:txBody>
       </p:sp>
@@ -10889,7 +11422,7 @@
           <a:noFill/>
         </p:spPr>
         <p:txBody>
-          <a:bodyPr wrap="square" lIns="0" rIns="0" tIns="0" bIns="0" anchor="t">
+          <a:bodyPr wrap="square" lIns="0" tIns="0" rIns="0" bIns="0" anchor="t">
             <a:spAutoFit/>
           </a:bodyPr>
           <a:lstStyle/>
@@ -10908,6 +11441,12 @@
               </a:rPr>
               <a:t>Stable codes an agent can branch on exhaustively.</a:t>
             </a:r>
+            <a:endParaRPr sz="1100" b="0">
+              <a:solidFill>
+                <a:srgbClr val="6B7280"/>
+              </a:solidFill>
+              <a:latin typeface="Geist"/>
+            </a:endParaRPr>
           </a:p>
         </p:txBody>
       </p:sp>
@@ -11018,7 +11557,7 @@
           <a:noFill/>
         </p:spPr>
         <p:txBody>
-          <a:bodyPr wrap="square" lIns="0" rIns="0" tIns="0" bIns="0" anchor="t">
+          <a:bodyPr wrap="square" lIns="0" tIns="0" rIns="0" bIns="0" anchor="t">
             <a:spAutoFit/>
           </a:bodyPr>
           <a:lstStyle/>
@@ -11037,6 +11576,12 @@
               </a:rPr>
               <a:t>Idempotent</a:t>
             </a:r>
+            <a:endParaRPr sz="1400" b="1">
+              <a:solidFill>
+                <a:srgbClr val="0A0A0A"/>
+              </a:solidFill>
+              <a:latin typeface="Geist"/>
+            </a:endParaRPr>
           </a:p>
         </p:txBody>
       </p:sp>
@@ -11057,7 +11602,7 @@
           <a:noFill/>
         </p:spPr>
         <p:txBody>
-          <a:bodyPr wrap="square" lIns="0" rIns="0" tIns="0" bIns="0" anchor="t">
+          <a:bodyPr wrap="square" lIns="0" tIns="0" rIns="0" bIns="0" anchor="t">
             <a:spAutoFit/>
           </a:bodyPr>
           <a:lstStyle/>
@@ -11076,6 +11621,12 @@
               </a:rPr>
               <a:t>Keyed on the permit nonce. Retries never double-spend.</a:t>
             </a:r>
+            <a:endParaRPr sz="1100" b="0">
+              <a:solidFill>
+                <a:srgbClr val="6B7280"/>
+              </a:solidFill>
+              <a:latin typeface="Geist"/>
+            </a:endParaRPr>
           </a:p>
         </p:txBody>
       </p:sp>
@@ -11088,7 +11639,7 @@
 </file>
 
 <file path=ppt/slides/slide6.xml><?xml version="1.0" encoding="utf-8"?>
-<p:sld xmlns:a="http://schemas.openxmlformats.org/drawingml/2006/main" xmlns:p="http://schemas.openxmlformats.org/presentationml/2006/main" xmlns:r="http://schemas.openxmlformats.org/officeDocument/2006/relationships">
+<p:sld xmlns:a="http://schemas.openxmlformats.org/drawingml/2006/main" xmlns:r="http://schemas.openxmlformats.org/officeDocument/2006/relationships" xmlns:p="http://schemas.openxmlformats.org/presentationml/2006/main">
   <p:cSld>
     <p:spTree>
       <p:nvGrpSpPr>
@@ -11180,7 +11731,7 @@
           </a:fontRef>
         </p:style>
         <p:txBody>
-          <a:bodyPr rtlCol="0" anchor="ctr" lIns="0" rIns="0" tIns="0" bIns="0"/>
+          <a:bodyPr lIns="0" tIns="0" rIns="0" bIns="0" rtlCol="0" anchor="ctr"/>
           <a:lstStyle/>
           <a:p>
             <a:pPr algn="ctr"/>
@@ -11193,6 +11744,12 @@
               </a:rPr>
               <a:t>06</a:t>
             </a:r>
+            <a:endParaRPr sz="1100" b="1">
+              <a:solidFill>
+                <a:srgbClr val="FFFFFF"/>
+              </a:solidFill>
+              <a:latin typeface="Geist Mono"/>
+            </a:endParaRPr>
           </a:p>
         </p:txBody>
       </p:sp>
@@ -11213,7 +11770,7 @@
           <a:noFill/>
         </p:spPr>
         <p:txBody>
-          <a:bodyPr wrap="square" lIns="0" rIns="0" tIns="0" bIns="0" anchor="t">
+          <a:bodyPr wrap="square" lIns="0" tIns="0" rIns="0" bIns="0" anchor="t">
             <a:spAutoFit/>
           </a:bodyPr>
           <a:lstStyle/>
@@ -11232,6 +11789,12 @@
               </a:rPr>
               <a:t>ROUTING</a:t>
             </a:r>
+            <a:endParaRPr sz="1100" b="1" spc="160">
+              <a:solidFill>
+                <a:srgbClr val="6B7280"/>
+              </a:solidFill>
+              <a:latin typeface="Geist Mono"/>
+            </a:endParaRPr>
           </a:p>
         </p:txBody>
       </p:sp>
@@ -11252,7 +11815,7 @@
           <a:noFill/>
         </p:spPr>
         <p:txBody>
-          <a:bodyPr wrap="square" lIns="0" rIns="0" tIns="0" bIns="0" anchor="t">
+          <a:bodyPr wrap="square" lIns="0" tIns="0" rIns="0" bIns="0" anchor="t">
             <a:spAutoFit/>
           </a:bodyPr>
           <a:lstStyle/>
@@ -11271,6 +11834,12 @@
               </a:rPr>
               <a:t>A real choice, not a single path.</a:t>
             </a:r>
+            <a:endParaRPr sz="3800" b="1">
+              <a:solidFill>
+                <a:srgbClr val="0A0A0A"/>
+              </a:solidFill>
+              <a:latin typeface="Geist"/>
+            </a:endParaRPr>
           </a:p>
         </p:txBody>
       </p:sp>
@@ -11291,7 +11860,7 @@
           <a:noFill/>
         </p:spPr>
         <p:txBody>
-          <a:bodyPr wrap="square" lIns="0" rIns="0" tIns="0" bIns="0" anchor="t">
+          <a:bodyPr wrap="square" lIns="0" tIns="0" rIns="0" bIns="0" anchor="t">
             <a:spAutoFit/>
           </a:bodyPr>
           <a:lstStyle/>
@@ -11310,6 +11879,12 @@
               </a:rPr>
               <a:t>Every payment is quoted across routes and scored on live gas, pool liquidity, and caller preference.</a:t>
             </a:r>
+            <a:endParaRPr sz="1600" b="0">
+              <a:solidFill>
+                <a:srgbClr val="6B7280"/>
+              </a:solidFill>
+              <a:latin typeface="Geist"/>
+            </a:endParaRPr>
           </a:p>
         </p:txBody>
       </p:sp>
@@ -11352,7 +11927,7 @@
           </a:fontRef>
         </p:style>
         <p:txBody>
-          <a:bodyPr rtlCol="0" anchor="ctr" wrap="square" lIns="146304" rIns="146304" tIns="73152" bIns="73152"/>
+          <a:bodyPr wrap="square" lIns="146304" tIns="73152" rIns="146304" bIns="73152" rtlCol="0" anchor="ctr"/>
           <a:lstStyle/>
           <a:p>
             <a:pPr algn="l">
@@ -11369,6 +11944,12 @@
               </a:rPr>
               <a:t>Route</a:t>
             </a:r>
+            <a:endParaRPr sz="1100" b="1" spc="100">
+              <a:solidFill>
+                <a:srgbClr val="FFFFFF"/>
+              </a:solidFill>
+              <a:latin typeface="Geist Mono"/>
+            </a:endParaRPr>
           </a:p>
         </p:txBody>
       </p:sp>
@@ -11411,7 +11992,7 @@
           </a:fontRef>
         </p:style>
         <p:txBody>
-          <a:bodyPr rtlCol="0" anchor="ctr" wrap="square" lIns="146304" rIns="146304" tIns="73152" bIns="73152"/>
+          <a:bodyPr wrap="square" lIns="146304" tIns="73152" rIns="146304" bIns="73152" rtlCol="0" anchor="ctr"/>
           <a:lstStyle/>
           <a:p>
             <a:pPr algn="l">
@@ -11428,6 +12009,12 @@
               </a:rPr>
               <a:t>Latency</a:t>
             </a:r>
+            <a:endParaRPr sz="1100" b="1" spc="100">
+              <a:solidFill>
+                <a:srgbClr val="FFFFFF"/>
+              </a:solidFill>
+              <a:latin typeface="Geist Mono"/>
+            </a:endParaRPr>
           </a:p>
         </p:txBody>
       </p:sp>
@@ -11470,7 +12057,7 @@
           </a:fontRef>
         </p:style>
         <p:txBody>
-          <a:bodyPr rtlCol="0" anchor="ctr" wrap="square" lIns="146304" rIns="146304" tIns="73152" bIns="73152"/>
+          <a:bodyPr wrap="square" lIns="146304" tIns="73152" rIns="146304" bIns="73152" rtlCol="0" anchor="ctr"/>
           <a:lstStyle/>
           <a:p>
             <a:pPr algn="l">
@@ -11487,6 +12074,12 @@
               </a:rPr>
               <a:t>Cost</a:t>
             </a:r>
+            <a:endParaRPr sz="1100" b="1" spc="100">
+              <a:solidFill>
+                <a:srgbClr val="FFFFFF"/>
+              </a:solidFill>
+              <a:latin typeface="Geist Mono"/>
+            </a:endParaRPr>
           </a:p>
         </p:txBody>
       </p:sp>
@@ -11529,7 +12122,7 @@
           </a:fontRef>
         </p:style>
         <p:txBody>
-          <a:bodyPr rtlCol="0" anchor="ctr" wrap="square" lIns="146304" rIns="146304" tIns="73152" bIns="73152"/>
+          <a:bodyPr wrap="square" lIns="146304" tIns="73152" rIns="146304" bIns="73152" rtlCol="0" anchor="ctr"/>
           <a:lstStyle/>
           <a:p>
             <a:pPr algn="l">
@@ -11546,6 +12139,12 @@
               </a:rPr>
               <a:t>Custody</a:t>
             </a:r>
+            <a:endParaRPr sz="1100" b="1" spc="100">
+              <a:solidFill>
+                <a:srgbClr val="FFFFFF"/>
+              </a:solidFill>
+              <a:latin typeface="Geist Mono"/>
+            </a:endParaRPr>
           </a:p>
         </p:txBody>
       </p:sp>
@@ -11588,7 +12187,7 @@
           </a:fontRef>
         </p:style>
         <p:txBody>
-          <a:bodyPr rtlCol="0" anchor="ctr" wrap="square" lIns="146304" rIns="146304" tIns="73152" bIns="73152"/>
+          <a:bodyPr wrap="square" lIns="146304" tIns="73152" rIns="146304" bIns="73152" rtlCol="0" anchor="ctr"/>
           <a:lstStyle/>
           <a:p>
             <a:pPr algn="l">
@@ -11605,6 +12204,12 @@
               </a:rPr>
               <a:t>Best for</a:t>
             </a:r>
+            <a:endParaRPr sz="1100" b="1" spc="100">
+              <a:solidFill>
+                <a:srgbClr val="FFFFFF"/>
+              </a:solidFill>
+              <a:latin typeface="Geist Mono"/>
+            </a:endParaRPr>
           </a:p>
         </p:txBody>
       </p:sp>
@@ -11647,7 +12252,7 @@
           </a:fontRef>
         </p:style>
         <p:txBody>
-          <a:bodyPr rtlCol="0" anchor="ctr" wrap="square" lIns="146304" rIns="146304" tIns="73152" bIns="73152"/>
+          <a:bodyPr wrap="square" lIns="146304" tIns="73152" rIns="146304" bIns="73152" rtlCol="0" anchor="ctr"/>
           <a:lstStyle/>
           <a:p>
             <a:pPr algn="l">
@@ -11664,6 +12269,12 @@
               </a:rPr>
               <a:t>Fast pool</a:t>
             </a:r>
+            <a:endParaRPr sz="1300" b="1">
+              <a:solidFill>
+                <a:srgbClr val="0A0A0A"/>
+              </a:solidFill>
+              <a:latin typeface="Geist"/>
+            </a:endParaRPr>
           </a:p>
         </p:txBody>
       </p:sp>
@@ -11706,7 +12317,7 @@
           </a:fontRef>
         </p:style>
         <p:txBody>
-          <a:bodyPr rtlCol="0" anchor="ctr" wrap="square" lIns="146304" rIns="146304" tIns="73152" bIns="73152"/>
+          <a:bodyPr wrap="square" lIns="146304" tIns="73152" rIns="146304" bIns="73152" rtlCol="0" anchor="ctr"/>
           <a:lstStyle/>
           <a:p>
             <a:pPr algn="l">
@@ -11723,6 +12334,12 @@
               </a:rPr>
               <a:t>~10s</a:t>
             </a:r>
+            <a:endParaRPr sz="1300" b="0">
+              <a:solidFill>
+                <a:srgbClr val="0A0A0A"/>
+              </a:solidFill>
+              <a:latin typeface="Geist Mono"/>
+            </a:endParaRPr>
           </a:p>
         </p:txBody>
       </p:sp>
@@ -11765,7 +12382,7 @@
           </a:fontRef>
         </p:style>
         <p:txBody>
-          <a:bodyPr rtlCol="0" anchor="ctr" wrap="square" lIns="146304" rIns="146304" tIns="73152" bIns="73152"/>
+          <a:bodyPr wrap="square" lIns="146304" tIns="73152" rIns="146304" bIns="73152" rtlCol="0" anchor="ctr"/>
           <a:lstStyle/>
           <a:p>
             <a:pPr algn="l">
@@ -11782,6 +12399,12 @@
               </a:rPr>
               <a:t>0.5%</a:t>
             </a:r>
+            <a:endParaRPr sz="1300" b="0">
+              <a:solidFill>
+                <a:srgbClr val="0A0A0A"/>
+              </a:solidFill>
+              <a:latin typeface="Geist Mono"/>
+            </a:endParaRPr>
           </a:p>
         </p:txBody>
       </p:sp>
@@ -11870,7 +12493,7 @@
           </a:fontRef>
         </p:style>
         <p:txBody>
-          <a:bodyPr rtlCol="0" anchor="ctr" wrap="square" lIns="0" rIns="0" tIns="73152" bIns="73152"/>
+          <a:bodyPr wrap="square" lIns="0" tIns="73152" rIns="0" bIns="73152" rtlCol="0" anchor="ctr"/>
           <a:lstStyle/>
           <a:p>
             <a:pPr algn="ctr">
@@ -11887,6 +12510,12 @@
               </a:rPr>
               <a:t>Custodial</a:t>
             </a:r>
+            <a:endParaRPr sz="1000" b="1">
+              <a:solidFill>
+                <a:srgbClr val="FFFFFF"/>
+              </a:solidFill>
+              <a:latin typeface="Geist Mono"/>
+            </a:endParaRPr>
           </a:p>
         </p:txBody>
       </p:sp>
@@ -11929,7 +12558,7 @@
           </a:fontRef>
         </p:style>
         <p:txBody>
-          <a:bodyPr rtlCol="0" anchor="ctr" wrap="square" lIns="146304" rIns="146304" tIns="73152" bIns="73152"/>
+          <a:bodyPr wrap="square" lIns="146304" tIns="73152" rIns="146304" bIns="73152" rtlCol="0" anchor="ctr"/>
           <a:lstStyle/>
           <a:p>
             <a:pPr algn="l">
@@ -11946,6 +12575,12 @@
               </a:rPr>
               <a:t>Small, latency-sensitive payments</a:t>
             </a:r>
+            <a:endParaRPr sz="1300" b="0">
+              <a:solidFill>
+                <a:srgbClr val="0A0A0A"/>
+              </a:solidFill>
+              <a:latin typeface="Geist"/>
+            </a:endParaRPr>
           </a:p>
         </p:txBody>
       </p:sp>
@@ -11988,7 +12623,7 @@
           </a:fontRef>
         </p:style>
         <p:txBody>
-          <a:bodyPr rtlCol="0" anchor="ctr" wrap="square" lIns="146304" rIns="146304" tIns="73152" bIns="73152"/>
+          <a:bodyPr wrap="square" lIns="146304" tIns="73152" rIns="146304" bIns="73152" rtlCol="0" anchor="ctr"/>
           <a:lstStyle/>
           <a:p>
             <a:pPr algn="l">
@@ -12005,6 +12640,12 @@
               </a:rPr>
               <a:t>CCTP</a:t>
             </a:r>
+            <a:endParaRPr sz="1300" b="1">
+              <a:solidFill>
+                <a:srgbClr val="0A0A0A"/>
+              </a:solidFill>
+              <a:latin typeface="Geist"/>
+            </a:endParaRPr>
           </a:p>
         </p:txBody>
       </p:sp>
@@ -12047,7 +12688,7 @@
           </a:fontRef>
         </p:style>
         <p:txBody>
-          <a:bodyPr rtlCol="0" anchor="ctr" wrap="square" lIns="146304" rIns="146304" tIns="73152" bIns="73152"/>
+          <a:bodyPr wrap="square" lIns="146304" tIns="73152" rIns="146304" bIns="73152" rtlCol="0" anchor="ctr"/>
           <a:lstStyle/>
           <a:p>
             <a:pPr algn="l">
@@ -12064,6 +12705,12 @@
               </a:rPr>
               <a:t>~15m</a:t>
             </a:r>
+            <a:endParaRPr sz="1300" b="0">
+              <a:solidFill>
+                <a:srgbClr val="0A0A0A"/>
+              </a:solidFill>
+              <a:latin typeface="Geist Mono"/>
+            </a:endParaRPr>
           </a:p>
         </p:txBody>
       </p:sp>
@@ -12106,7 +12753,7 @@
           </a:fontRef>
         </p:style>
         <p:txBody>
-          <a:bodyPr rtlCol="0" anchor="ctr" wrap="square" lIns="146304" rIns="146304" tIns="73152" bIns="73152"/>
+          <a:bodyPr wrap="square" lIns="146304" tIns="73152" rIns="146304" bIns="73152" rtlCol="0" anchor="ctr"/>
           <a:lstStyle/>
           <a:p>
             <a:pPr algn="l">
@@ -12123,6 +12770,12 @@
               </a:rPr>
               <a:t>gas only</a:t>
             </a:r>
+            <a:endParaRPr sz="1300" b="0">
+              <a:solidFill>
+                <a:srgbClr val="0A0A0A"/>
+              </a:solidFill>
+              <a:latin typeface="Geist Mono"/>
+            </a:endParaRPr>
           </a:p>
         </p:txBody>
       </p:sp>
@@ -12211,7 +12864,7 @@
           </a:fontRef>
         </p:style>
         <p:txBody>
-          <a:bodyPr rtlCol="0" anchor="ctr" wrap="square" lIns="0" rIns="0" tIns="73152" bIns="73152"/>
+          <a:bodyPr wrap="square" lIns="0" tIns="73152" rIns="0" bIns="73152" rtlCol="0" anchor="ctr"/>
           <a:lstStyle/>
           <a:p>
             <a:pPr algn="ctr">
@@ -12228,6 +12881,12 @@
               </a:rPr>
               <a:t>Trust-minimized</a:t>
             </a:r>
+            <a:endParaRPr sz="1000" b="1">
+              <a:solidFill>
+                <a:srgbClr val="F4623A"/>
+              </a:solidFill>
+              <a:latin typeface="Geist Mono"/>
+            </a:endParaRPr>
           </a:p>
         </p:txBody>
       </p:sp>
@@ -12270,7 +12929,7 @@
           </a:fontRef>
         </p:style>
         <p:txBody>
-          <a:bodyPr rtlCol="0" anchor="ctr" wrap="square" lIns="146304" rIns="146304" tIns="73152" bIns="73152"/>
+          <a:bodyPr wrap="square" lIns="146304" tIns="73152" rIns="146304" bIns="73152" rtlCol="0" anchor="ctr"/>
           <a:lstStyle/>
           <a:p>
             <a:pPr algn="l">
@@ -12287,6 +12946,12 @@
               </a:rPr>
               <a:t>Large transfers, canonical guarantees</a:t>
             </a:r>
+            <a:endParaRPr sz="1300" b="0">
+              <a:solidFill>
+                <a:srgbClr val="0A0A0A"/>
+              </a:solidFill>
+              <a:latin typeface="Geist"/>
+            </a:endParaRPr>
           </a:p>
         </p:txBody>
       </p:sp>
@@ -12307,7 +12972,7 @@
           <a:noFill/>
         </p:spPr>
         <p:txBody>
-          <a:bodyPr wrap="square" lIns="0" rIns="0" tIns="0" bIns="0" anchor="t">
+          <a:bodyPr wrap="square" lIns="0" tIns="0" rIns="0" bIns="0" anchor="t">
             <a:spAutoFit/>
           </a:bodyPr>
           <a:lstStyle/>
@@ -12326,6 +12991,12 @@
               </a:rPr>
               <a:t>Callers override with preference: "fast" | "cheap" | "trustless". Custody risk scales with amount; latency tolerance doesn't.</a:t>
             </a:r>
+            <a:endParaRPr sz="1300" b="0">
+              <a:solidFill>
+                <a:srgbClr val="6B7280"/>
+              </a:solidFill>
+              <a:latin typeface="Geist"/>
+            </a:endParaRPr>
           </a:p>
         </p:txBody>
       </p:sp>
@@ -12338,7 +13009,7 @@
 </file>
 
 <file path=ppt/slides/slide7.xml><?xml version="1.0" encoding="utf-8"?>
-<p:sld xmlns:a="http://schemas.openxmlformats.org/drawingml/2006/main" xmlns:p="http://schemas.openxmlformats.org/presentationml/2006/main" xmlns:r="http://schemas.openxmlformats.org/officeDocument/2006/relationships">
+<p:sld xmlns:a="http://schemas.openxmlformats.org/drawingml/2006/main" xmlns:r="http://schemas.openxmlformats.org/officeDocument/2006/relationships" xmlns:p="http://schemas.openxmlformats.org/presentationml/2006/main">
   <p:cSld>
     <p:spTree>
       <p:nvGrpSpPr>
@@ -12430,7 +13101,7 @@
           </a:fontRef>
         </p:style>
         <p:txBody>
-          <a:bodyPr rtlCol="0" anchor="ctr" lIns="0" rIns="0" tIns="0" bIns="0"/>
+          <a:bodyPr lIns="0" tIns="0" rIns="0" bIns="0" rtlCol="0" anchor="ctr"/>
           <a:lstStyle/>
           <a:p>
             <a:pPr algn="ctr"/>
@@ -12443,6 +13114,12 @@
               </a:rPr>
               <a:t>07</a:t>
             </a:r>
+            <a:endParaRPr sz="1100" b="1">
+              <a:solidFill>
+                <a:srgbClr val="FFFFFF"/>
+              </a:solidFill>
+              <a:latin typeface="Geist Mono"/>
+            </a:endParaRPr>
           </a:p>
         </p:txBody>
       </p:sp>
@@ -12463,7 +13140,7 @@
           <a:noFill/>
         </p:spPr>
         <p:txBody>
-          <a:bodyPr wrap="square" lIns="0" rIns="0" tIns="0" bIns="0" anchor="t">
+          <a:bodyPr wrap="square" lIns="0" tIns="0" rIns="0" bIns="0" anchor="t">
             <a:spAutoFit/>
           </a:bodyPr>
           <a:lstStyle/>
@@ -12482,6 +13159,12 @@
               </a:rPr>
               <a:t>THE AI LAYER</a:t>
             </a:r>
+            <a:endParaRPr sz="1100" b="1" spc="160">
+              <a:solidFill>
+                <a:srgbClr val="6B7280"/>
+              </a:solidFill>
+              <a:latin typeface="Geist Mono"/>
+            </a:endParaRPr>
           </a:p>
         </p:txBody>
       </p:sp>
@@ -12502,7 +13185,7 @@
           <a:noFill/>
         </p:spPr>
         <p:txBody>
-          <a:bodyPr wrap="square" lIns="0" rIns="0" tIns="0" bIns="0" anchor="t">
+          <a:bodyPr wrap="square" lIns="0" tIns="0" rIns="0" bIns="0" anchor="t">
             <a:spAutoFit/>
           </a:bodyPr>
           <a:lstStyle/>
@@ -12521,6 +13204,12 @@
               </a:rPr>
               <a:t>Models explain. They never decide.</a:t>
             </a:r>
+            <a:endParaRPr sz="3800" b="1">
+              <a:solidFill>
+                <a:srgbClr val="0A0A0A"/>
+              </a:solidFill>
+              <a:latin typeface="Geist"/>
+            </a:endParaRPr>
           </a:p>
         </p:txBody>
       </p:sp>
@@ -12541,7 +13230,7 @@
           <a:noFill/>
         </p:spPr>
         <p:txBody>
-          <a:bodyPr wrap="square" lIns="0" rIns="0" tIns="0" bIns="0" anchor="t">
+          <a:bodyPr wrap="square" lIns="0" tIns="0" rIns="0" bIns="0" anchor="t">
             <a:spAutoFit/>
           </a:bodyPr>
           <a:lstStyle/>
@@ -12560,6 +13249,12 @@
               </a:rPr>
               <a:t>The boundary is enforced in code, and it's why the system is auditable.</a:t>
             </a:r>
+            <a:endParaRPr sz="1600" b="0">
+              <a:solidFill>
+                <a:srgbClr val="6B7280"/>
+              </a:solidFill>
+              <a:latin typeface="Geist"/>
+            </a:endParaRPr>
           </a:p>
         </p:txBody>
       </p:sp>
@@ -12648,7 +13343,7 @@
           </a:fontRef>
         </p:style>
         <p:txBody>
-          <a:bodyPr rtlCol="0" anchor="ctr" wrap="square" lIns="146304" rIns="146304" tIns="73152" bIns="73152"/>
+          <a:bodyPr wrap="square" lIns="146304" tIns="73152" rIns="146304" bIns="73152" rtlCol="0" anchor="ctr"/>
           <a:lstStyle/>
           <a:p>
             <a:pPr algn="l">
@@ -12665,6 +13360,12 @@
               </a:rPr>
               <a:t>LLM permitted</a:t>
             </a:r>
+            <a:endParaRPr sz="1100" b="1" spc="120">
+              <a:solidFill>
+                <a:srgbClr val="0A0A0A"/>
+              </a:solidFill>
+              <a:latin typeface="Geist Mono"/>
+            </a:endParaRPr>
           </a:p>
         </p:txBody>
       </p:sp>
@@ -12707,7 +13408,7 @@
           </a:fontRef>
         </p:style>
         <p:txBody>
-          <a:bodyPr rtlCol="0" anchor="ctr" wrap="square" lIns="146304" rIns="146304" tIns="73152" bIns="73152"/>
+          <a:bodyPr wrap="square" lIns="146304" tIns="73152" rIns="146304" bIns="73152" rtlCol="0" anchor="ctr"/>
           <a:lstStyle/>
           <a:p>
             <a:pPr algn="l">
@@ -12724,6 +13425,12 @@
               </a:rPr>
               <a:t>Parse natural-language intent</a:t>
             </a:r>
+            <a:endParaRPr sz="1200" b="0">
+              <a:solidFill>
+                <a:srgbClr val="0A0A0A"/>
+              </a:solidFill>
+              <a:latin typeface="Geist"/>
+            </a:endParaRPr>
           </a:p>
         </p:txBody>
       </p:sp>
@@ -12766,7 +13473,7 @@
           </a:fontRef>
         </p:style>
         <p:txBody>
-          <a:bodyPr rtlCol="0" anchor="ctr" wrap="square" lIns="146304" rIns="146304" tIns="73152" bIns="73152"/>
+          <a:bodyPr wrap="square" lIns="146304" tIns="73152" rIns="146304" bIns="73152" rtlCol="0" anchor="ctr"/>
           <a:lstStyle/>
           <a:p>
             <a:pPr algn="l">
@@ -12783,6 +13490,12 @@
               </a:rPr>
               <a:t>Explain a completed decision</a:t>
             </a:r>
+            <a:endParaRPr sz="1200" b="0">
+              <a:solidFill>
+                <a:srgbClr val="0A0A0A"/>
+              </a:solidFill>
+              <a:latin typeface="Geist"/>
+            </a:endParaRPr>
           </a:p>
         </p:txBody>
       </p:sp>
@@ -12825,7 +13538,7 @@
           </a:fontRef>
         </p:style>
         <p:txBody>
-          <a:bodyPr rtlCol="0" anchor="ctr" wrap="square" lIns="146304" rIns="146304" tIns="73152" bIns="73152"/>
+          <a:bodyPr wrap="square" lIns="146304" tIns="73152" rIns="146304" bIns="73152" rtlCol="0" anchor="ctr"/>
           <a:lstStyle/>
           <a:p>
             <a:pPr algn="l">
@@ -12842,6 +13555,12 @@
               </a:rPr>
               <a:t>Deterministic</a:t>
             </a:r>
+            <a:endParaRPr sz="1100" b="1" spc="120">
+              <a:solidFill>
+                <a:srgbClr val="FFFFFF"/>
+              </a:solidFill>
+              <a:latin typeface="Geist Mono"/>
+            </a:endParaRPr>
           </a:p>
         </p:txBody>
       </p:sp>
@@ -12884,7 +13603,7 @@
           </a:fontRef>
         </p:style>
         <p:txBody>
-          <a:bodyPr rtlCol="0" anchor="ctr" wrap="square" lIns="146304" rIns="146304" tIns="73152" bIns="73152"/>
+          <a:bodyPr wrap="square" lIns="146304" tIns="73152" rIns="146304" bIns="73152" rtlCol="0" anchor="ctr"/>
           <a:lstStyle/>
           <a:p>
             <a:pPr algn="l">
@@ -12901,6 +13620,12 @@
               </a:rPr>
               <a:t>Validate the request</a:t>
             </a:r>
+            <a:endParaRPr sz="1200" b="0">
+              <a:solidFill>
+                <a:srgbClr val="0A0A0A"/>
+              </a:solidFill>
+              <a:latin typeface="Geist"/>
+            </a:endParaRPr>
           </a:p>
         </p:txBody>
       </p:sp>
@@ -12943,7 +13668,7 @@
           </a:fontRef>
         </p:style>
         <p:txBody>
-          <a:bodyPr rtlCol="0" anchor="ctr" wrap="square" lIns="146304" rIns="146304" tIns="73152" bIns="73152"/>
+          <a:bodyPr wrap="square" lIns="146304" tIns="73152" rIns="146304" bIns="73152" rtlCol="0" anchor="ctr"/>
           <a:lstStyle/>
           <a:p>
             <a:pPr algn="l">
@@ -12960,6 +13685,12 @@
               </a:rPr>
               <a:t>Select the route</a:t>
             </a:r>
+            <a:endParaRPr sz="1200" b="0">
+              <a:solidFill>
+                <a:srgbClr val="0A0A0A"/>
+              </a:solidFill>
+              <a:latin typeface="Geist"/>
+            </a:endParaRPr>
           </a:p>
         </p:txBody>
       </p:sp>
@@ -13002,7 +13733,7 @@
           </a:fontRef>
         </p:style>
         <p:txBody>
-          <a:bodyPr rtlCol="0" anchor="ctr" wrap="square" lIns="146304" rIns="146304" tIns="73152" bIns="73152"/>
+          <a:bodyPr wrap="square" lIns="146304" tIns="73152" rIns="146304" bIns="73152" rtlCol="0" anchor="ctr"/>
           <a:lstStyle/>
           <a:p>
             <a:pPr algn="l">
@@ -13019,6 +13750,12 @@
               </a:rPr>
               <a:t>Compute the fee</a:t>
             </a:r>
+            <a:endParaRPr sz="1200" b="0">
+              <a:solidFill>
+                <a:srgbClr val="0A0A0A"/>
+              </a:solidFill>
+              <a:latin typeface="Geist"/>
+            </a:endParaRPr>
           </a:p>
         </p:txBody>
       </p:sp>
@@ -13105,7 +13842,7 @@
           </a:fontRef>
         </p:style>
         <p:txBody>
-          <a:bodyPr rtlCol="0" anchor="ctr" wrap="square" lIns="146304" rIns="146304" tIns="73152" bIns="73152"/>
+          <a:bodyPr wrap="square" lIns="146304" tIns="73152" rIns="146304" bIns="73152" rtlCol="0" anchor="ctr"/>
           <a:lstStyle/>
           <a:p>
             <a:pPr algn="l">
@@ -13122,6 +13859,12 @@
               </a:rPr>
               <a:t>LLM forbidden</a:t>
             </a:r>
+            <a:endParaRPr sz="1100" b="1" spc="120">
+              <a:solidFill>
+                <a:srgbClr val="FFFFFF"/>
+              </a:solidFill>
+              <a:latin typeface="Geist Mono"/>
+            </a:endParaRPr>
           </a:p>
         </p:txBody>
       </p:sp>
@@ -13164,7 +13907,7 @@
           </a:fontRef>
         </p:style>
         <p:txBody>
-          <a:bodyPr rtlCol="0" anchor="ctr" wrap="square" lIns="146304" rIns="146304" tIns="73152" bIns="73152"/>
+          <a:bodyPr wrap="square" lIns="146304" tIns="73152" rIns="146304" bIns="73152" rtlCol="0" anchor="ctr"/>
           <a:lstStyle/>
           <a:p>
             <a:pPr algn="l">
@@ -13181,6 +13924,12 @@
               </a:rPr>
               <a:t>Choosing where money goes</a:t>
             </a:r>
+            <a:endParaRPr sz="1200" b="0">
+              <a:solidFill>
+                <a:srgbClr val="0A0A0A"/>
+              </a:solidFill>
+              <a:latin typeface="Geist"/>
+            </a:endParaRPr>
           </a:p>
         </p:txBody>
       </p:sp>
@@ -13223,7 +13972,7 @@
           </a:fontRef>
         </p:style>
         <p:txBody>
-          <a:bodyPr rtlCol="0" anchor="ctr" wrap="square" lIns="146304" rIns="146304" tIns="73152" bIns="73152"/>
+          <a:bodyPr wrap="square" lIns="146304" tIns="73152" rIns="146304" bIns="73152" rtlCol="0" anchor="ctr"/>
           <a:lstStyle/>
           <a:p>
             <a:pPr algn="l">
@@ -13240,6 +13989,12 @@
               </a:rPr>
               <a:t>Authorizing a release</a:t>
             </a:r>
+            <a:endParaRPr sz="1200" b="0">
+              <a:solidFill>
+                <a:srgbClr val="0A0A0A"/>
+              </a:solidFill>
+              <a:latin typeface="Geist"/>
+            </a:endParaRPr>
           </a:p>
         </p:txBody>
       </p:sp>
@@ -13370,7 +14125,7 @@
           </a:fontRef>
         </p:style>
         <p:txBody>
-          <a:bodyPr rtlCol="0" anchor="ctr" wrap="square" lIns="256032" rIns="256032" tIns="73152" bIns="73152"/>
+          <a:bodyPr wrap="square" lIns="256032" tIns="73152" rIns="256032" bIns="73152" rtlCol="0" anchor="ctr"/>
           <a:lstStyle/>
           <a:p>
             <a:pPr algn="l">
@@ -13387,6 +14142,12 @@
               </a:rPr>
               <a:t>Every number in a generated explanation is validated against the decision object. Mismatch falls back to a template — a model never states a fee the system didn't compute.</a:t>
             </a:r>
+            <a:endParaRPr sz="1350" b="1">
+              <a:solidFill>
+                <a:srgbClr val="0A0A0A"/>
+              </a:solidFill>
+              <a:latin typeface="Geist"/>
+            </a:endParaRPr>
           </a:p>
         </p:txBody>
       </p:sp>
@@ -13399,7 +14160,7 @@
 </file>
 
 <file path=ppt/slides/slide8.xml><?xml version="1.0" encoding="utf-8"?>
-<p:sld xmlns:a="http://schemas.openxmlformats.org/drawingml/2006/main" xmlns:p="http://schemas.openxmlformats.org/presentationml/2006/main" xmlns:r="http://schemas.openxmlformats.org/officeDocument/2006/relationships">
+<p:sld xmlns:a="http://schemas.openxmlformats.org/drawingml/2006/main" xmlns:r="http://schemas.openxmlformats.org/officeDocument/2006/relationships" xmlns:p="http://schemas.openxmlformats.org/presentationml/2006/main">
   <p:cSld>
     <p:spTree>
       <p:nvGrpSpPr>
@@ -13491,7 +14252,7 @@
           </a:fontRef>
         </p:style>
         <p:txBody>
-          <a:bodyPr rtlCol="0" anchor="ctr" lIns="0" rIns="0" tIns="0" bIns="0"/>
+          <a:bodyPr lIns="0" tIns="0" rIns="0" bIns="0" rtlCol="0" anchor="ctr"/>
           <a:lstStyle/>
           <a:p>
             <a:pPr algn="ctr"/>
@@ -13504,6 +14265,12 @@
               </a:rPr>
               <a:t>08</a:t>
             </a:r>
+            <a:endParaRPr sz="1100" b="1">
+              <a:solidFill>
+                <a:srgbClr val="FFFFFF"/>
+              </a:solidFill>
+              <a:latin typeface="Geist Mono"/>
+            </a:endParaRPr>
           </a:p>
         </p:txBody>
       </p:sp>
@@ -13524,7 +14291,7 @@
           <a:noFill/>
         </p:spPr>
         <p:txBody>
-          <a:bodyPr wrap="square" lIns="0" rIns="0" tIns="0" bIns="0" anchor="t">
+          <a:bodyPr wrap="square" lIns="0" tIns="0" rIns="0" bIns="0" anchor="t">
             <a:spAutoFit/>
           </a:bodyPr>
           <a:lstStyle/>
@@ -13543,6 +14310,12 @@
               </a:rPr>
               <a:t>COVERAGE</a:t>
             </a:r>
+            <a:endParaRPr sz="1100" b="1" spc="160">
+              <a:solidFill>
+                <a:srgbClr val="6B7280"/>
+              </a:solidFill>
+              <a:latin typeface="Geist Mono"/>
+            </a:endParaRPr>
           </a:p>
         </p:txBody>
       </p:sp>
@@ -13563,7 +14336,7 @@
           <a:noFill/>
         </p:spPr>
         <p:txBody>
-          <a:bodyPr wrap="square" lIns="0" rIns="0" tIns="0" bIns="0" anchor="t">
+          <a:bodyPr wrap="square" lIns="0" tIns="0" rIns="0" bIns="0" anchor="t">
             <a:spAutoFit/>
           </a:bodyPr>
           <a:lstStyle/>
@@ -13582,6 +14355,12 @@
               </a:rPr>
               <a:t>Every chain is both a source and a destination.</a:t>
             </a:r>
+            <a:endParaRPr sz="3400" b="1">
+              <a:solidFill>
+                <a:srgbClr val="0A0A0A"/>
+              </a:solidFill>
+              <a:latin typeface="Geist"/>
+            </a:endParaRPr>
           </a:p>
         </p:txBody>
       </p:sp>
@@ -13692,7 +14471,7 @@
           <a:noFill/>
         </p:spPr>
         <p:txBody>
-          <a:bodyPr wrap="square" lIns="0" rIns="0" tIns="0" bIns="0" anchor="t">
+          <a:bodyPr wrap="square" lIns="0" tIns="0" rIns="0" bIns="0" anchor="t">
             <a:spAutoFit/>
           </a:bodyPr>
           <a:lstStyle/>
@@ -13711,6 +14490,12 @@
               </a:rPr>
               <a:t>Base</a:t>
             </a:r>
+            <a:endParaRPr sz="1800" b="1">
+              <a:solidFill>
+                <a:srgbClr val="0A0A0A"/>
+              </a:solidFill>
+              <a:latin typeface="Geist"/>
+            </a:endParaRPr>
           </a:p>
         </p:txBody>
       </p:sp>
@@ -13731,7 +14516,7 @@
           <a:noFill/>
         </p:spPr>
         <p:txBody>
-          <a:bodyPr wrap="square" lIns="0" rIns="0" tIns="0" bIns="0" anchor="t">
+          <a:bodyPr wrap="square" lIns="0" tIns="0" rIns="0" bIns="0" anchor="t">
             <a:spAutoFit/>
           </a:bodyPr>
           <a:lstStyle/>
@@ -13750,6 +14535,12 @@
               </a:rPr>
               <a:t>Sepolia · 84532</a:t>
             </a:r>
+            <a:endParaRPr sz="1100" b="0">
+              <a:solidFill>
+                <a:srgbClr val="6B7280"/>
+              </a:solidFill>
+              <a:latin typeface="Geist Mono"/>
+            </a:endParaRPr>
           </a:p>
         </p:txBody>
       </p:sp>
@@ -13770,7 +14561,7 @@
           <a:noFill/>
         </p:spPr>
         <p:txBody>
-          <a:bodyPr wrap="square" lIns="0" rIns="0" tIns="0" bIns="0" anchor="t">
+          <a:bodyPr wrap="square" lIns="0" tIns="0" rIns="0" bIns="0" anchor="t">
             <a:spAutoFit/>
           </a:bodyPr>
           <a:lstStyle/>
@@ -13789,6 +14580,12 @@
               </a:rPr>
               <a:t>Fast pool · CCTP</a:t>
             </a:r>
+            <a:endParaRPr sz="1100" b="1" spc="60">
+              <a:solidFill>
+                <a:srgbClr val="0A0A0A"/>
+              </a:solidFill>
+              <a:latin typeface="Geist Mono"/>
+            </a:endParaRPr>
           </a:p>
         </p:txBody>
       </p:sp>
@@ -13899,7 +14696,7 @@
           <a:noFill/>
         </p:spPr>
         <p:txBody>
-          <a:bodyPr wrap="square" lIns="0" rIns="0" tIns="0" bIns="0" anchor="t">
+          <a:bodyPr wrap="square" lIns="0" tIns="0" rIns="0" bIns="0" anchor="t">
             <a:spAutoFit/>
           </a:bodyPr>
           <a:lstStyle/>
@@ -13918,6 +14715,12 @@
               </a:rPr>
               <a:t>Arbitrum</a:t>
             </a:r>
+            <a:endParaRPr sz="1800" b="1">
+              <a:solidFill>
+                <a:srgbClr val="0A0A0A"/>
+              </a:solidFill>
+              <a:latin typeface="Geist"/>
+            </a:endParaRPr>
           </a:p>
         </p:txBody>
       </p:sp>
@@ -13938,7 +14741,7 @@
           <a:noFill/>
         </p:spPr>
         <p:txBody>
-          <a:bodyPr wrap="square" lIns="0" rIns="0" tIns="0" bIns="0" anchor="t">
+          <a:bodyPr wrap="square" lIns="0" tIns="0" rIns="0" bIns="0" anchor="t">
             <a:spAutoFit/>
           </a:bodyPr>
           <a:lstStyle/>
@@ -13957,6 +14760,12 @@
               </a:rPr>
               <a:t>Sepolia · 421614</a:t>
             </a:r>
+            <a:endParaRPr sz="1100" b="0">
+              <a:solidFill>
+                <a:srgbClr val="6B7280"/>
+              </a:solidFill>
+              <a:latin typeface="Geist Mono"/>
+            </a:endParaRPr>
           </a:p>
         </p:txBody>
       </p:sp>
@@ -13977,7 +14786,7 @@
           <a:noFill/>
         </p:spPr>
         <p:txBody>
-          <a:bodyPr wrap="square" lIns="0" rIns="0" tIns="0" bIns="0" anchor="t">
+          <a:bodyPr wrap="square" lIns="0" tIns="0" rIns="0" bIns="0" anchor="t">
             <a:spAutoFit/>
           </a:bodyPr>
           <a:lstStyle/>
@@ -13996,6 +14805,12 @@
               </a:rPr>
               <a:t>Fast pool · CCTP</a:t>
             </a:r>
+            <a:endParaRPr sz="1100" b="1" spc="60">
+              <a:solidFill>
+                <a:srgbClr val="0A0A0A"/>
+              </a:solidFill>
+              <a:latin typeface="Geist Mono"/>
+            </a:endParaRPr>
           </a:p>
         </p:txBody>
       </p:sp>
@@ -14106,7 +14921,7 @@
           <a:noFill/>
         </p:spPr>
         <p:txBody>
-          <a:bodyPr wrap="square" lIns="0" rIns="0" tIns="0" bIns="0" anchor="t">
+          <a:bodyPr wrap="square" lIns="0" tIns="0" rIns="0" bIns="0" anchor="t">
             <a:spAutoFit/>
           </a:bodyPr>
           <a:lstStyle/>
@@ -14125,6 +14940,12 @@
               </a:rPr>
               <a:t>Optimism</a:t>
             </a:r>
+            <a:endParaRPr sz="1800" b="1">
+              <a:solidFill>
+                <a:srgbClr val="0A0A0A"/>
+              </a:solidFill>
+              <a:latin typeface="Geist"/>
+            </a:endParaRPr>
           </a:p>
         </p:txBody>
       </p:sp>
@@ -14145,7 +14966,7 @@
           <a:noFill/>
         </p:spPr>
         <p:txBody>
-          <a:bodyPr wrap="square" lIns="0" rIns="0" tIns="0" bIns="0" anchor="t">
+          <a:bodyPr wrap="square" lIns="0" tIns="0" rIns="0" bIns="0" anchor="t">
             <a:spAutoFit/>
           </a:bodyPr>
           <a:lstStyle/>
@@ -14164,6 +14985,12 @@
               </a:rPr>
               <a:t>Sepolia · 11155420</a:t>
             </a:r>
+            <a:endParaRPr sz="1100" b="0">
+              <a:solidFill>
+                <a:srgbClr val="6B7280"/>
+              </a:solidFill>
+              <a:latin typeface="Geist Mono"/>
+            </a:endParaRPr>
           </a:p>
         </p:txBody>
       </p:sp>
@@ -14184,7 +15011,7 @@
           <a:noFill/>
         </p:spPr>
         <p:txBody>
-          <a:bodyPr wrap="square" lIns="0" rIns="0" tIns="0" bIns="0" anchor="t">
+          <a:bodyPr wrap="square" lIns="0" tIns="0" rIns="0" bIns="0" anchor="t">
             <a:spAutoFit/>
           </a:bodyPr>
           <a:lstStyle/>
@@ -14203,6 +15030,12 @@
               </a:rPr>
               <a:t>Fast pool · CCTP</a:t>
             </a:r>
+            <a:endParaRPr sz="1100" b="1" spc="60">
+              <a:solidFill>
+                <a:srgbClr val="0A0A0A"/>
+              </a:solidFill>
+              <a:latin typeface="Geist Mono"/>
+            </a:endParaRPr>
           </a:p>
         </p:txBody>
       </p:sp>
@@ -14313,7 +15146,7 @@
           <a:noFill/>
         </p:spPr>
         <p:txBody>
-          <a:bodyPr wrap="square" lIns="0" rIns="0" tIns="0" bIns="0" anchor="t">
+          <a:bodyPr wrap="square" lIns="0" tIns="0" rIns="0" bIns="0" anchor="t">
             <a:spAutoFit/>
           </a:bodyPr>
           <a:lstStyle/>
@@ -14332,6 +15165,12 @@
               </a:rPr>
               <a:t>Arc</a:t>
             </a:r>
+            <a:endParaRPr sz="1800" b="1">
+              <a:solidFill>
+                <a:srgbClr val="0A0A0A"/>
+              </a:solidFill>
+              <a:latin typeface="Geist"/>
+            </a:endParaRPr>
           </a:p>
         </p:txBody>
       </p:sp>
@@ -14352,7 +15191,7 @@
           <a:noFill/>
         </p:spPr>
         <p:txBody>
-          <a:bodyPr wrap="square" lIns="0" rIns="0" tIns="0" bIns="0" anchor="t">
+          <a:bodyPr wrap="square" lIns="0" tIns="0" rIns="0" bIns="0" anchor="t">
             <a:spAutoFit/>
           </a:bodyPr>
           <a:lstStyle/>
@@ -14371,6 +15210,12 @@
               </a:rPr>
               <a:t>Circle's L1 · native USDC</a:t>
             </a:r>
+            <a:endParaRPr sz="1100" b="0">
+              <a:solidFill>
+                <a:srgbClr val="6B7280"/>
+              </a:solidFill>
+              <a:latin typeface="Geist Mono"/>
+            </a:endParaRPr>
           </a:p>
         </p:txBody>
       </p:sp>
@@ -14391,7 +15236,7 @@
           <a:noFill/>
         </p:spPr>
         <p:txBody>
-          <a:bodyPr wrap="square" lIns="0" rIns="0" tIns="0" bIns="0" anchor="t">
+          <a:bodyPr wrap="square" lIns="0" tIns="0" rIns="0" bIns="0" anchor="t">
             <a:spAutoFit/>
           </a:bodyPr>
           <a:lstStyle/>
@@ -14410,6 +15255,12 @@
               </a:rPr>
               <a:t>Fast pool · CCTP</a:t>
             </a:r>
+            <a:endParaRPr sz="1100" b="1" spc="60">
+              <a:solidFill>
+                <a:srgbClr val="0A0A0A"/>
+              </a:solidFill>
+              <a:latin typeface="Geist Mono"/>
+            </a:endParaRPr>
           </a:p>
         </p:txBody>
       </p:sp>
@@ -14520,7 +15371,7 @@
           <a:noFill/>
         </p:spPr>
         <p:txBody>
-          <a:bodyPr wrap="square" lIns="0" rIns="0" tIns="0" bIns="0" anchor="t">
+          <a:bodyPr wrap="square" lIns="0" tIns="0" rIns="0" bIns="0" anchor="t">
             <a:spAutoFit/>
           </a:bodyPr>
           <a:lstStyle/>
@@ -14539,6 +15390,12 @@
               </a:rPr>
               <a:t>Hedera</a:t>
             </a:r>
+            <a:endParaRPr sz="1800" b="1">
+              <a:solidFill>
+                <a:srgbClr val="0A0A0A"/>
+              </a:solidFill>
+              <a:latin typeface="Geist"/>
+            </a:endParaRPr>
           </a:p>
         </p:txBody>
       </p:sp>
@@ -14559,7 +15416,7 @@
           <a:noFill/>
         </p:spPr>
         <p:txBody>
-          <a:bodyPr wrap="square" lIns="0" rIns="0" tIns="0" bIns="0" anchor="t">
+          <a:bodyPr wrap="square" lIns="0" tIns="0" rIns="0" bIns="0" anchor="t">
             <a:spAutoFit/>
           </a:bodyPr>
           <a:lstStyle/>
@@ -14578,6 +15435,12 @@
               </a:rPr>
               <a:t>Testnet · 296</a:t>
             </a:r>
+            <a:endParaRPr sz="1100" b="0">
+              <a:solidFill>
+                <a:srgbClr val="6B7280"/>
+              </a:solidFill>
+              <a:latin typeface="Geist Mono"/>
+            </a:endParaRPr>
           </a:p>
         </p:txBody>
       </p:sp>
@@ -14598,7 +15461,7 @@
           <a:noFill/>
         </p:spPr>
         <p:txBody>
-          <a:bodyPr wrap="square" lIns="0" rIns="0" tIns="0" bIns="0" anchor="t">
+          <a:bodyPr wrap="square" lIns="0" tIns="0" rIns="0" bIns="0" anchor="t">
             <a:spAutoFit/>
           </a:bodyPr>
           <a:lstStyle/>
@@ -14617,6 +15480,12 @@
               </a:rPr>
               <a:t>Fast pool</a:t>
             </a:r>
+            <a:endParaRPr sz="1100" b="1" spc="60">
+              <a:solidFill>
+                <a:srgbClr val="0A0A0A"/>
+              </a:solidFill>
+              <a:latin typeface="Geist Mono"/>
+            </a:endParaRPr>
           </a:p>
         </p:txBody>
       </p:sp>
@@ -14727,7 +15596,7 @@
           <a:noFill/>
         </p:spPr>
         <p:txBody>
-          <a:bodyPr wrap="square" lIns="0" rIns="0" tIns="0" bIns="0" anchor="t">
+          <a:bodyPr wrap="square" lIns="0" tIns="0" rIns="0" bIns="0" anchor="t">
             <a:spAutoFit/>
           </a:bodyPr>
           <a:lstStyle/>
@@ -14746,6 +15615,12 @@
               </a:rPr>
               <a:t>Ethereum</a:t>
             </a:r>
+            <a:endParaRPr sz="1800" b="1">
+              <a:solidFill>
+                <a:srgbClr val="0A0A0A"/>
+              </a:solidFill>
+              <a:latin typeface="Geist"/>
+            </a:endParaRPr>
           </a:p>
         </p:txBody>
       </p:sp>
@@ -14766,7 +15641,7 @@
           <a:noFill/>
         </p:spPr>
         <p:txBody>
-          <a:bodyPr wrap="square" lIns="0" rIns="0" tIns="0" bIns="0" anchor="t">
+          <a:bodyPr wrap="square" lIns="0" tIns="0" rIns="0" bIns="0" anchor="t">
             <a:spAutoFit/>
           </a:bodyPr>
           <a:lstStyle/>
@@ -14785,6 +15660,12 @@
               </a:rPr>
               <a:t>Sepolia · 11155111</a:t>
             </a:r>
+            <a:endParaRPr sz="1100" b="0">
+              <a:solidFill>
+                <a:srgbClr val="6B7280"/>
+              </a:solidFill>
+              <a:latin typeface="Geist Mono"/>
+            </a:endParaRPr>
           </a:p>
         </p:txBody>
       </p:sp>
@@ -14805,7 +15686,7 @@
           <a:noFill/>
         </p:spPr>
         <p:txBody>
-          <a:bodyPr wrap="square" lIns="0" rIns="0" tIns="0" bIns="0" anchor="t">
+          <a:bodyPr wrap="square" lIns="0" tIns="0" rIns="0" bIns="0" anchor="t">
             <a:spAutoFit/>
           </a:bodyPr>
           <a:lstStyle/>
@@ -14824,6 +15705,12 @@
               </a:rPr>
               <a:t>Source only</a:t>
             </a:r>
+            <a:endParaRPr sz="1100" b="1" spc="60">
+              <a:solidFill>
+                <a:srgbClr val="0A0A0A"/>
+              </a:solidFill>
+              <a:latin typeface="Geist Mono"/>
+            </a:endParaRPr>
           </a:p>
         </p:txBody>
       </p:sp>
@@ -14844,7 +15731,7 @@
           <a:noFill/>
         </p:spPr>
         <p:txBody>
-          <a:bodyPr wrap="square" lIns="0" rIns="0" tIns="0" bIns="0" anchor="t">
+          <a:bodyPr wrap="square" lIns="0" tIns="0" rIns="0" bIns="0" anchor="t">
             <a:spAutoFit/>
           </a:bodyPr>
           <a:lstStyle/>
@@ -14863,6 +15750,12 @@
               </a:rPr>
               <a:t>A payment is a directed edge between any two. Not a hub-and-spoke bridge.</a:t>
             </a:r>
+            <a:endParaRPr sz="1300" b="0">
+              <a:solidFill>
+                <a:srgbClr val="6B7280"/>
+              </a:solidFill>
+              <a:latin typeface="Geist"/>
+            </a:endParaRPr>
           </a:p>
         </p:txBody>
       </p:sp>
@@ -14875,7 +15768,7 @@
 </file>
 
 <file path=ppt/slides/slide9.xml><?xml version="1.0" encoding="utf-8"?>
-<p:sld xmlns:a="http://schemas.openxmlformats.org/drawingml/2006/main" xmlns:p="http://schemas.openxmlformats.org/presentationml/2006/main" xmlns:r="http://schemas.openxmlformats.org/officeDocument/2006/relationships">
+<p:sld xmlns:a="http://schemas.openxmlformats.org/drawingml/2006/main" xmlns:r="http://schemas.openxmlformats.org/officeDocument/2006/relationships" xmlns:p="http://schemas.openxmlformats.org/presentationml/2006/main">
   <p:cSld>
     <p:spTree>
       <p:nvGrpSpPr>
@@ -14967,7 +15860,7 @@
           </a:fontRef>
         </p:style>
         <p:txBody>
-          <a:bodyPr rtlCol="0" anchor="ctr" lIns="0" rIns="0" tIns="0" bIns="0"/>
+          <a:bodyPr lIns="0" tIns="0" rIns="0" bIns="0" rtlCol="0" anchor="ctr"/>
           <a:lstStyle/>
           <a:p>
             <a:pPr algn="ctr"/>
@@ -14980,6 +15873,12 @@
               </a:rPr>
               <a:t>09</a:t>
             </a:r>
+            <a:endParaRPr sz="1100" b="1">
+              <a:solidFill>
+                <a:srgbClr val="FFFFFF"/>
+              </a:solidFill>
+              <a:latin typeface="Geist Mono"/>
+            </a:endParaRPr>
           </a:p>
         </p:txBody>
       </p:sp>
@@ -15000,7 +15899,7 @@
           <a:noFill/>
         </p:spPr>
         <p:txBody>
-          <a:bodyPr wrap="square" lIns="0" rIns="0" tIns="0" bIns="0" anchor="t">
+          <a:bodyPr wrap="square" lIns="0" tIns="0" rIns="0" bIns="0" anchor="t">
             <a:spAutoFit/>
           </a:bodyPr>
           <a:lstStyle/>
@@ -15019,6 +15918,12 @@
               </a:rPr>
               <a:t>TRUST MODEL</a:t>
             </a:r>
+            <a:endParaRPr sz="1100" b="1" spc="160">
+              <a:solidFill>
+                <a:srgbClr val="6B7280"/>
+              </a:solidFill>
+              <a:latin typeface="Geist Mono"/>
+            </a:endParaRPr>
           </a:p>
         </p:txBody>
       </p:sp>
@@ -15039,7 +15944,7 @@
           <a:noFill/>
         </p:spPr>
         <p:txBody>
-          <a:bodyPr wrap="square" lIns="0" rIns="0" tIns="0" bIns="0" anchor="t">
+          <a:bodyPr wrap="square" lIns="0" tIns="0" rIns="0" bIns="0" anchor="t">
             <a:spAutoFit/>
           </a:bodyPr>
           <a:lstStyle/>
@@ -15058,6 +15963,12 @@
               </a:rPr>
               <a:t>Stated plainly, not buried.</a:t>
             </a:r>
+            <a:endParaRPr sz="3800" b="1">
+              <a:solidFill>
+                <a:srgbClr val="0A0A0A"/>
+              </a:solidFill>
+              <a:latin typeface="Geist"/>
+            </a:endParaRPr>
           </a:p>
         </p:txBody>
       </p:sp>
@@ -15168,7 +16079,7 @@
           <a:noFill/>
         </p:spPr>
         <p:txBody>
-          <a:bodyPr wrap="square" lIns="0" rIns="0" tIns="0" bIns="0" anchor="t">
+          <a:bodyPr wrap="square" lIns="0" tIns="0" rIns="0" bIns="0" anchor="t">
             <a:spAutoFit/>
           </a:bodyPr>
           <a:lstStyle/>
@@ -15187,6 +16098,12 @@
               </a:rPr>
               <a:t>WHAT WE MITIGATE</a:t>
             </a:r>
+            <a:endParaRPr sz="1100" b="1" spc="120">
+              <a:solidFill>
+                <a:srgbClr val="0A0A0A"/>
+              </a:solidFill>
+              <a:latin typeface="Geist Mono"/>
+            </a:endParaRPr>
           </a:p>
         </p:txBody>
       </p:sp>
@@ -15207,7 +16124,7 @@
           <a:noFill/>
         </p:spPr>
         <p:txBody>
-          <a:bodyPr wrap="square" lIns="0" rIns="0" tIns="0" bIns="0" anchor="t">
+          <a:bodyPr wrap="square" lIns="0" tIns="0" rIns="0" bIns="0" anchor="t">
             <a:spAutoFit/>
           </a:bodyPr>
           <a:lstStyle/>
@@ -15226,6 +16143,12 @@
               </a:rPr>
               <a:t>—</a:t>
             </a:r>
+            <a:endParaRPr sz="1200" b="1">
+              <a:solidFill>
+                <a:srgbClr val="0A0A0A"/>
+              </a:solidFill>
+              <a:latin typeface="Geist"/>
+            </a:endParaRPr>
           </a:p>
         </p:txBody>
       </p:sp>
@@ -15246,7 +16169,7 @@
           <a:noFill/>
         </p:spPr>
         <p:txBody>
-          <a:bodyPr wrap="square" lIns="0" rIns="0" tIns="0" bIns="0" anchor="t">
+          <a:bodyPr wrap="square" lIns="0" tIns="0" rIns="0" bIns="0" anchor="t">
             <a:spAutoFit/>
           </a:bodyPr>
           <a:lstStyle/>
@@ -15265,6 +16188,12 @@
               </a:rPr>
               <a:t>CCTP offered as a trust-minimized alternative for the same payment</a:t>
             </a:r>
+            <a:endParaRPr sz="1250" b="0">
+              <a:solidFill>
+                <a:srgbClr val="6B7280"/>
+              </a:solidFill>
+              <a:latin typeface="Geist"/>
+            </a:endParaRPr>
           </a:p>
         </p:txBody>
       </p:sp>
@@ -15285,7 +16214,7 @@
           <a:noFill/>
         </p:spPr>
         <p:txBody>
-          <a:bodyPr wrap="square" lIns="0" rIns="0" tIns="0" bIns="0" anchor="t">
+          <a:bodyPr wrap="square" lIns="0" tIns="0" rIns="0" bIns="0" anchor="t">
             <a:spAutoFit/>
           </a:bodyPr>
           <a:lstStyle/>
@@ -15304,6 +16233,12 @@
               </a:rPr>
               <a:t>—</a:t>
             </a:r>
+            <a:endParaRPr sz="1200" b="1">
+              <a:solidFill>
+                <a:srgbClr val="0A0A0A"/>
+              </a:solidFill>
+              <a:latin typeface="Geist"/>
+            </a:endParaRPr>
           </a:p>
         </p:txBody>
       </p:sp>
@@ -15324,7 +16259,7 @@
           <a:noFill/>
         </p:spPr>
         <p:txBody>
-          <a:bodyPr wrap="square" lIns="0" rIns="0" tIns="0" bIns="0" anchor="t">
+          <a:bodyPr wrap="square" lIns="0" tIns="0" rIns="0" bIns="0" anchor="t">
             <a:spAutoFit/>
           </a:bodyPr>
           <a:lstStyle/>
@@ -15343,6 +16278,12 @@
               </a:rPr>
               <a:t>Pool ownership held by a Safe multisig, not a single EOA</a:t>
             </a:r>
+            <a:endParaRPr sz="1250" b="0">
+              <a:solidFill>
+                <a:srgbClr val="6B7280"/>
+              </a:solidFill>
+              <a:latin typeface="Geist"/>
+            </a:endParaRPr>
           </a:p>
         </p:txBody>
       </p:sp>
@@ -15363,7 +16304,7 @@
           <a:noFill/>
         </p:spPr>
         <p:txBody>
-          <a:bodyPr wrap="square" lIns="0" rIns="0" tIns="0" bIns="0" anchor="t">
+          <a:bodyPr wrap="square" lIns="0" tIns="0" rIns="0" bIns="0" anchor="t">
             <a:spAutoFit/>
           </a:bodyPr>
           <a:lstStyle/>
@@ -15382,6 +16323,12 @@
               </a:rPr>
               <a:t>—</a:t>
             </a:r>
+            <a:endParaRPr sz="1200" b="1">
+              <a:solidFill>
+                <a:srgbClr val="0A0A0A"/>
+              </a:solidFill>
+              <a:latin typeface="Geist"/>
+            </a:endParaRPr>
           </a:p>
         </p:txBody>
       </p:sp>
@@ -15402,7 +16349,7 @@
           <a:noFill/>
         </p:spPr>
         <p:txBody>
-          <a:bodyPr wrap="square" lIns="0" rIns="0" tIns="0" bIns="0" anchor="t">
+          <a:bodyPr wrap="square" lIns="0" tIns="0" rIns="0" bIns="0" anchor="t">
             <a:spAutoFit/>
           </a:bodyPr>
           <a:lstStyle/>
@@ -15421,6 +16368,12 @@
               </a:rPr>
               <a:t>Release authority is Ledger-backed, not a hot server key</a:t>
             </a:r>
+            <a:endParaRPr sz="1250" b="0">
+              <a:solidFill>
+                <a:srgbClr val="6B7280"/>
+              </a:solidFill>
+              <a:latin typeface="Geist"/>
+            </a:endParaRPr>
           </a:p>
         </p:txBody>
       </p:sp>
@@ -15441,7 +16394,7 @@
           <a:noFill/>
         </p:spPr>
         <p:txBody>
-          <a:bodyPr wrap="square" lIns="0" rIns="0" tIns="0" bIns="0" anchor="t">
+          <a:bodyPr wrap="square" lIns="0" tIns="0" rIns="0" bIns="0" anchor="t">
             <a:spAutoFit/>
           </a:bodyPr>
           <a:lstStyle/>
@@ -15460,6 +16413,12 @@
               </a:rPr>
               <a:t>—</a:t>
             </a:r>
+            <a:endParaRPr sz="1200" b="1">
+              <a:solidFill>
+                <a:srgbClr val="0A0A0A"/>
+              </a:solidFill>
+              <a:latin typeface="Geist"/>
+            </a:endParaRPr>
           </a:p>
         </p:txBody>
       </p:sp>
@@ -15480,7 +16439,7 @@
           <a:noFill/>
         </p:spPr>
         <p:txBody>
-          <a:bodyPr wrap="square" lIns="0" rIns="0" tIns="0" bIns="0" anchor="t">
+          <a:bodyPr wrap="square" lIns="0" tIns="0" rIns="0" bIns="0" anchor="t">
             <a:spAutoFit/>
           </a:bodyPr>
           <a:lstStyle/>
@@ -15499,6 +16458,12 @@
               </a:rPr>
               <a:t>State is durable and reconciled from chain events</a:t>
             </a:r>
+            <a:endParaRPr sz="1250" b="0">
+              <a:solidFill>
+                <a:srgbClr val="6B7280"/>
+              </a:solidFill>
+              <a:latin typeface="Geist"/>
+            </a:endParaRPr>
           </a:p>
         </p:txBody>
       </p:sp>
@@ -15519,7 +16484,7 @@
           <a:noFill/>
         </p:spPr>
         <p:txBody>
-          <a:bodyPr wrap="square" lIns="0" rIns="0" tIns="0" bIns="0" anchor="t">
+          <a:bodyPr wrap="square" lIns="0" tIns="0" rIns="0" bIns="0" anchor="t">
             <a:spAutoFit/>
           </a:bodyPr>
           <a:lstStyle/>
@@ -15538,6 +16503,12 @@
               </a:rPr>
               <a:t>WHAT WE DON'T CLAIM</a:t>
             </a:r>
+            <a:endParaRPr sz="1100" b="1" spc="120">
+              <a:solidFill>
+                <a:srgbClr val="0A0A0A"/>
+              </a:solidFill>
+              <a:latin typeface="Geist Mono"/>
+            </a:endParaRPr>
           </a:p>
         </p:txBody>
       </p:sp>
@@ -15558,7 +16529,7 @@
           <a:noFill/>
         </p:spPr>
         <p:txBody>
-          <a:bodyPr wrap="square" lIns="0" rIns="0" tIns="0" bIns="0" anchor="t">
+          <a:bodyPr wrap="square" lIns="0" tIns="0" rIns="0" bIns="0" anchor="t">
             <a:spAutoFit/>
           </a:bodyPr>
           <a:lstStyle/>
@@ -15577,6 +16548,12 @@
               </a:rPr>
               <a:t>—</a:t>
             </a:r>
+            <a:endParaRPr sz="1200" b="1">
+              <a:solidFill>
+                <a:srgbClr val="0A0A0A"/>
+              </a:solidFill>
+              <a:latin typeface="Geist"/>
+            </a:endParaRPr>
           </a:p>
         </p:txBody>
       </p:sp>
@@ -15597,7 +16574,7 @@
           <a:noFill/>
         </p:spPr>
         <p:txBody>
-          <a:bodyPr wrap="square" lIns="0" rIns="0" tIns="0" bIns="0" anchor="t">
+          <a:bodyPr wrap="square" lIns="0" tIns="0" rIns="0" bIns="0" anchor="t">
             <a:spAutoFit/>
           </a:bodyPr>
           <a:lstStyle/>
@@ -15616,6 +16593,12 @@
               </a:rPr>
               <a:t>The fast-pool route is custodial — the relayer controls liquidity and decides when to release</a:t>
             </a:r>
+            <a:endParaRPr sz="1250" b="0">
+              <a:solidFill>
+                <a:srgbClr val="6B7280"/>
+              </a:solidFill>
+              <a:latin typeface="Geist"/>
+            </a:endParaRPr>
           </a:p>
         </p:txBody>
       </p:sp>
@@ -15636,7 +16619,7 @@
           <a:noFill/>
         </p:spPr>
         <p:txBody>
-          <a:bodyPr wrap="square" lIns="0" rIns="0" tIns="0" bIns="0" anchor="t">
+          <a:bodyPr wrap="square" lIns="0" tIns="0" rIns="0" bIns="0" anchor="t">
             <a:spAutoFit/>
           </a:bodyPr>
           <a:lstStyle/>
@@ -15655,6 +16638,12 @@
               </a:rPr>
               <a:t>—</a:t>
             </a:r>
+            <a:endParaRPr sz="1200" b="1">
+              <a:solidFill>
+                <a:srgbClr val="0A0A0A"/>
+              </a:solidFill>
+              <a:latin typeface="Geist"/>
+            </a:endParaRPr>
           </a:p>
         </p:txBody>
       </p:sp>
@@ -15675,7 +16664,7 @@
           <a:noFill/>
         </p:spPr>
         <p:txBody>
-          <a:bodyPr wrap="square" lIns="0" rIns="0" tIns="0" bIns="0" anchor="t">
+          <a:bodyPr wrap="square" lIns="0" tIns="0" rIns="0" bIns="0" anchor="t">
             <a:spAutoFit/>
           </a:bodyPr>
           <a:lstStyle/>
@@ -15694,6 +16683,12 @@
               </a:rPr>
               <a:t>Release is not decentralized. A bonded watcher network is the next real trust reduction, and it is not in this build</a:t>
             </a:r>
+            <a:endParaRPr sz="1250" b="0">
+              <a:solidFill>
+                <a:srgbClr val="6B7280"/>
+              </a:solidFill>
+              <a:latin typeface="Geist"/>
+            </a:endParaRPr>
           </a:p>
         </p:txBody>
       </p:sp>
@@ -15780,7 +16775,7 @@
           </a:fontRef>
         </p:style>
         <p:txBody>
-          <a:bodyPr rtlCol="0" anchor="ctr" wrap="square" lIns="182880" rIns="182880" tIns="73152" bIns="73152"/>
+          <a:bodyPr wrap="square" lIns="182880" tIns="73152" rIns="182880" bIns="73152" rtlCol="0" anchor="ctr"/>
           <a:lstStyle/>
           <a:p>
             <a:pPr algn="ctr">
@@ -15797,6 +16792,12 @@
               </a:rPr>
               <a:t>Same tradeoff early Across and Hop shipped — and the honest reason the fast route is fast.</a:t>
             </a:r>
+            <a:endParaRPr sz="1400" b="1">
+              <a:solidFill>
+                <a:srgbClr val="0A0A0A"/>
+              </a:solidFill>
+              <a:latin typeface="Geist"/>
+            </a:endParaRPr>
           </a:p>
         </p:txBody>
       </p:sp>
@@ -16124,6 +17125,10 @@
       </a:style>
     </a:lnDef>
   </a:objectDefaults>
-  <a:extraClrSchemeLst/>
+  <a:extLst>
+    <a:ext uri="{05A4C25C-085E-4340-85A3-A5531E510DB2}">
+      <thm15:themeFamily xmlns:thm15="http://schemas.microsoft.com/office/thememl/2012/main" name="Office Theme" id="{62F939B6-93AF-4DB8-9C6B-D6C7DFDC589F}" vid="{4A3C46E8-61CC-4603-A589-7422A47A8E4A}"/>
+    </a:ext>
+  </a:extLst>
 </a:theme>
 </file>